--- a/Lectures/Lecture4-Formulation.pptx
+++ b/Lectures/Lecture4-Formulation.pptx
@@ -5,38 +5,45 @@
     <p:sldMasterId id="2147483648" r:id="rId1"/>
   </p:sldMasterIdLst>
   <p:notesMasterIdLst>
-    <p:notesMasterId r:id="rId28"/>
+    <p:notesMasterId r:id="rId32"/>
   </p:notesMasterIdLst>
   <p:sldIdLst>
     <p:sldId id="256" r:id="rId2"/>
     <p:sldId id="281" r:id="rId3"/>
     <p:sldId id="295" r:id="rId4"/>
-    <p:sldId id="430" r:id="rId5"/>
-    <p:sldId id="424" r:id="rId6"/>
-    <p:sldId id="438" r:id="rId7"/>
-    <p:sldId id="440" r:id="rId8"/>
-    <p:sldId id="439" r:id="rId9"/>
+    <p:sldId id="445" r:id="rId5"/>
+    <p:sldId id="430" r:id="rId6"/>
+    <p:sldId id="424" r:id="rId7"/>
+    <p:sldId id="443" r:id="rId8"/>
+    <p:sldId id="444" r:id="rId9"/>
     <p:sldId id="436" r:id="rId10"/>
     <p:sldId id="425" r:id="rId11"/>
     <p:sldId id="434" r:id="rId12"/>
     <p:sldId id="429" r:id="rId13"/>
     <p:sldId id="435" r:id="rId14"/>
-    <p:sldId id="428" r:id="rId15"/>
-    <p:sldId id="441" r:id="rId16"/>
-    <p:sldId id="261" r:id="rId17"/>
-    <p:sldId id="269" r:id="rId18"/>
-    <p:sldId id="273" r:id="rId19"/>
-    <p:sldId id="277" r:id="rId20"/>
-    <p:sldId id="285" r:id="rId21"/>
-    <p:sldId id="427" r:id="rId22"/>
-    <p:sldId id="432" r:id="rId23"/>
-    <p:sldId id="442" r:id="rId24"/>
-    <p:sldId id="431" r:id="rId25"/>
-    <p:sldId id="433" r:id="rId26"/>
-    <p:sldId id="437" r:id="rId27"/>
+    <p:sldId id="441" r:id="rId15"/>
+    <p:sldId id="439" r:id="rId16"/>
+    <p:sldId id="438" r:id="rId17"/>
+    <p:sldId id="440" r:id="rId18"/>
+    <p:sldId id="446" r:id="rId19"/>
+    <p:sldId id="447" r:id="rId20"/>
+    <p:sldId id="261" r:id="rId21"/>
+    <p:sldId id="269" r:id="rId22"/>
+    <p:sldId id="277" r:id="rId23"/>
+    <p:sldId id="285" r:id="rId24"/>
+    <p:sldId id="427" r:id="rId25"/>
+    <p:sldId id="432" r:id="rId26"/>
+    <p:sldId id="442" r:id="rId27"/>
+    <p:sldId id="448" r:id="rId28"/>
+    <p:sldId id="431" r:id="rId29"/>
+    <p:sldId id="433" r:id="rId30"/>
+    <p:sldId id="437" r:id="rId31"/>
   </p:sldIdLst>
   <p:sldSz cx="12192000" cy="6858000"/>
   <p:notesSz cx="6858000" cy="9144000"/>
+  <p:custDataLst>
+    <p:tags r:id="rId33"/>
+  </p:custDataLst>
   <p:defaultTextStyle>
     <a:defPPr marR="0" lvl="0" algn="l" rtl="0">
       <a:lnSpc>
@@ -267,11 +274,53 @@
     </a:lvl9pPr>
   </p:defaultTextStyle>
   <p:extLst>
+    <p:ext uri="{521415D9-36F7-43E2-AB2F-B90AF26B5E84}">
+      <p14:sectionLst xmlns:p14="http://schemas.microsoft.com/office/powerpoint/2010/main">
+        <p14:section name="Default Section" id="{D729827C-632A-B347-966B-4CCEC4B754B0}">
+          <p14:sldIdLst>
+            <p14:sldId id="256"/>
+            <p14:sldId id="281"/>
+            <p14:sldId id="295"/>
+            <p14:sldId id="445"/>
+            <p14:sldId id="430"/>
+            <p14:sldId id="424"/>
+            <p14:sldId id="443"/>
+            <p14:sldId id="444"/>
+            <p14:sldId id="436"/>
+            <p14:sldId id="425"/>
+            <p14:sldId id="434"/>
+            <p14:sldId id="429"/>
+            <p14:sldId id="435"/>
+            <p14:sldId id="441"/>
+            <p14:sldId id="439"/>
+            <p14:sldId id="438"/>
+            <p14:sldId id="440"/>
+            <p14:sldId id="446"/>
+            <p14:sldId id="447"/>
+            <p14:sldId id="261"/>
+            <p14:sldId id="269"/>
+            <p14:sldId id="277"/>
+            <p14:sldId id="285"/>
+          </p14:sldIdLst>
+        </p14:section>
+        <p14:section name="Baselines" id="{E231EA99-A2D7-1B49-9484-CE40EB1FE5AF}">
+          <p14:sldIdLst>
+            <p14:sldId id="427"/>
+            <p14:sldId id="432"/>
+            <p14:sldId id="442"/>
+            <p14:sldId id="448"/>
+            <p14:sldId id="431"/>
+            <p14:sldId id="433"/>
+            <p14:sldId id="437"/>
+          </p14:sldIdLst>
+        </p14:section>
+      </p14:sectionLst>
+    </p:ext>
     <p:ext uri="{EFAFB233-063F-42B5-8137-9DF3F51BA10A}">
       <p15:sldGuideLst xmlns:p15="http://schemas.microsoft.com/office/powerpoint/2012/main"/>
     </p:ext>
     <p:ext uri="http://customooxmlschemas.google.com/">
-      <go:slidesCustomData xmlns:go="http://customooxmlschemas.google.com/" xmlns:p15="http://schemas.microsoft.com/office/powerpoint/2012/main" xmlns:p14="http://schemas.microsoft.com/office/powerpoint/2010/main" xmlns:com="http://schemas.openxmlformats.org/drawingml/2006/compatibility" xmlns:pvml="urn:schemas-microsoft-com:office:powerpoint" xmlns:v="urn:schemas-microsoft-com:vml" xmlns:o="urn:schemas-microsoft-com:office:office" xmlns:dgm="http://schemas.openxmlformats.org/drawingml/2006/diagram" xmlns:c="http://schemas.openxmlformats.org/drawingml/2006/chart" xmlns:mv="urn:schemas-microsoft-com:mac:vml" xmlns:mc="http://schemas.openxmlformats.org/markup-compatibility/2006" xmlns="" r:id="rId30" roundtripDataSignature="AMtx7mjFyVUGRZWio+dc9dxzYsimUxNJbg=="/>
+      <go:slidesCustomData xmlns="" xmlns:mc="http://schemas.openxmlformats.org/markup-compatibility/2006" xmlns:mv="urn:schemas-microsoft-com:mac:vml" xmlns:c="http://schemas.openxmlformats.org/drawingml/2006/chart" xmlns:dgm="http://schemas.openxmlformats.org/drawingml/2006/diagram" xmlns:o="urn:schemas-microsoft-com:office:office" xmlns:v="urn:schemas-microsoft-com:vml" xmlns:pvml="urn:schemas-microsoft-com:office:powerpoint" xmlns:com="http://schemas.openxmlformats.org/drawingml/2006/compatibility" xmlns:p14="http://schemas.microsoft.com/office/powerpoint/2010/main" xmlns:p15="http://schemas.microsoft.com/office/powerpoint/2012/main" xmlns:go="http://customooxmlschemas.google.com/" r:id="rId34" roundtripDataSignature="AMtx7mjFyVUGRZWio+dc9dxzYsimUxNJbg=="/>
     </p:ext>
   </p:extLst>
 </p:presentation>
@@ -6792,110 +6841,6 @@
   <p:cSld>
     <p:spTree>
       <p:nvGrpSpPr>
-        <p:cNvPr id="1" name="Shape 229"/>
-        <p:cNvGrpSpPr/>
-        <p:nvPr/>
-      </p:nvGrpSpPr>
-      <p:grpSpPr>
-        <a:xfrm>
-          <a:off x="0" y="0"/>
-          <a:ext cx="0" cy="0"/>
-          <a:chOff x="0" y="0"/>
-          <a:chExt cx="0" cy="0"/>
-        </a:xfrm>
-      </p:grpSpPr>
-      <p:sp>
-        <p:nvSpPr>
-          <p:cNvPr id="230" name="Google Shape;230;g13a827b83f3_0_10:notes"/>
-          <p:cNvSpPr>
-            <a:spLocks noGrp="1" noRot="1" noChangeAspect="1"/>
-          </p:cNvSpPr>
-          <p:nvPr>
-            <p:ph type="sldImg" idx="2"/>
-          </p:nvPr>
-        </p:nvSpPr>
-        <p:spPr>
-          <a:xfrm>
-            <a:off x="381000" y="685800"/>
-            <a:ext cx="6096000" cy="3429000"/>
-          </a:xfrm>
-          <a:custGeom>
-            <a:avLst/>
-            <a:gdLst/>
-            <a:ahLst/>
-            <a:cxnLst/>
-            <a:rect l="l" t="t" r="r" b="b"/>
-            <a:pathLst>
-              <a:path w="120000" h="120000" extrusionOk="0">
-                <a:moveTo>
-                  <a:pt x="0" y="0"/>
-                </a:moveTo>
-                <a:lnTo>
-                  <a:pt x="120000" y="0"/>
-                </a:lnTo>
-                <a:lnTo>
-                  <a:pt x="120000" y="120000"/>
-                </a:lnTo>
-                <a:lnTo>
-                  <a:pt x="0" y="120000"/>
-                </a:lnTo>
-                <a:close/>
-              </a:path>
-            </a:pathLst>
-          </a:custGeom>
-        </p:spPr>
-      </p:sp>
-      <p:sp>
-        <p:nvSpPr>
-          <p:cNvPr id="231" name="Google Shape;231;g13a827b83f3_0_10:notes"/>
-          <p:cNvSpPr txBox="1">
-            <a:spLocks noGrp="1"/>
-          </p:cNvSpPr>
-          <p:nvPr>
-            <p:ph type="body" idx="1"/>
-          </p:nvPr>
-        </p:nvSpPr>
-        <p:spPr>
-          <a:xfrm>
-            <a:off x="685800" y="4343400"/>
-            <a:ext cx="5486400" cy="4114800"/>
-          </a:xfrm>
-          <a:prstGeom prst="rect">
-            <a:avLst/>
-          </a:prstGeom>
-        </p:spPr>
-        <p:txBody>
-          <a:bodyPr spcFirstLastPara="1" wrap="square" lIns="91425" tIns="91425" rIns="91425" bIns="91425" anchor="t" anchorCtr="0">
-            <a:noAutofit/>
-          </a:bodyPr>
-          <a:lstStyle/>
-          <a:p>
-            <a:pPr marL="0" lvl="0" indent="0" algn="l" rtl="0">
-              <a:spcBef>
-                <a:spcPts val="0"/>
-              </a:spcBef>
-              <a:spcAft>
-                <a:spcPts val="0"/>
-              </a:spcAft>
-              <a:buNone/>
-            </a:pPr>
-            <a:endParaRPr/>
-          </a:p>
-        </p:txBody>
-      </p:sp>
-    </p:spTree>
-  </p:cSld>
-  <p:clrMapOvr>
-    <a:masterClrMapping/>
-  </p:clrMapOvr>
-</p:notes>
-</file>
-
-<file path=ppt/notesSlides/notesSlide5.xml><?xml version="1.0" encoding="utf-8"?>
-<p:notes xmlns:a="http://schemas.openxmlformats.org/drawingml/2006/main" xmlns:r="http://schemas.openxmlformats.org/officeDocument/2006/relationships" xmlns:p="http://schemas.openxmlformats.org/presentationml/2006/main" showMasterSp="0" showMasterPhAnim="0">
-  <p:cSld>
-    <p:spTree>
-      <p:nvGrpSpPr>
         <p:cNvPr id="1" name="Shape 259"/>
         <p:cNvGrpSpPr/>
         <p:nvPr/>
@@ -6995,7 +6940,7 @@
 </p:notes>
 </file>
 
-<file path=ppt/notesSlides/notesSlide6.xml><?xml version="1.0" encoding="utf-8"?>
+<file path=ppt/notesSlides/notesSlide5.xml><?xml version="1.0" encoding="utf-8"?>
 <p:notes xmlns:a="http://schemas.openxmlformats.org/drawingml/2006/main" xmlns:r="http://schemas.openxmlformats.org/officeDocument/2006/relationships" xmlns:p="http://schemas.openxmlformats.org/presentationml/2006/main" showMasterSp="0" showMasterPhAnim="0">
   <p:cSld>
     <p:spTree>
@@ -10515,7 +10460,7 @@
           <p:cNvPr id="2" name="Text Placeholder 1">
             <a:extLst>
               <a:ext uri="{FF2B5EF4-FFF2-40B4-BE49-F238E27FC236}">
-                <a16:creationId xmlns:a16="http://schemas.microsoft.com/office/drawing/2014/main" id="{853D6B69-44D2-D449-B9CE-63D5E2BFE8A0}"/>
+                <a16:creationId xmlns:a16="http://schemas.microsoft.com/office/drawing/2014/main" id="{FDCAAA01-7C5B-076B-04B2-7AC15EDE262F}"/>
               </a:ext>
             </a:extLst>
           </p:cNvPr>
@@ -10531,9 +10476,12 @@
           <a:bodyPr/>
           <a:lstStyle/>
           <a:p>
+            <a:pPr marL="114300" indent="0">
+              <a:buNone/>
+            </a:pPr>
             <a:r>
               <a:rPr lang="en-US" dirty="0"/>
-              <a:t>Recommendation System </a:t>
+              <a:t> - </a:t>
             </a:r>
           </a:p>
         </p:txBody>
@@ -10543,7 +10491,7 @@
           <p:cNvPr id="3" name="Title 2">
             <a:extLst>
               <a:ext uri="{FF2B5EF4-FFF2-40B4-BE49-F238E27FC236}">
-                <a16:creationId xmlns:a16="http://schemas.microsoft.com/office/drawing/2014/main" id="{D3765B02-360A-1F41-913A-E71E561203CC}"/>
+                <a16:creationId xmlns:a16="http://schemas.microsoft.com/office/drawing/2014/main" id="{6FAF1668-A042-64F6-8777-4A87422E4841}"/>
               </a:ext>
             </a:extLst>
           </p:cNvPr>
@@ -10561,7 +10509,7 @@
           <a:p>
             <a:r>
               <a:rPr lang="en-US" dirty="0"/>
-              <a:t>Analytical Formulation Examples</a:t>
+              <a:t>Impact of formulation choices</a:t>
             </a:r>
           </a:p>
         </p:txBody>
@@ -10569,7 +10517,7 @@
     </p:spTree>
     <p:extLst>
       <p:ext uri="{BB962C8B-B14F-4D97-AF65-F5344CB8AC3E}">
-        <p14:creationId xmlns:p14="http://schemas.microsoft.com/office/powerpoint/2010/main" val="821576765"/>
+        <p14:creationId xmlns:p14="http://schemas.microsoft.com/office/powerpoint/2010/main" val="3717005941"/>
       </p:ext>
     </p:extLst>
   </p:cSld>
@@ -10598,41 +10546,10 @@
       </p:grpSpPr>
       <p:sp>
         <p:nvSpPr>
-          <p:cNvPr id="2" name="Text Placeholder 1">
-            <a:extLst>
-              <a:ext uri="{FF2B5EF4-FFF2-40B4-BE49-F238E27FC236}">
-                <a16:creationId xmlns:a16="http://schemas.microsoft.com/office/drawing/2014/main" id="{FDCAAA01-7C5B-076B-04B2-7AC15EDE262F}"/>
-              </a:ext>
-            </a:extLst>
-          </p:cNvPr>
-          <p:cNvSpPr>
-            <a:spLocks noGrp="1"/>
-          </p:cNvSpPr>
-          <p:nvPr>
-            <p:ph type="body" idx="1"/>
-          </p:nvPr>
-        </p:nvSpPr>
-        <p:spPr/>
-        <p:txBody>
-          <a:bodyPr/>
-          <a:lstStyle/>
-          <a:p>
-            <a:pPr marL="114300" indent="0">
-              <a:buNone/>
-            </a:pPr>
-            <a:r>
-              <a:rPr lang="en-US" dirty="0"/>
-              <a:t> - </a:t>
-            </a:r>
-          </a:p>
-        </p:txBody>
-      </p:sp>
-      <p:sp>
-        <p:nvSpPr>
           <p:cNvPr id="3" name="Title 2">
             <a:extLst>
               <a:ext uri="{FF2B5EF4-FFF2-40B4-BE49-F238E27FC236}">
-                <a16:creationId xmlns:a16="http://schemas.microsoft.com/office/drawing/2014/main" id="{6FAF1668-A042-64F6-8777-4A87422E4841}"/>
+                <a16:creationId xmlns:a16="http://schemas.microsoft.com/office/drawing/2014/main" id="{FA5EDE9B-A257-2333-4DB4-CBD380E13236}"/>
               </a:ext>
             </a:extLst>
           </p:cNvPr>
@@ -10650,15 +10567,370 @@
           <a:p>
             <a:r>
               <a:rPr lang="en-US" dirty="0"/>
-              <a:t>Impact of formulation choices</a:t>
-            </a:r>
+              <a:t>Analytical Formulation</a:t>
+            </a:r>
+          </a:p>
+        </p:txBody>
+      </p:sp>
+      <p:sp>
+        <p:nvSpPr>
+          <p:cNvPr id="12" name="TextBox 11">
+            <a:extLst>
+              <a:ext uri="{FF2B5EF4-FFF2-40B4-BE49-F238E27FC236}">
+                <a16:creationId xmlns:a16="http://schemas.microsoft.com/office/drawing/2014/main" id="{92628BEE-B8E7-C511-5764-E82AF6189A5B}"/>
+              </a:ext>
+            </a:extLst>
+          </p:cNvPr>
+          <p:cNvSpPr txBox="1"/>
+          <p:nvPr/>
+        </p:nvSpPr>
+        <p:spPr>
+          <a:xfrm>
+            <a:off x="161381" y="1607442"/>
+            <a:ext cx="3354513" cy="5139869"/>
+          </a:xfrm>
+          <a:prstGeom prst="rect">
+            <a:avLst/>
+          </a:prstGeom>
+          <a:solidFill>
+            <a:schemeClr val="bg2">
+              <a:lumMod val="20000"/>
+              <a:lumOff val="80000"/>
+            </a:schemeClr>
+          </a:solidFill>
+        </p:spPr>
+        <p:style>
+          <a:lnRef idx="2">
+            <a:schemeClr val="accent3">
+              <a:shade val="50000"/>
+            </a:schemeClr>
+          </a:lnRef>
+          <a:fillRef idx="1">
+            <a:schemeClr val="accent3"/>
+          </a:fillRef>
+          <a:effectRef idx="0">
+            <a:schemeClr val="accent3"/>
+          </a:effectRef>
+          <a:fontRef idx="minor">
+            <a:schemeClr val="lt1"/>
+          </a:fontRef>
+        </p:style>
+        <p:txBody>
+          <a:bodyPr wrap="square">
+            <a:spAutoFit/>
+          </a:bodyPr>
+          <a:lstStyle/>
+          <a:p>
+            <a:pPr rtl="0">
+              <a:spcBef>
+                <a:spcPts val="0"/>
+              </a:spcBef>
+              <a:spcAft>
+                <a:spcPts val="0"/>
+              </a:spcAft>
+            </a:pPr>
+            <a:br>
+              <a:rPr lang="en-US" sz="2000" b="0" dirty="0">
+                <a:effectLst/>
+              </a:rPr>
+            </a:br>
+            <a:r>
+              <a:rPr lang="en-US" sz="2000" b="0" i="0" u="none" strike="noStrike" dirty="0">
+                <a:solidFill>
+                  <a:srgbClr val="FF0000"/>
+                </a:solidFill>
+                <a:effectLst/>
+                <a:latin typeface="Arial" panose="020B0604020202020204" pitchFamily="34" charset="0"/>
+              </a:rPr>
+              <a:t>How often is the recommendation/decision being made?</a:t>
+            </a:r>
+            <a:endParaRPr lang="en-US" sz="2000" b="0" dirty="0">
+              <a:effectLst/>
+            </a:endParaRPr>
+          </a:p>
+          <a:p>
+            <a:pPr rtl="0">
+              <a:spcBef>
+                <a:spcPts val="0"/>
+              </a:spcBef>
+              <a:spcAft>
+                <a:spcPts val="0"/>
+              </a:spcAft>
+            </a:pPr>
+            <a:br>
+              <a:rPr lang="en-US" sz="2000" b="0" dirty="0">
+                <a:effectLst/>
+              </a:rPr>
+            </a:br>
+            <a:r>
+              <a:rPr lang="en-US" sz="2000" b="0" i="0" u="none" strike="noStrike" dirty="0">
+                <a:solidFill>
+                  <a:srgbClr val="0000FF"/>
+                </a:solidFill>
+                <a:effectLst/>
+                <a:latin typeface="Arial" panose="020B0604020202020204" pitchFamily="34" charset="0"/>
+              </a:rPr>
+              <a:t>Who/what is included in the cohort?</a:t>
+            </a:r>
+            <a:endParaRPr lang="en-US" sz="2000" b="0" dirty="0">
+              <a:effectLst/>
+            </a:endParaRPr>
+          </a:p>
+          <a:p>
+            <a:pPr rtl="0">
+              <a:spcBef>
+                <a:spcPts val="0"/>
+              </a:spcBef>
+              <a:spcAft>
+                <a:spcPts val="0"/>
+              </a:spcAft>
+            </a:pPr>
+            <a:br>
+              <a:rPr lang="en-US" sz="2000" b="0" dirty="0">
+                <a:effectLst/>
+              </a:rPr>
+            </a:br>
+            <a:r>
+              <a:rPr lang="en-US" sz="2000" b="0" i="0" u="none" strike="noStrike" dirty="0">
+                <a:solidFill>
+                  <a:srgbClr val="FF00FF"/>
+                </a:solidFill>
+                <a:effectLst/>
+                <a:latin typeface="Arial" panose="020B0604020202020204" pitchFamily="34" charset="0"/>
+              </a:rPr>
+              <a:t>What is the output?</a:t>
+            </a:r>
+            <a:endParaRPr lang="en-US" sz="2000" b="0" dirty="0">
+              <a:effectLst/>
+            </a:endParaRPr>
+          </a:p>
+          <a:p>
+            <a:pPr rtl="0">
+              <a:spcBef>
+                <a:spcPts val="0"/>
+              </a:spcBef>
+              <a:spcAft>
+                <a:spcPts val="0"/>
+              </a:spcAft>
+            </a:pPr>
+            <a:br>
+              <a:rPr lang="en-US" sz="2000" b="0" dirty="0">
+                <a:effectLst/>
+              </a:rPr>
+            </a:br>
+            <a:r>
+              <a:rPr lang="en-US" sz="2000" b="0" i="0" u="none" strike="noStrike" dirty="0">
+                <a:solidFill>
+                  <a:srgbClr val="274E13"/>
+                </a:solidFill>
+                <a:effectLst/>
+                <a:latin typeface="Arial" panose="020B0604020202020204" pitchFamily="34" charset="0"/>
+              </a:rPr>
+              <a:t>What outcome are you predicting/estimating/changing?</a:t>
+            </a:r>
+            <a:endParaRPr lang="en-US" sz="2000" b="0" dirty="0">
+              <a:effectLst/>
+            </a:endParaRPr>
+          </a:p>
+          <a:p>
+            <a:pPr rtl="0">
+              <a:spcBef>
+                <a:spcPts val="0"/>
+              </a:spcBef>
+              <a:spcAft>
+                <a:spcPts val="0"/>
+              </a:spcAft>
+            </a:pPr>
+            <a:br>
+              <a:rPr lang="en-US" sz="2000" b="0" dirty="0">
+                <a:effectLst/>
+              </a:rPr>
+            </a:br>
+            <a:r>
+              <a:rPr lang="en-US" sz="2000" b="0" i="0" u="none" strike="noStrike" dirty="0">
+                <a:solidFill>
+                  <a:srgbClr val="B45F06"/>
+                </a:solidFill>
+                <a:effectLst/>
+                <a:latin typeface="Arial" panose="020B0604020202020204" pitchFamily="34" charset="0"/>
+              </a:rPr>
+              <a:t>For what purpose?</a:t>
+            </a:r>
+            <a:endParaRPr lang="en-US" sz="2000" b="0" dirty="0">
+              <a:effectLst/>
+            </a:endParaRPr>
+          </a:p>
+          <a:p>
+            <a:br>
+              <a:rPr lang="en-US" dirty="0"/>
+            </a:br>
+            <a:endParaRPr lang="en-US" dirty="0"/>
+          </a:p>
+        </p:txBody>
+      </p:sp>
+      <p:sp>
+        <p:nvSpPr>
+          <p:cNvPr id="14" name="TextBox 13">
+            <a:extLst>
+              <a:ext uri="{FF2B5EF4-FFF2-40B4-BE49-F238E27FC236}">
+                <a16:creationId xmlns:a16="http://schemas.microsoft.com/office/drawing/2014/main" id="{4E220471-6DE3-15C3-47EA-D5F277E4C9DD}"/>
+              </a:ext>
+            </a:extLst>
+          </p:cNvPr>
+          <p:cNvSpPr txBox="1"/>
+          <p:nvPr/>
+        </p:nvSpPr>
+        <p:spPr>
+          <a:xfrm>
+            <a:off x="3673012" y="1607442"/>
+            <a:ext cx="8101172" cy="4052391"/>
+          </a:xfrm>
+          <a:prstGeom prst="rect">
+            <a:avLst/>
+          </a:prstGeom>
+          <a:noFill/>
+        </p:spPr>
+        <p:txBody>
+          <a:bodyPr wrap="square">
+            <a:spAutoFit/>
+          </a:bodyPr>
+          <a:lstStyle/>
+          <a:p>
+            <a:pPr rtl="0">
+              <a:lnSpc>
+                <a:spcPct val="150000"/>
+              </a:lnSpc>
+              <a:spcBef>
+                <a:spcPts val="0"/>
+              </a:spcBef>
+              <a:spcAft>
+                <a:spcPts val="1600"/>
+              </a:spcAft>
+            </a:pPr>
+            <a:r>
+              <a:rPr lang="en-US" sz="2400" b="0" i="0" u="none" strike="noStrike" dirty="0">
+                <a:solidFill>
+                  <a:srgbClr val="FF0000"/>
+                </a:solidFill>
+                <a:effectLst/>
+                <a:latin typeface="Arial" panose="020B0604020202020204" pitchFamily="34" charset="0"/>
+              </a:rPr>
+              <a:t>On the first day of every semester</a:t>
+            </a:r>
+            <a:r>
+              <a:rPr lang="en-US" sz="2400" b="0" i="0" u="none" strike="noStrike" dirty="0">
+                <a:solidFill>
+                  <a:srgbClr val="595959"/>
+                </a:solidFill>
+                <a:effectLst/>
+                <a:latin typeface="Arial" panose="020B0604020202020204" pitchFamily="34" charset="0"/>
+              </a:rPr>
+              <a:t>, for </a:t>
+            </a:r>
+            <a:r>
+              <a:rPr lang="en-US" sz="2400" b="0" i="0" u="none" strike="noStrike" dirty="0">
+                <a:solidFill>
+                  <a:srgbClr val="0000FF"/>
+                </a:solidFill>
+                <a:effectLst/>
+                <a:latin typeface="Arial" panose="020B0604020202020204" pitchFamily="34" charset="0"/>
+              </a:rPr>
+              <a:t>all the students who are currently enrolled in an undergraduate degree program</a:t>
+            </a:r>
+            <a:r>
+              <a:rPr lang="en-US" sz="2400" b="0" i="0" u="none" strike="noStrike" dirty="0">
+                <a:solidFill>
+                  <a:srgbClr val="595959"/>
+                </a:solidFill>
+                <a:effectLst/>
+                <a:latin typeface="Arial" panose="020B0604020202020204" pitchFamily="34" charset="0"/>
+              </a:rPr>
+              <a:t>, can we identify the </a:t>
+            </a:r>
+            <a:r>
+              <a:rPr lang="en-US" sz="2400" dirty="0">
+                <a:solidFill>
+                  <a:srgbClr val="FF00FF"/>
+                </a:solidFill>
+                <a:latin typeface="Arial" panose="020B0604020202020204" pitchFamily="34" charset="0"/>
+              </a:rPr>
+              <a:t>1</a:t>
+            </a:r>
+            <a:r>
+              <a:rPr lang="en-US" sz="2400" b="0" i="0" u="none" strike="noStrike" dirty="0">
+                <a:solidFill>
+                  <a:srgbClr val="FF00FF"/>
+                </a:solidFill>
+                <a:effectLst/>
+                <a:latin typeface="Arial" panose="020B0604020202020204" pitchFamily="34" charset="0"/>
+              </a:rPr>
+              <a:t>00 highest risk students</a:t>
+            </a:r>
+            <a:r>
+              <a:rPr lang="en-US" sz="2400" b="0" i="0" u="none" strike="noStrike" dirty="0">
+                <a:solidFill>
+                  <a:srgbClr val="595959"/>
+                </a:solidFill>
+                <a:effectLst/>
+                <a:latin typeface="Arial" panose="020B0604020202020204" pitchFamily="34" charset="0"/>
+              </a:rPr>
+              <a:t> who are </a:t>
+            </a:r>
+            <a:r>
+              <a:rPr lang="en-US" sz="2400" b="0" i="0" u="none" strike="noStrike" dirty="0">
+                <a:solidFill>
+                  <a:srgbClr val="38761D"/>
+                </a:solidFill>
+                <a:effectLst/>
+                <a:latin typeface="Arial" panose="020B0604020202020204" pitchFamily="34" charset="0"/>
+              </a:rPr>
+              <a:t>likely to </a:t>
+            </a:r>
+            <a:r>
+              <a:rPr lang="en-US" sz="2400" dirty="0">
+                <a:solidFill>
+                  <a:srgbClr val="38761D"/>
+                </a:solidFill>
+                <a:latin typeface="Arial" panose="020B0604020202020204" pitchFamily="34" charset="0"/>
+              </a:rPr>
+              <a:t>not graduate college within 5 years of their college start </a:t>
+            </a:r>
+            <a:r>
+              <a:rPr lang="en-US" sz="2400" b="0" i="0" u="none" strike="noStrike" dirty="0">
+                <a:solidFill>
+                  <a:srgbClr val="B45F06"/>
+                </a:solidFill>
+                <a:effectLst/>
+                <a:latin typeface="Arial" panose="020B0604020202020204" pitchFamily="34" charset="0"/>
+              </a:rPr>
+              <a:t>to prioritize for proactive academic or other interventions</a:t>
+            </a:r>
+            <a:r>
+              <a:rPr lang="en-US" sz="2400" b="0" i="0" u="none" strike="noStrike" dirty="0">
+                <a:solidFill>
+                  <a:srgbClr val="595959"/>
+                </a:solidFill>
+                <a:effectLst/>
+                <a:latin typeface="Arial" panose="020B0604020202020204" pitchFamily="34" charset="0"/>
+              </a:rPr>
+              <a:t>?</a:t>
+            </a:r>
+            <a:endParaRPr lang="en-US" sz="2400" b="0" dirty="0">
+              <a:effectLst/>
+            </a:endParaRPr>
+          </a:p>
+          <a:p>
+            <a:br>
+              <a:rPr lang="en-US" dirty="0"/>
+            </a:br>
+            <a:endParaRPr lang="en-US" dirty="0"/>
           </a:p>
         </p:txBody>
       </p:sp>
     </p:spTree>
     <p:extLst>
       <p:ext uri="{BB962C8B-B14F-4D97-AF65-F5344CB8AC3E}">
-        <p14:creationId xmlns:p14="http://schemas.microsoft.com/office/powerpoint/2010/main" val="3717005941"/>
+        <p14:creationId xmlns:p14="http://schemas.microsoft.com/office/powerpoint/2010/main" val="2025399898"/>
       </p:ext>
     </p:extLst>
   </p:cSld>
@@ -10673,7 +10945,96 @@
   <p:cSld>
     <p:spTree>
       <p:nvGrpSpPr>
-        <p:cNvPr id="1" name="Shape 144"/>
+        <p:cNvPr id="1" name=""/>
+        <p:cNvGrpSpPr/>
+        <p:nvPr/>
+      </p:nvGrpSpPr>
+      <p:grpSpPr>
+        <a:xfrm>
+          <a:off x="0" y="0"/>
+          <a:ext cx="0" cy="0"/>
+          <a:chOff x="0" y="0"/>
+          <a:chExt cx="0" cy="0"/>
+        </a:xfrm>
+      </p:grpSpPr>
+      <p:sp>
+        <p:nvSpPr>
+          <p:cNvPr id="3" name="Title 2">
+            <a:extLst>
+              <a:ext uri="{FF2B5EF4-FFF2-40B4-BE49-F238E27FC236}">
+                <a16:creationId xmlns:a16="http://schemas.microsoft.com/office/drawing/2014/main" id="{FC4F2F47-A164-2C41-A1CD-CFD1AFCBE708}"/>
+              </a:ext>
+            </a:extLst>
+          </p:cNvPr>
+          <p:cNvSpPr>
+            <a:spLocks noGrp="1"/>
+          </p:cNvSpPr>
+          <p:nvPr>
+            <p:ph type="title"/>
+          </p:nvPr>
+        </p:nvSpPr>
+        <p:spPr/>
+        <p:txBody>
+          <a:bodyPr/>
+          <a:lstStyle/>
+          <a:p>
+            <a:pPr algn="ctr"/>
+            <a:r>
+              <a:rPr lang="en-US" dirty="0"/>
+              <a:t>CASE STUDY</a:t>
+            </a:r>
+          </a:p>
+        </p:txBody>
+      </p:sp>
+      <p:pic>
+        <p:nvPicPr>
+          <p:cNvPr id="6" name="Picture 5">
+            <a:extLst>
+              <a:ext uri="{FF2B5EF4-FFF2-40B4-BE49-F238E27FC236}">
+                <a16:creationId xmlns:a16="http://schemas.microsoft.com/office/drawing/2014/main" id="{DD7C8A1F-AE56-5146-B94D-D4E3FEFBC845}"/>
+              </a:ext>
+            </a:extLst>
+          </p:cNvPr>
+          <p:cNvPicPr>
+            <a:picLocks noChangeAspect="1"/>
+          </p:cNvPicPr>
+          <p:nvPr/>
+        </p:nvPicPr>
+        <p:blipFill>
+          <a:blip r:embed="rId2"/>
+          <a:stretch>
+            <a:fillRect/>
+          </a:stretch>
+        </p:blipFill>
+        <p:spPr>
+          <a:xfrm>
+            <a:off x="1524000" y="1676572"/>
+            <a:ext cx="9144000" cy="3035300"/>
+          </a:xfrm>
+          <a:prstGeom prst="rect">
+            <a:avLst/>
+          </a:prstGeom>
+        </p:spPr>
+      </p:pic>
+    </p:spTree>
+    <p:extLst>
+      <p:ext uri="{BB962C8B-B14F-4D97-AF65-F5344CB8AC3E}">
+        <p14:creationId xmlns:p14="http://schemas.microsoft.com/office/powerpoint/2010/main" val="2007043753"/>
+      </p:ext>
+    </p:extLst>
+  </p:cSld>
+  <p:clrMapOvr>
+    <a:masterClrMapping/>
+  </p:clrMapOvr>
+</p:sld>
+</file>
+
+<file path=ppt/slides/slide17.xml><?xml version="1.0" encoding="utf-8"?>
+<p:sld xmlns:a="http://schemas.openxmlformats.org/drawingml/2006/main" xmlns:r="http://schemas.openxmlformats.org/officeDocument/2006/relationships" xmlns:p="http://schemas.openxmlformats.org/presentationml/2006/main" show="0">
+  <p:cSld>
+    <p:spTree>
+      <p:nvGrpSpPr>
+        <p:cNvPr id="1" name=""/>
         <p:cNvGrpSpPr/>
         <p:nvPr/>
       </p:nvGrpSpPr>
@@ -10690,7 +11051,7 @@
           <p:cNvPr id="2" name="Text Placeholder 1">
             <a:extLst>
               <a:ext uri="{FF2B5EF4-FFF2-40B4-BE49-F238E27FC236}">
-                <a16:creationId xmlns:a16="http://schemas.microsoft.com/office/drawing/2014/main" id="{F99FE356-1ECD-E2A9-D4E2-8BCE7296DD38}"/>
+                <a16:creationId xmlns:a16="http://schemas.microsoft.com/office/drawing/2014/main" id="{CA2F7B32-9E66-8E5C-C019-A4D231FCAECB}"/>
               </a:ext>
             </a:extLst>
           </p:cNvPr>
@@ -10706,413 +11067,144 @@
           <a:bodyPr/>
           <a:lstStyle/>
           <a:p>
-            <a:endParaRPr lang="en-US" dirty="0"/>
+            <a:r>
+              <a:rPr lang="en-US" dirty="0"/>
+              <a:t>In the Obermeyer et al. reading, what formulation decision is the focus of the paper?</a:t>
+            </a:r>
           </a:p>
         </p:txBody>
       </p:sp>
       <p:sp>
         <p:nvSpPr>
-          <p:cNvPr id="145" name="Google Shape;145;p30"/>
-          <p:cNvSpPr txBox="1">
+          <p:cNvPr id="3" name="Title 2">
+            <a:extLst>
+              <a:ext uri="{FF2B5EF4-FFF2-40B4-BE49-F238E27FC236}">
+                <a16:creationId xmlns:a16="http://schemas.microsoft.com/office/drawing/2014/main" id="{000EB0DE-95C0-EFAB-3EBC-E7036AE92059}"/>
+              </a:ext>
+            </a:extLst>
+          </p:cNvPr>
+          <p:cNvSpPr>
             <a:spLocks noGrp="1"/>
           </p:cNvSpPr>
           <p:nvPr>
             <p:ph type="title"/>
           </p:nvPr>
         </p:nvSpPr>
-        <p:spPr>
-          <a:prstGeom prst="rect">
-            <a:avLst/>
-          </a:prstGeom>
-        </p:spPr>
+        <p:spPr/>
         <p:txBody>
-          <a:bodyPr spcFirstLastPara="1" wrap="square" lIns="121900" tIns="121900" rIns="121900" bIns="121900" anchor="t" anchorCtr="0">
-            <a:normAutofit fontScale="90000"/>
-          </a:bodyPr>
+          <a:bodyPr/>
           <a:lstStyle/>
           <a:p>
             <a:r>
-              <a:rPr lang="en"/>
-              <a:t>Analytical Formulation</a:t>
-            </a:r>
-            <a:endParaRPr/>
+              <a:rPr lang="en-US" dirty="0"/>
+              <a:t>Formulation Decisions</a:t>
+            </a:r>
           </a:p>
         </p:txBody>
       </p:sp>
       <p:sp>
         <p:nvSpPr>
-          <p:cNvPr id="146" name="Google Shape;146;p30"/>
-          <p:cNvSpPr/>
-          <p:nvPr/>
-        </p:nvSpPr>
-        <p:spPr>
-          <a:xfrm>
-            <a:off x="190320" y="1463207"/>
-            <a:ext cx="3124000" cy="4204400"/>
-          </a:xfrm>
-          <a:prstGeom prst="rect">
-            <a:avLst/>
-          </a:prstGeom>
-          <a:solidFill>
-            <a:srgbClr val="EEEEEE"/>
-          </a:solidFill>
-          <a:ln w="9525" cap="flat" cmpd="sng">
-            <a:solidFill>
-              <a:srgbClr val="595959"/>
-            </a:solidFill>
-            <a:prstDash val="solid"/>
-            <a:round/>
-            <a:headEnd type="none" w="sm" len="sm"/>
-            <a:tailEnd type="none" w="sm" len="sm"/>
-          </a:ln>
-        </p:spPr>
-        <p:txBody>
-          <a:bodyPr spcFirstLastPara="1" wrap="square" lIns="121900" tIns="121900" rIns="121900" bIns="121900" anchor="ctr" anchorCtr="0">
-            <a:noAutofit/>
-          </a:bodyPr>
-          <a:lstStyle/>
-          <a:p>
-            <a:pPr>
-              <a:buSzPts val="1400"/>
-            </a:pPr>
-            <a:endParaRPr sz="1867"/>
-          </a:p>
-        </p:txBody>
-      </p:sp>
-      <p:sp>
-        <p:nvSpPr>
-          <p:cNvPr id="147" name="Google Shape;147;p30"/>
+          <p:cNvPr id="4" name="TextBox 3">
+            <a:extLst>
+              <a:ext uri="{FF2B5EF4-FFF2-40B4-BE49-F238E27FC236}">
+                <a16:creationId xmlns:a16="http://schemas.microsoft.com/office/drawing/2014/main" id="{143541AF-EF0F-D7E7-CE20-EC98E6076CBB}"/>
+              </a:ext>
+            </a:extLst>
+          </p:cNvPr>
           <p:cNvSpPr txBox="1"/>
           <p:nvPr/>
         </p:nvSpPr>
         <p:spPr>
           <a:xfrm>
-            <a:off x="3566453" y="1341573"/>
-            <a:ext cx="8531200" cy="4555200"/>
+            <a:off x="2908511" y="2907586"/>
+            <a:ext cx="4812536" cy="2308324"/>
           </a:xfrm>
           <a:prstGeom prst="rect">
             <a:avLst/>
           </a:prstGeom>
           <a:noFill/>
-          <a:ln>
-            <a:noFill/>
-          </a:ln>
         </p:spPr>
         <p:txBody>
-          <a:bodyPr spcFirstLastPara="1" wrap="square" lIns="121900" tIns="121900" rIns="121900" bIns="121900" anchor="t" anchorCtr="0">
-            <a:noAutofit/>
+          <a:bodyPr wrap="none" rtlCol="0">
+            <a:spAutoFit/>
           </a:bodyPr>
           <a:lstStyle/>
           <a:p>
-            <a:pPr>
-              <a:lnSpc>
-                <a:spcPct val="115000"/>
-              </a:lnSpc>
-              <a:spcAft>
-                <a:spcPts val="2133"/>
-              </a:spcAft>
-            </a:pPr>
-            <a:r>
-              <a:rPr lang="en" sz="3467" dirty="0">
-                <a:solidFill>
-                  <a:srgbClr val="FF0000"/>
-                </a:solidFill>
-              </a:rPr>
-              <a:t>On the 1</a:t>
-            </a:r>
-            <a:r>
-              <a:rPr lang="en" sz="3467" baseline="30000" dirty="0">
-                <a:solidFill>
-                  <a:srgbClr val="FF0000"/>
-                </a:solidFill>
-              </a:rPr>
-              <a:t>st</a:t>
-            </a:r>
-            <a:r>
-              <a:rPr lang="en" sz="3467" dirty="0">
-                <a:solidFill>
-                  <a:srgbClr val="FF0000"/>
-                </a:solidFill>
-              </a:rPr>
-              <a:t> of every month</a:t>
-            </a:r>
-            <a:r>
-              <a:rPr lang="en" sz="3467" dirty="0">
-                <a:solidFill>
-                  <a:srgbClr val="595959"/>
-                </a:solidFill>
-              </a:rPr>
-              <a:t>, for </a:t>
-            </a:r>
-            <a:r>
-              <a:rPr lang="en" sz="3467" dirty="0">
-                <a:solidFill>
-                  <a:srgbClr val="0000FF"/>
-                </a:solidFill>
-              </a:rPr>
-              <a:t>all individuals who have interacted with the program in the last 3 years</a:t>
-            </a:r>
-            <a:r>
-              <a:rPr lang="en" sz="3467" dirty="0">
-                <a:solidFill>
-                  <a:srgbClr val="595959"/>
-                </a:solidFill>
-              </a:rPr>
-              <a:t>, can we identify the </a:t>
-            </a:r>
-            <a:r>
-              <a:rPr lang="en" sz="3467" dirty="0">
-                <a:solidFill>
-                  <a:srgbClr val="FF00FF"/>
-                </a:solidFill>
-              </a:rPr>
-              <a:t>100 individuals </a:t>
-            </a:r>
-            <a:r>
-              <a:rPr lang="en" sz="3467" dirty="0">
-                <a:solidFill>
-                  <a:srgbClr val="595959"/>
-                </a:solidFill>
-              </a:rPr>
-              <a:t>who are </a:t>
-            </a:r>
-            <a:r>
-              <a:rPr lang="en" sz="3467" dirty="0">
-                <a:solidFill>
-                  <a:srgbClr val="38761D"/>
-                </a:solidFill>
-              </a:rPr>
-              <a:t>at highest risk to die by suicide or overdose in the next 6 months </a:t>
-            </a:r>
-            <a:r>
-              <a:rPr lang="en" sz="3467" dirty="0">
-                <a:solidFill>
-                  <a:srgbClr val="B45F06"/>
-                </a:solidFill>
-              </a:rPr>
-              <a:t>to recommend for proactive behavioral health outreach</a:t>
-            </a:r>
-            <a:r>
-              <a:rPr lang="en" sz="3467" dirty="0">
-                <a:solidFill>
-                  <a:srgbClr val="595959"/>
-                </a:solidFill>
-              </a:rPr>
-              <a:t>?</a:t>
-            </a:r>
-            <a:endParaRPr sz="3467" dirty="0">
-              <a:solidFill>
-                <a:srgbClr val="595959"/>
-              </a:solidFill>
-            </a:endParaRPr>
+            <a:r>
+              <a:rPr lang="en-US" sz="4800" dirty="0" err="1"/>
+              <a:t>Sli.do</a:t>
+            </a:r>
+            <a:r>
+              <a:rPr lang="en-US" sz="4800" dirty="0"/>
+              <a:t>      #10718</a:t>
+            </a:r>
+          </a:p>
+          <a:p>
+            <a:endParaRPr lang="en-US" sz="4800" dirty="0"/>
+          </a:p>
+          <a:p>
+            <a:r>
+              <a:rPr lang="en-US" sz="4800" dirty="0" err="1"/>
+              <a:t>sli.do</a:t>
+            </a:r>
+            <a:r>
+              <a:rPr lang="en-US" sz="4800" dirty="0"/>
+              <a:t>/10718</a:t>
+            </a:r>
           </a:p>
         </p:txBody>
       </p:sp>
       <p:sp>
         <p:nvSpPr>
-          <p:cNvPr id="148" name="Google Shape;148;p30"/>
-          <p:cNvSpPr txBox="1"/>
+          <p:cNvPr id="5" name="AutoShape 2" descr="qr code">
+            <a:extLst>
+              <a:ext uri="{FF2B5EF4-FFF2-40B4-BE49-F238E27FC236}">
+                <a16:creationId xmlns:a16="http://schemas.microsoft.com/office/drawing/2014/main" id="{5056FB75-71B9-8967-2245-4270362FADD7}"/>
+              </a:ext>
+            </a:extLst>
+          </p:cNvPr>
+          <p:cNvSpPr>
+            <a:spLocks noChangeAspect="1" noChangeArrowheads="1"/>
+          </p:cNvSpPr>
           <p:nvPr/>
         </p:nvSpPr>
-        <p:spPr>
+        <p:spPr bwMode="auto">
           <a:xfrm>
-            <a:off x="248120" y="1463207"/>
-            <a:ext cx="3008400" cy="796000"/>
+            <a:off x="5943600" y="3276600"/>
+            <a:ext cx="304800" cy="304800"/>
           </a:xfrm>
           <a:prstGeom prst="rect">
             <a:avLst/>
           </a:prstGeom>
           <a:noFill/>
-          <a:ln>
-            <a:noFill/>
-          </a:ln>
+          <a:extLst>
+            <a:ext uri="{909E8E84-426E-40DD-AFC4-6F175D3DCCD1}">
+              <a14:hiddenFill xmlns:a14="http://schemas.microsoft.com/office/drawing/2010/main">
+                <a:solidFill>
+                  <a:srgbClr val="FFFFFF"/>
+                </a:solidFill>
+              </a14:hiddenFill>
+            </a:ext>
+          </a:extLst>
         </p:spPr>
         <p:txBody>
-          <a:bodyPr spcFirstLastPara="1" wrap="square" lIns="121900" tIns="121900" rIns="121900" bIns="121900" anchor="t" anchorCtr="0">
-            <a:noAutofit/>
+          <a:bodyPr vert="horz" wrap="square" lIns="91440" tIns="45720" rIns="91440" bIns="45720" numCol="1" anchor="t" anchorCtr="0" compatLnSpc="1">
+            <a:prstTxWarp prst="textNoShape">
+              <a:avLst/>
+            </a:prstTxWarp>
           </a:bodyPr>
           <a:lstStyle/>
           <a:p>
-            <a:pPr>
-              <a:buSzPts val="1400"/>
-            </a:pPr>
-            <a:r>
-              <a:rPr lang="en" sz="1867">
-                <a:solidFill>
-                  <a:srgbClr val="FF0000"/>
-                </a:solidFill>
-              </a:rPr>
-              <a:t>When and How often is the recommendation / decision being made?</a:t>
-            </a:r>
-            <a:endParaRPr sz="1867">
-              <a:solidFill>
-                <a:srgbClr val="FF0000"/>
-              </a:solidFill>
-            </a:endParaRPr>
-          </a:p>
-        </p:txBody>
-      </p:sp>
-      <p:sp>
-        <p:nvSpPr>
-          <p:cNvPr id="149" name="Google Shape;149;p30"/>
-          <p:cNvSpPr txBox="1"/>
-          <p:nvPr/>
-        </p:nvSpPr>
-        <p:spPr>
-          <a:xfrm>
-            <a:off x="253253" y="2632740"/>
-            <a:ext cx="3008400" cy="796000"/>
-          </a:xfrm>
-          <a:prstGeom prst="rect">
-            <a:avLst/>
-          </a:prstGeom>
-          <a:noFill/>
-          <a:ln>
-            <a:noFill/>
-          </a:ln>
-        </p:spPr>
-        <p:txBody>
-          <a:bodyPr spcFirstLastPara="1" wrap="square" lIns="121900" tIns="121900" rIns="121900" bIns="121900" anchor="t" anchorCtr="0">
-            <a:noAutofit/>
-          </a:bodyPr>
-          <a:lstStyle/>
-          <a:p>
-            <a:pPr>
-              <a:buSzPts val="1400"/>
-            </a:pPr>
-            <a:r>
-              <a:rPr lang="en" sz="1867">
-                <a:solidFill>
-                  <a:srgbClr val="0000FF"/>
-                </a:solidFill>
-              </a:rPr>
-              <a:t>Who/what is included in the cohort?</a:t>
-            </a:r>
-            <a:endParaRPr sz="1867">
-              <a:solidFill>
-                <a:srgbClr val="0000FF"/>
-              </a:solidFill>
-            </a:endParaRPr>
-          </a:p>
-        </p:txBody>
-      </p:sp>
-      <p:sp>
-        <p:nvSpPr>
-          <p:cNvPr id="150" name="Google Shape;150;p30"/>
-          <p:cNvSpPr txBox="1"/>
-          <p:nvPr/>
-        </p:nvSpPr>
-        <p:spPr>
-          <a:xfrm>
-            <a:off x="253253" y="3497473"/>
-            <a:ext cx="3008400" cy="796000"/>
-          </a:xfrm>
-          <a:prstGeom prst="rect">
-            <a:avLst/>
-          </a:prstGeom>
-          <a:noFill/>
-          <a:ln>
-            <a:noFill/>
-          </a:ln>
-        </p:spPr>
-        <p:txBody>
-          <a:bodyPr spcFirstLastPara="1" wrap="square" lIns="121900" tIns="121900" rIns="121900" bIns="121900" anchor="t" anchorCtr="0">
-            <a:noAutofit/>
-          </a:bodyPr>
-          <a:lstStyle/>
-          <a:p>
-            <a:pPr>
-              <a:buSzPts val="1400"/>
-            </a:pPr>
-            <a:r>
-              <a:rPr lang="en" sz="1867">
-                <a:solidFill>
-                  <a:srgbClr val="FF00FF"/>
-                </a:solidFill>
-              </a:rPr>
-              <a:t>What is the output?</a:t>
-            </a:r>
-            <a:endParaRPr sz="1867">
-              <a:solidFill>
-                <a:srgbClr val="FF00FF"/>
-              </a:solidFill>
-            </a:endParaRPr>
-          </a:p>
-        </p:txBody>
-      </p:sp>
-      <p:sp>
-        <p:nvSpPr>
-          <p:cNvPr id="151" name="Google Shape;151;p30"/>
-          <p:cNvSpPr txBox="1"/>
-          <p:nvPr/>
-        </p:nvSpPr>
-        <p:spPr>
-          <a:xfrm>
-            <a:off x="248120" y="4191873"/>
-            <a:ext cx="3008400" cy="1475600"/>
-          </a:xfrm>
-          <a:prstGeom prst="rect">
-            <a:avLst/>
-          </a:prstGeom>
-          <a:noFill/>
-          <a:ln>
-            <a:noFill/>
-          </a:ln>
-        </p:spPr>
-        <p:txBody>
-          <a:bodyPr spcFirstLastPara="1" wrap="square" lIns="121900" tIns="121900" rIns="121900" bIns="121900" anchor="t" anchorCtr="0">
-            <a:noAutofit/>
-          </a:bodyPr>
-          <a:lstStyle/>
-          <a:p>
-            <a:pPr>
-              <a:buSzPts val="1400"/>
-            </a:pPr>
-            <a:r>
-              <a:rPr lang="en" sz="1867">
-                <a:solidFill>
-                  <a:srgbClr val="274E13"/>
-                </a:solidFill>
-              </a:rPr>
-              <a:t>What outcome are you predicting/estimating?</a:t>
-            </a:r>
-            <a:endParaRPr sz="1867">
-              <a:solidFill>
-                <a:srgbClr val="274E13"/>
-              </a:solidFill>
-            </a:endParaRPr>
-          </a:p>
-          <a:p>
-            <a:pPr>
-              <a:buSzPts val="1400"/>
-            </a:pPr>
-            <a:endParaRPr sz="1867">
-              <a:solidFill>
-                <a:srgbClr val="274E13"/>
-              </a:solidFill>
-            </a:endParaRPr>
-          </a:p>
-          <a:p>
-            <a:pPr>
-              <a:buSzPts val="1400"/>
-            </a:pPr>
-            <a:r>
-              <a:rPr lang="en" sz="1867">
-                <a:solidFill>
-                  <a:srgbClr val="B45F06"/>
-                </a:solidFill>
-              </a:rPr>
-              <a:t>For what purpose?</a:t>
-            </a:r>
-            <a:endParaRPr sz="1867">
-              <a:solidFill>
-                <a:srgbClr val="274E13"/>
-              </a:solidFill>
-            </a:endParaRPr>
+            <a:endParaRPr lang="en-US"/>
           </a:p>
         </p:txBody>
       </p:sp>
     </p:spTree>
+    <p:extLst>
+      <p:ext uri="{BB962C8B-B14F-4D97-AF65-F5344CB8AC3E}">
+        <p14:creationId xmlns:p14="http://schemas.microsoft.com/office/powerpoint/2010/main" val="401324692"/>
+      </p:ext>
+    </p:extLst>
   </p:cSld>
   <p:clrMapOvr>
     <a:masterClrMapping/>
@@ -11120,12 +11212,20 @@
 </p:sld>
 </file>
 
-<file path=ppt/slides/slide17.xml><?xml version="1.0" encoding="utf-8"?>
-<p:sld xmlns:a="http://schemas.openxmlformats.org/drawingml/2006/main" xmlns:r="http://schemas.openxmlformats.org/officeDocument/2006/relationships" xmlns:p="http://schemas.openxmlformats.org/presentationml/2006/main">
+<file path=ppt/slides/slide18.xml><?xml version="1.0" encoding="utf-8"?>
+<p:sld xmlns:a="http://schemas.openxmlformats.org/drawingml/2006/main" xmlns:r="http://schemas.openxmlformats.org/officeDocument/2006/relationships" xmlns:p="http://schemas.openxmlformats.org/presentationml/2006/main" showMasterSp="0">
   <p:cSld>
+    <p:bg>
+      <p:bgPr>
+        <a:solidFill>
+          <a:srgbClr val="FFFFFF"/>
+        </a:solidFill>
+        <a:effectLst/>
+      </p:bgPr>
+    </p:bg>
     <p:spTree>
       <p:nvGrpSpPr>
-        <p:cNvPr id="1" name="Shape 202"/>
+        <p:cNvPr id="1" name=""/>
         <p:cNvGrpSpPr/>
         <p:nvPr/>
       </p:nvGrpSpPr>
@@ -11139,10 +11239,560 @@
       </p:grpSpPr>
       <p:sp>
         <p:nvSpPr>
-          <p:cNvPr id="2" name="Text Placeholder 1">
+          <p:cNvPr id="2" name="Rectangle 1">
             <a:extLst>
               <a:ext uri="{FF2B5EF4-FFF2-40B4-BE49-F238E27FC236}">
-                <a16:creationId xmlns:a16="http://schemas.microsoft.com/office/drawing/2014/main" id="{10E49ADA-B971-3A74-683D-F7E6AB709A58}"/>
+                <a16:creationId xmlns:a16="http://schemas.microsoft.com/office/drawing/2014/main" id="{8ADAA22B-57EC-F5CA-F2FF-84BE8152443D}"/>
+              </a:ext>
+            </a:extLst>
+          </p:cNvPr>
+          <p:cNvSpPr/>
+          <p:nvPr>
+            <p:custDataLst>
+              <p:tags r:id="rId2"/>
+            </p:custDataLst>
+          </p:nvPr>
+        </p:nvSpPr>
+        <p:spPr>
+          <a:xfrm>
+            <a:off x="444693" y="1742703"/>
+            <a:ext cx="2371696" cy="2371696"/>
+          </a:xfrm>
+          <a:prstGeom prst="rect">
+            <a:avLst/>
+          </a:prstGeom>
+          <a:blipFill>
+            <a:blip r:embed="rId5">
+              <a:extLst>
+                <a:ext uri="{96DAC541-7B7A-43D3-8B79-37D633B846F1}">
+                  <asvg:svgBlip xmlns:asvg="http://schemas.microsoft.com/office/drawing/2016/SVG/main" r:embed="rId6"/>
+                </a:ext>
+              </a:extLst>
+            </a:blip>
+            <a:stretch>
+              <a:fillRect/>
+            </a:stretch>
+          </a:blipFill>
+          <a:ln>
+            <a:solidFill>
+              <a:srgbClr val="FFFFFF"/>
+            </a:solidFill>
+          </a:ln>
+        </p:spPr>
+        <p:style>
+          <a:lnRef idx="2">
+            <a:schemeClr val="accent1">
+              <a:shade val="15000"/>
+            </a:schemeClr>
+          </a:lnRef>
+          <a:fillRef idx="1">
+            <a:schemeClr val="accent1"/>
+          </a:fillRef>
+          <a:effectRef idx="0">
+            <a:schemeClr val="accent1"/>
+          </a:effectRef>
+          <a:fontRef idx="minor">
+            <a:schemeClr val="lt1"/>
+          </a:fontRef>
+        </p:style>
+        <p:txBody>
+          <a:bodyPr rtlCol="0" anchor="ctr"/>
+          <a:lstStyle/>
+          <a:p>
+            <a:pPr algn="ctr"/>
+            <a:endParaRPr lang="en-US"/>
+          </a:p>
+        </p:txBody>
+      </p:sp>
+      <p:sp>
+        <p:nvSpPr>
+          <p:cNvPr id="3" name="Rectangle 2">
+            <a:extLst>
+              <a:ext uri="{FF2B5EF4-FFF2-40B4-BE49-F238E27FC236}">
+                <a16:creationId xmlns:a16="http://schemas.microsoft.com/office/drawing/2014/main" id="{EF26AC3E-41FA-7AC6-0717-4A59914DE10E}"/>
+              </a:ext>
+            </a:extLst>
+          </p:cNvPr>
+          <p:cNvSpPr/>
+          <p:nvPr>
+            <p:custDataLst>
+              <p:tags r:id="rId3"/>
+            </p:custDataLst>
+          </p:nvPr>
+        </p:nvSpPr>
+        <p:spPr>
+          <a:xfrm>
+            <a:off x="3112851" y="1000897"/>
+            <a:ext cx="8486226" cy="3855308"/>
+          </a:xfrm>
+          <a:prstGeom prst="rect">
+            <a:avLst/>
+          </a:prstGeom>
+          <a:noFill/>
+          <a:ln w="25400" cap="flat" cmpd="sng" algn="ctr">
+            <a:solidFill>
+              <a:srgbClr val="FFFFFF"/>
+            </a:solidFill>
+            <a:prstDash val="solid"/>
+          </a:ln>
+          <a:effectLst/>
+          <a:extLst>
+            <a:ext uri="{909E8E84-426E-40DD-AFC4-6F175D3DCCD1}">
+              <a14:hiddenFill xmlns:a14="http://schemas.microsoft.com/office/drawing/2010/main">
+                <a:solidFill>
+                  <a:schemeClr val="accent1"/>
+                </a:solidFill>
+              </a14:hiddenFill>
+            </a:ext>
+          </a:extLst>
+        </p:spPr>
+        <p:style>
+          <a:lnRef idx="2">
+            <a:schemeClr val="accent1">
+              <a:shade val="15000"/>
+            </a:schemeClr>
+          </a:lnRef>
+          <a:fillRef idx="1">
+            <a:schemeClr val="accent1"/>
+          </a:fillRef>
+          <a:effectRef idx="0">
+            <a:schemeClr val="accent1"/>
+          </a:effectRef>
+          <a:fontRef idx="minor">
+            <a:schemeClr val="lt1"/>
+          </a:fontRef>
+        </p:style>
+        <p:txBody>
+          <a:bodyPr rtlCol="0" anchor="ctr"/>
+          <a:lstStyle/>
+          <a:p>
+            <a:r>
+              <a:rPr lang="en-US" sz="3800" b="1">
+                <a:solidFill>
+                  <a:srgbClr val="000000"/>
+                </a:solidFill>
+              </a:rPr>
+              <a:t>In the Obermeyer et al. reading, what formulation decision is the focus of the paper?</a:t>
+            </a:r>
+          </a:p>
+        </p:txBody>
+      </p:sp>
+      <p:sp>
+        <p:nvSpPr>
+          <p:cNvPr id="4" name="Rectangle 3">
+            <a:extLst>
+              <a:ext uri="{FF2B5EF4-FFF2-40B4-BE49-F238E27FC236}">
+                <a16:creationId xmlns:a16="http://schemas.microsoft.com/office/drawing/2014/main" id="{D59E104C-0AAC-485C-8B34-EF0DB6FAAA60}"/>
+              </a:ext>
+            </a:extLst>
+          </p:cNvPr>
+          <p:cNvSpPr/>
+          <p:nvPr/>
+        </p:nvSpPr>
+        <p:spPr>
+          <a:xfrm>
+            <a:off x="0" y="5820032"/>
+            <a:ext cx="12192001" cy="1037968"/>
+          </a:xfrm>
+          <a:prstGeom prst="rect">
+            <a:avLst/>
+          </a:prstGeom>
+          <a:solidFill>
+            <a:srgbClr val="198038"/>
+          </a:solidFill>
+          <a:ln w="25400" cap="flat" cmpd="sng" algn="ctr">
+            <a:noFill/>
+            <a:prstDash val="solid"/>
+          </a:ln>
+          <a:effectLst/>
+          <a:extLst>
+            <a:ext uri="{91240B29-F687-4F45-9708-019B960494DF}">
+              <a14:hiddenLine xmlns:a14="http://schemas.microsoft.com/office/drawing/2010/main" w="25400" cap="flat" cmpd="sng" algn="ctr">
+                <a:solidFill>
+                  <a:schemeClr val="accent1">
+                    <a:shade val="15000"/>
+                  </a:schemeClr>
+                </a:solidFill>
+                <a:prstDash val="solid"/>
+              </a14:hiddenLine>
+            </a:ext>
+          </a:extLst>
+        </p:spPr>
+        <p:style>
+          <a:lnRef idx="2">
+            <a:schemeClr val="accent1">
+              <a:shade val="15000"/>
+            </a:schemeClr>
+          </a:lnRef>
+          <a:fillRef idx="1">
+            <a:schemeClr val="accent1"/>
+          </a:fillRef>
+          <a:effectRef idx="0">
+            <a:schemeClr val="accent1"/>
+          </a:effectRef>
+          <a:fontRef idx="minor">
+            <a:schemeClr val="lt1"/>
+          </a:fontRef>
+        </p:style>
+        <p:txBody>
+          <a:bodyPr lIns="741155" tIns="259492" rIns="1852888" bIns="203886" rtlCol="0" anchor="ctr">
+            <a:normAutofit fontScale="85000" lnSpcReduction="10000"/>
+          </a:bodyPr>
+          <a:lstStyle/>
+          <a:p>
+            <a:r>
+              <a:rPr lang="en-US" sz="2600">
+                <a:solidFill>
+                  <a:srgbClr val="FFFFFF"/>
+                </a:solidFill>
+              </a:rPr>
+              <a:t>The </a:t>
+            </a:r>
+            <a:r>
+              <a:rPr lang="en-US" sz="2600">
+                <a:solidFill>
+                  <a:srgbClr val="FFFFFF"/>
+                </a:solidFill>
+                <a:hlinkClick r:id="rId7">
+                  <a:extLst>
+                    <a:ext uri="{A12FA001-AC4F-418D-AE19-62706E023703}">
+                      <ahyp:hlinkClr xmlns:ahyp="http://schemas.microsoft.com/office/drawing/2018/hyperlinkcolor" val="tx"/>
+                    </a:ext>
+                  </a:extLst>
+                </a:hlinkClick>
+              </a:rPr>
+              <a:t>Slido app</a:t>
+            </a:r>
+            <a:r>
+              <a:rPr lang="en-US" sz="2600">
+                <a:solidFill>
+                  <a:srgbClr val="FFFFFF"/>
+                </a:solidFill>
+              </a:rPr>
+              <a:t> must be installed on every computer you’re presenting from</a:t>
+            </a:r>
+          </a:p>
+        </p:txBody>
+      </p:sp>
+      <p:pic>
+        <p:nvPicPr>
+          <p:cNvPr id="6" name="Graphic 5">
+            <a:extLst>
+              <a:ext uri="{FF2B5EF4-FFF2-40B4-BE49-F238E27FC236}">
+                <a16:creationId xmlns:a16="http://schemas.microsoft.com/office/drawing/2014/main" id="{49255EAA-08AA-0727-4DA6-F6D84940B53D}"/>
+              </a:ext>
+            </a:extLst>
+          </p:cNvPr>
+          <p:cNvPicPr>
+            <a:picLocks/>
+          </p:cNvPicPr>
+          <p:nvPr/>
+        </p:nvPicPr>
+        <p:blipFill>
+          <a:blip r:embed="rId8">
+            <a:extLst>
+              <a:ext uri="{96DAC541-7B7A-43D3-8B79-37D633B846F1}">
+                <asvg:svgBlip xmlns:asvg="http://schemas.microsoft.com/office/drawing/2016/SVG/main" r:embed="rId9"/>
+              </a:ext>
+            </a:extLst>
+          </a:blip>
+          <a:stretch>
+            <a:fillRect/>
+          </a:stretch>
+        </p:blipFill>
+        <p:spPr>
+          <a:xfrm>
+            <a:off x="296462" y="6190785"/>
+            <a:ext cx="296462" cy="296462"/>
+          </a:xfrm>
+          <a:prstGeom prst="rect">
+            <a:avLst/>
+          </a:prstGeom>
+        </p:spPr>
+      </p:pic>
+      <p:sp>
+        <p:nvSpPr>
+          <p:cNvPr id="7" name="Trapezoid 6">
+            <a:extLst>
+              <a:ext uri="{FF2B5EF4-FFF2-40B4-BE49-F238E27FC236}">
+                <a16:creationId xmlns:a16="http://schemas.microsoft.com/office/drawing/2014/main" id="{71A14EFB-271A-BAC7-A919-9BDC73CA6FAE}"/>
+              </a:ext>
+            </a:extLst>
+          </p:cNvPr>
+          <p:cNvSpPr/>
+          <p:nvPr/>
+        </p:nvSpPr>
+        <p:spPr>
+          <a:xfrm rot="2700000">
+            <a:off x="9620371" y="514924"/>
+            <a:ext cx="3335198" cy="778213"/>
+          </a:xfrm>
+          <a:prstGeom prst="trapezoid">
+            <a:avLst>
+              <a:gd name="adj" fmla="val 100000"/>
+            </a:avLst>
+          </a:prstGeom>
+          <a:solidFill>
+            <a:srgbClr val="EDFAF2"/>
+          </a:solidFill>
+          <a:ln w="25400" cap="flat" cmpd="sng" algn="ctr">
+            <a:noFill/>
+            <a:prstDash val="solid"/>
+          </a:ln>
+          <a:effectLst/>
+          <a:extLst>
+            <a:ext uri="{91240B29-F687-4F45-9708-019B960494DF}">
+              <a14:hiddenLine xmlns:a14="http://schemas.microsoft.com/office/drawing/2010/main" w="25400" cap="flat" cmpd="sng" algn="ctr">
+                <a:solidFill>
+                  <a:schemeClr val="accent1">
+                    <a:shade val="15000"/>
+                  </a:schemeClr>
+                </a:solidFill>
+                <a:prstDash val="solid"/>
+              </a14:hiddenLine>
+            </a:ext>
+          </a:extLst>
+        </p:spPr>
+        <p:style>
+          <a:lnRef idx="2">
+            <a:schemeClr val="accent1">
+              <a:shade val="15000"/>
+            </a:schemeClr>
+          </a:lnRef>
+          <a:fillRef idx="1">
+            <a:schemeClr val="accent1"/>
+          </a:fillRef>
+          <a:effectRef idx="0">
+            <a:schemeClr val="accent1"/>
+          </a:effectRef>
+          <a:fontRef idx="minor">
+            <a:schemeClr val="lt1"/>
+          </a:fontRef>
+        </p:style>
+        <p:txBody>
+          <a:bodyPr tIns="0" bIns="0" rtlCol="0" anchor="t">
+            <a:normAutofit fontScale="70000" lnSpcReduction="20000"/>
+          </a:bodyPr>
+          <a:lstStyle/>
+          <a:p>
+            <a:pPr algn="ctr"/>
+            <a:r>
+              <a:rPr lang="en-US" sz="2600" b="1">
+                <a:solidFill>
+                  <a:srgbClr val="198038"/>
+                </a:solidFill>
+              </a:rPr>
+              <a:t>Do not edit
+</a:t>
+            </a:r>
+            <a:r>
+              <a:rPr lang="en-US" sz="2200">
+                <a:solidFill>
+                  <a:srgbClr val="198038"/>
+                </a:solidFill>
+                <a:hlinkClick r:id="rId10">
+                  <a:extLst>
+                    <a:ext uri="{A12FA001-AC4F-418D-AE19-62706E023703}">
+                      <ahyp:hlinkClr xmlns:ahyp="http://schemas.microsoft.com/office/drawing/2018/hyperlinkcolor" val="tx"/>
+                    </a:ext>
+                  </a:extLst>
+                </a:hlinkClick>
+              </a:rPr>
+              <a:t>How to change the design</a:t>
+            </a:r>
+            <a:endParaRPr lang="en-US" sz="2200">
+              <a:solidFill>
+                <a:srgbClr val="198038"/>
+              </a:solidFill>
+            </a:endParaRPr>
+          </a:p>
+        </p:txBody>
+      </p:sp>
+      <p:pic>
+        <p:nvPicPr>
+          <p:cNvPr id="9" name="Graphic 8">
+            <a:extLst>
+              <a:ext uri="{FF2B5EF4-FFF2-40B4-BE49-F238E27FC236}">
+                <a16:creationId xmlns:a16="http://schemas.microsoft.com/office/drawing/2014/main" id="{3F31820A-B415-CE7D-95D2-BECDB8F44E80}"/>
+              </a:ext>
+            </a:extLst>
+          </p:cNvPr>
+          <p:cNvPicPr>
+            <a:picLocks/>
+          </p:cNvPicPr>
+          <p:nvPr/>
+        </p:nvPicPr>
+        <p:blipFill>
+          <a:blip r:embed="rId11">
+            <a:extLst>
+              <a:ext uri="{96DAC541-7B7A-43D3-8B79-37D633B846F1}">
+                <asvg:svgBlip xmlns:asvg="http://schemas.microsoft.com/office/drawing/2016/SVG/main" r:embed="rId12"/>
+              </a:ext>
+            </a:extLst>
+          </a:blip>
+          <a:stretch>
+            <a:fillRect/>
+          </a:stretch>
+        </p:blipFill>
+        <p:spPr>
+          <a:xfrm>
+            <a:off x="10746748" y="6153727"/>
+            <a:ext cx="1111733" cy="370578"/>
+          </a:xfrm>
+          <a:prstGeom prst="rect">
+            <a:avLst/>
+          </a:prstGeom>
+        </p:spPr>
+      </p:pic>
+    </p:spTree>
+    <p:custDataLst>
+      <p:tags r:id="rId1"/>
+    </p:custDataLst>
+    <p:extLst>
+      <p:ext uri="{BB962C8B-B14F-4D97-AF65-F5344CB8AC3E}">
+        <p14:creationId xmlns:p14="http://schemas.microsoft.com/office/powerpoint/2010/main" val="3179185644"/>
+      </p:ext>
+    </p:extLst>
+  </p:cSld>
+  <p:clrMapOvr>
+    <a:masterClrMapping/>
+  </p:clrMapOvr>
+  <p:timing>
+    <p:tnLst>
+      <p:par>
+        <p:cTn id="1" dur="indefinite" restart="never" nodeType="tmRoot">
+          <p:childTnLst>
+            <p:seq concurrent="1" nextAc="seek">
+              <p:cTn id="2" dur="indefinite" nodeType="mainSeq">
+                <p:childTnLst>
+                  <p:par>
+                    <p:cTn id="3" fill="hold">
+                      <p:stCondLst>
+                        <p:cond delay="indefinite"/>
+                      </p:stCondLst>
+                      <p:childTnLst>
+                        <p:par>
+                          <p:cTn id="4" fill="hold">
+                            <p:stCondLst>
+                              <p:cond delay="0"/>
+                            </p:stCondLst>
+                            <p:childTnLst>
+                              <p:par>
+                                <p:cTn id="5" presetID="26" presetClass="emph" presetSubtype="0" fill="hold" grpId="0" nodeType="clickEffect">
+                                  <p:stCondLst>
+                                    <p:cond delay="0"/>
+                                  </p:stCondLst>
+                                  <p:childTnLst>
+                                    <p:animEffect transition="out" filter="fade">
+                                      <p:cBhvr>
+                                        <p:cTn id="6" dur="50" tmFilter="0, 0; .2, .5; .8, .5; 1, 0"/>
+                                        <p:tgtEl>
+                                          <p:spTgt spid="3"/>
+                                        </p:tgtEl>
+                                      </p:cBhvr>
+                                    </p:animEffect>
+                                    <p:animScale>
+                                      <p:cBhvr>
+                                        <p:cTn id="7" dur="25" autoRev="1" fill="hold"/>
+                                        <p:tgtEl>
+                                          <p:spTgt spid="3"/>
+                                        </p:tgtEl>
+                                      </p:cBhvr>
+                                      <p:by x="105000" y="105000"/>
+                                    </p:animScale>
+                                  </p:childTnLst>
+                                </p:cTn>
+                              </p:par>
+                            </p:childTnLst>
+                          </p:cTn>
+                        </p:par>
+                      </p:childTnLst>
+                    </p:cTn>
+                  </p:par>
+                </p:childTnLst>
+              </p:cTn>
+              <p:prevCondLst>
+                <p:cond evt="onPrev" delay="0">
+                  <p:tgtEl>
+                    <p:sldTgt/>
+                  </p:tgtEl>
+                </p:cond>
+              </p:prevCondLst>
+              <p:nextCondLst>
+                <p:cond evt="onNext" delay="0">
+                  <p:tgtEl>
+                    <p:sldTgt/>
+                  </p:tgtEl>
+                </p:cond>
+              </p:nextCondLst>
+            </p:seq>
+          </p:childTnLst>
+        </p:cTn>
+      </p:par>
+    </p:tnLst>
+    <p:bldLst>
+      <p:bldP spid="3" grpId="0" animBg="1"/>
+    </p:bldLst>
+  </p:timing>
+</p:sld>
+</file>
+
+<file path=ppt/slides/slide19.xml><?xml version="1.0" encoding="utf-8"?>
+<p:sld xmlns:a="http://schemas.openxmlformats.org/drawingml/2006/main" xmlns:r="http://schemas.openxmlformats.org/officeDocument/2006/relationships" xmlns:p="http://schemas.openxmlformats.org/presentationml/2006/main">
+  <p:cSld>
+    <p:spTree>
+      <p:nvGrpSpPr>
+        <p:cNvPr id="1" name=""/>
+        <p:cNvGrpSpPr/>
+        <p:nvPr/>
+      </p:nvGrpSpPr>
+      <p:grpSpPr>
+        <a:xfrm>
+          <a:off x="0" y="0"/>
+          <a:ext cx="0" cy="0"/>
+          <a:chOff x="0" y="0"/>
+          <a:chExt cx="0" cy="0"/>
+        </a:xfrm>
+      </p:grpSpPr>
+      <p:sp>
+        <p:nvSpPr>
+          <p:cNvPr id="2" name="Title 1">
+            <a:extLst>
+              <a:ext uri="{FF2B5EF4-FFF2-40B4-BE49-F238E27FC236}">
+                <a16:creationId xmlns:a16="http://schemas.microsoft.com/office/drawing/2014/main" id="{D301BA0D-10F8-92D2-C9D3-52205F55F155}"/>
+              </a:ext>
+            </a:extLst>
+          </p:cNvPr>
+          <p:cNvSpPr>
+            <a:spLocks noGrp="1"/>
+          </p:cNvSpPr>
+          <p:nvPr>
+            <p:ph type="title"/>
+          </p:nvPr>
+        </p:nvSpPr>
+        <p:spPr>
+          <a:xfrm>
+            <a:off x="254544" y="402968"/>
+            <a:ext cx="12061442" cy="763500"/>
+          </a:xfrm>
+        </p:spPr>
+        <p:txBody>
+          <a:bodyPr/>
+          <a:lstStyle/>
+          <a:p>
+            <a:r>
+              <a:rPr lang="en-US" sz="3200" dirty="0"/>
+              <a:t>Additional examples from real projects (not covered in class)</a:t>
+            </a:r>
+          </a:p>
+        </p:txBody>
+      </p:sp>
+      <p:sp>
+        <p:nvSpPr>
+          <p:cNvPr id="3" name="Text Placeholder 2">
+            <a:extLst>
+              <a:ext uri="{FF2B5EF4-FFF2-40B4-BE49-F238E27FC236}">
+                <a16:creationId xmlns:a16="http://schemas.microsoft.com/office/drawing/2014/main" id="{6929B6C7-5630-DFAD-982A-CD554DBAC0F5}"/>
               </a:ext>
             </a:extLst>
           </p:cNvPr>
@@ -11162,1370 +11812,12 @@
           </a:p>
         </p:txBody>
       </p:sp>
-      <p:sp>
-        <p:nvSpPr>
-          <p:cNvPr id="203" name="Google Shape;203;p38"/>
-          <p:cNvSpPr txBox="1">
-            <a:spLocks noGrp="1"/>
-          </p:cNvSpPr>
-          <p:nvPr>
-            <p:ph type="title"/>
-          </p:nvPr>
-        </p:nvSpPr>
-        <p:spPr>
-          <a:prstGeom prst="rect">
-            <a:avLst/>
-          </a:prstGeom>
-        </p:spPr>
-        <p:txBody>
-          <a:bodyPr spcFirstLastPara="1" wrap="square" lIns="121900" tIns="121900" rIns="121900" bIns="121900" anchor="t" anchorCtr="0">
-            <a:normAutofit fontScale="90000"/>
-          </a:bodyPr>
-          <a:lstStyle/>
-          <a:p>
-            <a:r>
-              <a:rPr lang="en"/>
-              <a:t>Analytical Formulation</a:t>
-            </a:r>
-            <a:endParaRPr/>
-          </a:p>
-        </p:txBody>
-      </p:sp>
-      <p:sp>
-        <p:nvSpPr>
-          <p:cNvPr id="204" name="Google Shape;204;p38"/>
-          <p:cNvSpPr/>
-          <p:nvPr/>
-        </p:nvSpPr>
-        <p:spPr>
-          <a:xfrm>
-            <a:off x="190320" y="1463207"/>
-            <a:ext cx="3124000" cy="4204400"/>
-          </a:xfrm>
-          <a:prstGeom prst="rect">
-            <a:avLst/>
-          </a:prstGeom>
-          <a:solidFill>
-            <a:srgbClr val="EEEEEE"/>
-          </a:solidFill>
-          <a:ln w="9525" cap="flat" cmpd="sng">
-            <a:solidFill>
-              <a:srgbClr val="595959"/>
-            </a:solidFill>
-            <a:prstDash val="solid"/>
-            <a:round/>
-            <a:headEnd type="none" w="sm" len="sm"/>
-            <a:tailEnd type="none" w="sm" len="sm"/>
-          </a:ln>
-        </p:spPr>
-        <p:txBody>
-          <a:bodyPr spcFirstLastPara="1" wrap="square" lIns="121900" tIns="121900" rIns="121900" bIns="121900" anchor="ctr" anchorCtr="0">
-            <a:noAutofit/>
-          </a:bodyPr>
-          <a:lstStyle/>
-          <a:p>
-            <a:pPr>
-              <a:buSzPts val="1400"/>
-            </a:pPr>
-            <a:endParaRPr sz="1867"/>
-          </a:p>
-        </p:txBody>
-      </p:sp>
-      <p:sp>
-        <p:nvSpPr>
-          <p:cNvPr id="205" name="Google Shape;205;p38"/>
-          <p:cNvSpPr txBox="1"/>
-          <p:nvPr/>
-        </p:nvSpPr>
-        <p:spPr>
-          <a:xfrm>
-            <a:off x="3566453" y="1341573"/>
-            <a:ext cx="8531200" cy="4555200"/>
-          </a:xfrm>
-          <a:prstGeom prst="rect">
-            <a:avLst/>
-          </a:prstGeom>
-          <a:noFill/>
-          <a:ln>
-            <a:noFill/>
-          </a:ln>
-        </p:spPr>
-        <p:txBody>
-          <a:bodyPr spcFirstLastPara="1" wrap="square" lIns="121900" tIns="121900" rIns="121900" bIns="121900" anchor="t" anchorCtr="0">
-            <a:noAutofit/>
-          </a:bodyPr>
-          <a:lstStyle/>
-          <a:p>
-            <a:pPr>
-              <a:lnSpc>
-                <a:spcPct val="115000"/>
-              </a:lnSpc>
-              <a:spcAft>
-                <a:spcPts val="2133"/>
-              </a:spcAft>
-            </a:pPr>
-            <a:r>
-              <a:rPr lang="en" sz="3467" dirty="0">
-                <a:solidFill>
-                  <a:srgbClr val="FF0000"/>
-                </a:solidFill>
-              </a:rPr>
-              <a:t>Every year, when new aerial data arrives</a:t>
-            </a:r>
-            <a:r>
-              <a:rPr lang="en" sz="3467" dirty="0">
-                <a:solidFill>
-                  <a:srgbClr val="595959"/>
-                </a:solidFill>
-              </a:rPr>
-              <a:t>, for </a:t>
-            </a:r>
-            <a:r>
-              <a:rPr lang="en" sz="3467" dirty="0">
-                <a:solidFill>
-                  <a:srgbClr val="0000FF"/>
-                </a:solidFill>
-              </a:rPr>
-              <a:t>all </a:t>
-            </a:r>
-            <a:r>
-              <a:rPr lang="en" sz="3467" dirty="0" err="1">
-                <a:solidFill>
-                  <a:srgbClr val="0000FF"/>
-                </a:solidFill>
-              </a:rPr>
-              <a:t>blocklots</a:t>
-            </a:r>
-            <a:r>
-              <a:rPr lang="en" sz="3467" dirty="0">
-                <a:solidFill>
-                  <a:srgbClr val="0000FF"/>
-                </a:solidFill>
-              </a:rPr>
-              <a:t> in Baltimore City</a:t>
-            </a:r>
-            <a:r>
-              <a:rPr lang="en" sz="3467" dirty="0">
-                <a:solidFill>
-                  <a:srgbClr val="595959"/>
-                </a:solidFill>
-              </a:rPr>
-              <a:t>, can we identify </a:t>
-            </a:r>
-            <a:r>
-              <a:rPr lang="en" sz="3467" dirty="0">
-                <a:solidFill>
-                  <a:srgbClr val="FF00FF"/>
-                </a:solidFill>
-              </a:rPr>
-              <a:t>1,000 </a:t>
-            </a:r>
-            <a:r>
-              <a:rPr lang="en" sz="3467" dirty="0" err="1">
-                <a:solidFill>
-                  <a:srgbClr val="FF00FF"/>
-                </a:solidFill>
-              </a:rPr>
-              <a:t>blocklots</a:t>
-            </a:r>
-            <a:r>
-              <a:rPr lang="en" sz="3467" dirty="0">
-                <a:solidFill>
-                  <a:srgbClr val="FF00FF"/>
-                </a:solidFill>
-              </a:rPr>
-              <a:t> </a:t>
-            </a:r>
-            <a:r>
-              <a:rPr lang="en" sz="3467" dirty="0">
-                <a:solidFill>
-                  <a:srgbClr val="595959"/>
-                </a:solidFill>
-              </a:rPr>
-              <a:t>with a </a:t>
-            </a:r>
-            <a:r>
-              <a:rPr lang="en" sz="3467" dirty="0">
-                <a:solidFill>
-                  <a:srgbClr val="38761D"/>
-                </a:solidFill>
-              </a:rPr>
-              <a:t>“high” level of roof damage </a:t>
-            </a:r>
-            <a:r>
-              <a:rPr lang="en" sz="3467" dirty="0">
-                <a:solidFill>
-                  <a:srgbClr val="B45F06"/>
-                </a:solidFill>
-              </a:rPr>
-              <a:t>to prioritize for demo or stabilization inspection in the next year</a:t>
-            </a:r>
-            <a:r>
-              <a:rPr lang="en" sz="3467" dirty="0">
-                <a:solidFill>
-                  <a:srgbClr val="595959"/>
-                </a:solidFill>
-              </a:rPr>
-              <a:t>?</a:t>
-            </a:r>
-            <a:endParaRPr sz="3467" dirty="0">
-              <a:solidFill>
-                <a:srgbClr val="595959"/>
-              </a:solidFill>
-            </a:endParaRPr>
-          </a:p>
-        </p:txBody>
-      </p:sp>
-      <p:sp>
-        <p:nvSpPr>
-          <p:cNvPr id="206" name="Google Shape;206;p38"/>
-          <p:cNvSpPr txBox="1"/>
-          <p:nvPr/>
-        </p:nvSpPr>
-        <p:spPr>
-          <a:xfrm>
-            <a:off x="248120" y="1463207"/>
-            <a:ext cx="3008400" cy="796000"/>
-          </a:xfrm>
-          <a:prstGeom prst="rect">
-            <a:avLst/>
-          </a:prstGeom>
-          <a:noFill/>
-          <a:ln>
-            <a:noFill/>
-          </a:ln>
-        </p:spPr>
-        <p:txBody>
-          <a:bodyPr spcFirstLastPara="1" wrap="square" lIns="121900" tIns="121900" rIns="121900" bIns="121900" anchor="t" anchorCtr="0">
-            <a:noAutofit/>
-          </a:bodyPr>
-          <a:lstStyle/>
-          <a:p>
-            <a:pPr>
-              <a:buSzPts val="1400"/>
-            </a:pPr>
-            <a:r>
-              <a:rPr lang="en" sz="1867">
-                <a:solidFill>
-                  <a:srgbClr val="FF0000"/>
-                </a:solidFill>
-              </a:rPr>
-              <a:t>When and How often is the recommendation / decision being made?</a:t>
-            </a:r>
-            <a:endParaRPr sz="1867">
-              <a:solidFill>
-                <a:srgbClr val="FF0000"/>
-              </a:solidFill>
-            </a:endParaRPr>
-          </a:p>
-        </p:txBody>
-      </p:sp>
-      <p:sp>
-        <p:nvSpPr>
-          <p:cNvPr id="207" name="Google Shape;207;p38"/>
-          <p:cNvSpPr txBox="1"/>
-          <p:nvPr/>
-        </p:nvSpPr>
-        <p:spPr>
-          <a:xfrm>
-            <a:off x="253253" y="2632740"/>
-            <a:ext cx="3008400" cy="796000"/>
-          </a:xfrm>
-          <a:prstGeom prst="rect">
-            <a:avLst/>
-          </a:prstGeom>
-          <a:noFill/>
-          <a:ln>
-            <a:noFill/>
-          </a:ln>
-        </p:spPr>
-        <p:txBody>
-          <a:bodyPr spcFirstLastPara="1" wrap="square" lIns="121900" tIns="121900" rIns="121900" bIns="121900" anchor="t" anchorCtr="0">
-            <a:noAutofit/>
-          </a:bodyPr>
-          <a:lstStyle/>
-          <a:p>
-            <a:pPr>
-              <a:buSzPts val="1400"/>
-            </a:pPr>
-            <a:br>
-              <a:rPr lang="en" sz="1867">
-                <a:solidFill>
-                  <a:srgbClr val="0000FF"/>
-                </a:solidFill>
-              </a:rPr>
-            </a:br>
-            <a:r>
-              <a:rPr lang="en" sz="1867">
-                <a:solidFill>
-                  <a:srgbClr val="0000FF"/>
-                </a:solidFill>
-              </a:rPr>
-              <a:t>Who/what is included in the cohort?</a:t>
-            </a:r>
-            <a:endParaRPr sz="1867">
-              <a:solidFill>
-                <a:srgbClr val="0000FF"/>
-              </a:solidFill>
-            </a:endParaRPr>
-          </a:p>
-        </p:txBody>
-      </p:sp>
-      <p:sp>
-        <p:nvSpPr>
-          <p:cNvPr id="208" name="Google Shape;208;p38"/>
-          <p:cNvSpPr txBox="1"/>
-          <p:nvPr/>
-        </p:nvSpPr>
-        <p:spPr>
-          <a:xfrm>
-            <a:off x="253253" y="3497473"/>
-            <a:ext cx="3008400" cy="796000"/>
-          </a:xfrm>
-          <a:prstGeom prst="rect">
-            <a:avLst/>
-          </a:prstGeom>
-          <a:noFill/>
-          <a:ln>
-            <a:noFill/>
-          </a:ln>
-        </p:spPr>
-        <p:txBody>
-          <a:bodyPr spcFirstLastPara="1" wrap="square" lIns="121900" tIns="121900" rIns="121900" bIns="121900" anchor="t" anchorCtr="0">
-            <a:noAutofit/>
-          </a:bodyPr>
-          <a:lstStyle/>
-          <a:p>
-            <a:pPr>
-              <a:buSzPts val="1400"/>
-            </a:pPr>
-            <a:br>
-              <a:rPr lang="en" sz="1867">
-                <a:solidFill>
-                  <a:srgbClr val="FF00FF"/>
-                </a:solidFill>
-              </a:rPr>
-            </a:br>
-            <a:r>
-              <a:rPr lang="en" sz="1867">
-                <a:solidFill>
-                  <a:srgbClr val="FF00FF"/>
-                </a:solidFill>
-              </a:rPr>
-              <a:t>What is the output?</a:t>
-            </a:r>
-            <a:endParaRPr sz="1867">
-              <a:solidFill>
-                <a:srgbClr val="FF00FF"/>
-              </a:solidFill>
-            </a:endParaRPr>
-          </a:p>
-        </p:txBody>
-      </p:sp>
-      <p:sp>
-        <p:nvSpPr>
-          <p:cNvPr id="209" name="Google Shape;209;p38"/>
-          <p:cNvSpPr txBox="1"/>
-          <p:nvPr/>
-        </p:nvSpPr>
-        <p:spPr>
-          <a:xfrm>
-            <a:off x="248120" y="4191873"/>
-            <a:ext cx="3008400" cy="1475600"/>
-          </a:xfrm>
-          <a:prstGeom prst="rect">
-            <a:avLst/>
-          </a:prstGeom>
-          <a:noFill/>
-          <a:ln>
-            <a:noFill/>
-          </a:ln>
-        </p:spPr>
-        <p:txBody>
-          <a:bodyPr spcFirstLastPara="1" wrap="square" lIns="121900" tIns="121900" rIns="121900" bIns="121900" anchor="t" anchorCtr="0">
-            <a:noAutofit/>
-          </a:bodyPr>
-          <a:lstStyle/>
-          <a:p>
-            <a:pPr>
-              <a:buSzPts val="1400"/>
-            </a:pPr>
-            <a:r>
-              <a:rPr lang="en" sz="1867">
-                <a:solidFill>
-                  <a:srgbClr val="274E13"/>
-                </a:solidFill>
-              </a:rPr>
-              <a:t>What outcome are you predicting/estimating?</a:t>
-            </a:r>
-            <a:endParaRPr sz="1867">
-              <a:solidFill>
-                <a:srgbClr val="274E13"/>
-              </a:solidFill>
-            </a:endParaRPr>
-          </a:p>
-          <a:p>
-            <a:pPr>
-              <a:buSzPts val="1400"/>
-            </a:pPr>
-            <a:endParaRPr sz="1867">
-              <a:solidFill>
-                <a:srgbClr val="274E13"/>
-              </a:solidFill>
-            </a:endParaRPr>
-          </a:p>
-          <a:p>
-            <a:pPr>
-              <a:buSzPts val="1400"/>
-            </a:pPr>
-            <a:r>
-              <a:rPr lang="en" sz="1867">
-                <a:solidFill>
-                  <a:srgbClr val="B45F06"/>
-                </a:solidFill>
-              </a:rPr>
-              <a:t>For what purpose?</a:t>
-            </a:r>
-            <a:endParaRPr sz="1867">
-              <a:solidFill>
-                <a:srgbClr val="274E13"/>
-              </a:solidFill>
-            </a:endParaRPr>
-          </a:p>
-        </p:txBody>
-      </p:sp>
     </p:spTree>
-  </p:cSld>
-  <p:clrMapOvr>
-    <a:masterClrMapping/>
-  </p:clrMapOvr>
-</p:sld>
-</file>
-
-<file path=ppt/slides/slide18.xml><?xml version="1.0" encoding="utf-8"?>
-<p:sld xmlns:a="http://schemas.openxmlformats.org/drawingml/2006/main" xmlns:r="http://schemas.openxmlformats.org/officeDocument/2006/relationships" xmlns:p="http://schemas.openxmlformats.org/presentationml/2006/main">
-  <p:cSld>
-    <p:spTree>
-      <p:nvGrpSpPr>
-        <p:cNvPr id="1" name="Shape 232"/>
-        <p:cNvGrpSpPr/>
-        <p:nvPr/>
-      </p:nvGrpSpPr>
-      <p:grpSpPr>
-        <a:xfrm>
-          <a:off x="0" y="0"/>
-          <a:ext cx="0" cy="0"/>
-          <a:chOff x="0" y="0"/>
-          <a:chExt cx="0" cy="0"/>
-        </a:xfrm>
-      </p:grpSpPr>
-      <p:sp>
-        <p:nvSpPr>
-          <p:cNvPr id="2" name="Text Placeholder 1">
-            <a:extLst>
-              <a:ext uri="{FF2B5EF4-FFF2-40B4-BE49-F238E27FC236}">
-                <a16:creationId xmlns:a16="http://schemas.microsoft.com/office/drawing/2014/main" id="{32D41A7C-7A01-06C2-224D-BE64B19B9E95}"/>
-              </a:ext>
-            </a:extLst>
-          </p:cNvPr>
-          <p:cNvSpPr>
-            <a:spLocks noGrp="1"/>
-          </p:cNvSpPr>
-          <p:nvPr>
-            <p:ph type="body" idx="1"/>
-          </p:nvPr>
-        </p:nvSpPr>
-        <p:spPr/>
-        <p:txBody>
-          <a:bodyPr/>
-          <a:lstStyle/>
-          <a:p>
-            <a:endParaRPr lang="en-US"/>
-          </a:p>
-        </p:txBody>
-      </p:sp>
-      <p:sp>
-        <p:nvSpPr>
-          <p:cNvPr id="233" name="Google Shape;233;p42"/>
-          <p:cNvSpPr txBox="1">
-            <a:spLocks noGrp="1"/>
-          </p:cNvSpPr>
-          <p:nvPr>
-            <p:ph type="title"/>
-          </p:nvPr>
-        </p:nvSpPr>
-        <p:spPr>
-          <a:prstGeom prst="rect">
-            <a:avLst/>
-          </a:prstGeom>
-        </p:spPr>
-        <p:txBody>
-          <a:bodyPr spcFirstLastPara="1" wrap="square" lIns="121900" tIns="121900" rIns="121900" bIns="121900" anchor="t" anchorCtr="0">
-            <a:normAutofit fontScale="90000"/>
-          </a:bodyPr>
-          <a:lstStyle/>
-          <a:p>
-            <a:r>
-              <a:rPr lang="en"/>
-              <a:t>Analytical Formulation</a:t>
-            </a:r>
-            <a:endParaRPr/>
-          </a:p>
-        </p:txBody>
-      </p:sp>
-      <p:sp>
-        <p:nvSpPr>
-          <p:cNvPr id="234" name="Google Shape;234;p42"/>
-          <p:cNvSpPr/>
-          <p:nvPr/>
-        </p:nvSpPr>
-        <p:spPr>
-          <a:xfrm>
-            <a:off x="190320" y="1463207"/>
-            <a:ext cx="3124000" cy="4204400"/>
-          </a:xfrm>
-          <a:prstGeom prst="rect">
-            <a:avLst/>
-          </a:prstGeom>
-          <a:solidFill>
-            <a:srgbClr val="EEEEEE"/>
-          </a:solidFill>
-          <a:ln w="9525" cap="flat" cmpd="sng">
-            <a:solidFill>
-              <a:srgbClr val="595959"/>
-            </a:solidFill>
-            <a:prstDash val="solid"/>
-            <a:round/>
-            <a:headEnd type="none" w="sm" len="sm"/>
-            <a:tailEnd type="none" w="sm" len="sm"/>
-          </a:ln>
-        </p:spPr>
-        <p:txBody>
-          <a:bodyPr spcFirstLastPara="1" wrap="square" lIns="121900" tIns="121900" rIns="121900" bIns="121900" anchor="ctr" anchorCtr="0">
-            <a:noAutofit/>
-          </a:bodyPr>
-          <a:lstStyle/>
-          <a:p>
-            <a:pPr>
-              <a:buSzPts val="1400"/>
-            </a:pPr>
-            <a:endParaRPr sz="1867"/>
-          </a:p>
-        </p:txBody>
-      </p:sp>
-      <p:sp>
-        <p:nvSpPr>
-          <p:cNvPr id="235" name="Google Shape;235;p42"/>
-          <p:cNvSpPr txBox="1"/>
-          <p:nvPr/>
-        </p:nvSpPr>
-        <p:spPr>
-          <a:xfrm>
-            <a:off x="3566453" y="1341573"/>
-            <a:ext cx="8531200" cy="4555200"/>
-          </a:xfrm>
-          <a:prstGeom prst="rect">
-            <a:avLst/>
-          </a:prstGeom>
-          <a:noFill/>
-          <a:ln>
-            <a:noFill/>
-          </a:ln>
-        </p:spPr>
-        <p:txBody>
-          <a:bodyPr spcFirstLastPara="1" wrap="square" lIns="121900" tIns="121900" rIns="121900" bIns="121900" anchor="t" anchorCtr="0">
-            <a:noAutofit/>
-          </a:bodyPr>
-          <a:lstStyle/>
-          <a:p>
-            <a:pPr>
-              <a:buClr>
-                <a:schemeClr val="dk1"/>
-              </a:buClr>
-              <a:buSzPts val="1100"/>
-            </a:pPr>
-            <a:r>
-              <a:rPr lang="en" sz="3467" dirty="0">
-                <a:solidFill>
-                  <a:srgbClr val="FF0000"/>
-                </a:solidFill>
-              </a:rPr>
-              <a:t>Every day</a:t>
-            </a:r>
-            <a:r>
-              <a:rPr lang="en" sz="3467" dirty="0">
-                <a:solidFill>
-                  <a:schemeClr val="dk1"/>
-                </a:solidFill>
-              </a:rPr>
-              <a:t>, for</a:t>
-            </a:r>
-            <a:r>
-              <a:rPr lang="en" sz="3467" dirty="0">
-                <a:solidFill>
-                  <a:srgbClr val="0000FF"/>
-                </a:solidFill>
-              </a:rPr>
-              <a:t> all first time defendants with </a:t>
-            </a:r>
-            <a:r>
-              <a:rPr lang="en" sz="3467" dirty="0">
-                <a:solidFill>
-                  <a:srgbClr val="0000FF"/>
-                </a:solidFill>
-                <a:highlight>
-                  <a:srgbClr val="FFFFFF"/>
-                </a:highlight>
-              </a:rPr>
-              <a:t>low-level, nonviolent ordinance violation cases</a:t>
-            </a:r>
-            <a:r>
-              <a:rPr lang="en" sz="3467" dirty="0">
-                <a:solidFill>
-                  <a:schemeClr val="dk1"/>
-                </a:solidFill>
-              </a:rPr>
-              <a:t>, can we identify the </a:t>
-            </a:r>
-            <a:r>
-              <a:rPr lang="en" sz="3467" dirty="0">
-                <a:solidFill>
-                  <a:srgbClr val="FF00FF"/>
-                </a:solidFill>
-              </a:rPr>
-              <a:t>top 5% of people at highest risk </a:t>
-            </a:r>
-            <a:r>
-              <a:rPr lang="en" sz="3467" dirty="0">
-                <a:solidFill>
-                  <a:schemeClr val="dk1"/>
-                </a:solidFill>
-              </a:rPr>
-              <a:t>of</a:t>
-            </a:r>
-            <a:r>
-              <a:rPr lang="en" sz="3467" dirty="0">
-                <a:solidFill>
-                  <a:srgbClr val="38761D"/>
-                </a:solidFill>
-              </a:rPr>
-              <a:t> not completing their probation terms</a:t>
-            </a:r>
-            <a:r>
-              <a:rPr lang="en" sz="3467" dirty="0">
-                <a:solidFill>
-                  <a:srgbClr val="FF00FF"/>
-                </a:solidFill>
-              </a:rPr>
-              <a:t> </a:t>
-            </a:r>
-            <a:r>
-              <a:rPr lang="en" sz="3467" dirty="0">
-                <a:solidFill>
-                  <a:srgbClr val="B45F06"/>
-                </a:solidFill>
-              </a:rPr>
-              <a:t>to restructure their terms in order to support better outcomes and prevent new cases.</a:t>
-            </a:r>
-            <a:endParaRPr sz="3467" dirty="0">
-              <a:solidFill>
-                <a:srgbClr val="B45F06"/>
-              </a:solidFill>
-            </a:endParaRPr>
-          </a:p>
-          <a:p>
-            <a:pPr>
-              <a:lnSpc>
-                <a:spcPct val="115000"/>
-              </a:lnSpc>
-              <a:spcAft>
-                <a:spcPts val="2133"/>
-              </a:spcAft>
-            </a:pPr>
-            <a:endParaRPr sz="3467" dirty="0">
-              <a:solidFill>
-                <a:srgbClr val="595959"/>
-              </a:solidFill>
-            </a:endParaRPr>
-          </a:p>
-        </p:txBody>
-      </p:sp>
-      <p:sp>
-        <p:nvSpPr>
-          <p:cNvPr id="236" name="Google Shape;236;p42"/>
-          <p:cNvSpPr txBox="1"/>
-          <p:nvPr/>
-        </p:nvSpPr>
-        <p:spPr>
-          <a:xfrm>
-            <a:off x="248120" y="1463207"/>
-            <a:ext cx="3008400" cy="796000"/>
-          </a:xfrm>
-          <a:prstGeom prst="rect">
-            <a:avLst/>
-          </a:prstGeom>
-          <a:noFill/>
-          <a:ln>
-            <a:noFill/>
-          </a:ln>
-        </p:spPr>
-        <p:txBody>
-          <a:bodyPr spcFirstLastPara="1" wrap="square" lIns="121900" tIns="121900" rIns="121900" bIns="121900" anchor="t" anchorCtr="0">
-            <a:noAutofit/>
-          </a:bodyPr>
-          <a:lstStyle/>
-          <a:p>
-            <a:pPr>
-              <a:buSzPts val="1400"/>
-            </a:pPr>
-            <a:r>
-              <a:rPr lang="en" sz="1867">
-                <a:solidFill>
-                  <a:srgbClr val="FF0000"/>
-                </a:solidFill>
-              </a:rPr>
-              <a:t>When and How often is the recommendation / decision being made?</a:t>
-            </a:r>
-            <a:endParaRPr sz="1867">
-              <a:solidFill>
-                <a:srgbClr val="FF0000"/>
-              </a:solidFill>
-            </a:endParaRPr>
-          </a:p>
-        </p:txBody>
-      </p:sp>
-      <p:sp>
-        <p:nvSpPr>
-          <p:cNvPr id="237" name="Google Shape;237;p42"/>
-          <p:cNvSpPr txBox="1"/>
-          <p:nvPr/>
-        </p:nvSpPr>
-        <p:spPr>
-          <a:xfrm>
-            <a:off x="253253" y="2632740"/>
-            <a:ext cx="3008400" cy="796000"/>
-          </a:xfrm>
-          <a:prstGeom prst="rect">
-            <a:avLst/>
-          </a:prstGeom>
-          <a:noFill/>
-          <a:ln>
-            <a:noFill/>
-          </a:ln>
-        </p:spPr>
-        <p:txBody>
-          <a:bodyPr spcFirstLastPara="1" wrap="square" lIns="121900" tIns="121900" rIns="121900" bIns="121900" anchor="t" anchorCtr="0">
-            <a:noAutofit/>
-          </a:bodyPr>
-          <a:lstStyle/>
-          <a:p>
-            <a:pPr>
-              <a:buSzPts val="1400"/>
-            </a:pPr>
-            <a:br>
-              <a:rPr lang="en" sz="1867">
-                <a:solidFill>
-                  <a:srgbClr val="0000FF"/>
-                </a:solidFill>
-              </a:rPr>
-            </a:br>
-            <a:r>
-              <a:rPr lang="en" sz="1867">
-                <a:solidFill>
-                  <a:srgbClr val="0000FF"/>
-                </a:solidFill>
-              </a:rPr>
-              <a:t>Who/what is included in the cohort?</a:t>
-            </a:r>
-            <a:endParaRPr sz="1867">
-              <a:solidFill>
-                <a:srgbClr val="0000FF"/>
-              </a:solidFill>
-            </a:endParaRPr>
-          </a:p>
-        </p:txBody>
-      </p:sp>
-      <p:sp>
-        <p:nvSpPr>
-          <p:cNvPr id="238" name="Google Shape;238;p42"/>
-          <p:cNvSpPr txBox="1"/>
-          <p:nvPr/>
-        </p:nvSpPr>
-        <p:spPr>
-          <a:xfrm>
-            <a:off x="253253" y="3497473"/>
-            <a:ext cx="3008400" cy="796000"/>
-          </a:xfrm>
-          <a:prstGeom prst="rect">
-            <a:avLst/>
-          </a:prstGeom>
-          <a:noFill/>
-          <a:ln>
-            <a:noFill/>
-          </a:ln>
-        </p:spPr>
-        <p:txBody>
-          <a:bodyPr spcFirstLastPara="1" wrap="square" lIns="121900" tIns="121900" rIns="121900" bIns="121900" anchor="t" anchorCtr="0">
-            <a:noAutofit/>
-          </a:bodyPr>
-          <a:lstStyle/>
-          <a:p>
-            <a:pPr>
-              <a:buSzPts val="1400"/>
-            </a:pPr>
-            <a:br>
-              <a:rPr lang="en" sz="1867">
-                <a:solidFill>
-                  <a:srgbClr val="FF00FF"/>
-                </a:solidFill>
-              </a:rPr>
-            </a:br>
-            <a:r>
-              <a:rPr lang="en" sz="1867">
-                <a:solidFill>
-                  <a:srgbClr val="FF00FF"/>
-                </a:solidFill>
-              </a:rPr>
-              <a:t>What is the output?</a:t>
-            </a:r>
-            <a:endParaRPr sz="1867">
-              <a:solidFill>
-                <a:srgbClr val="FF00FF"/>
-              </a:solidFill>
-            </a:endParaRPr>
-          </a:p>
-        </p:txBody>
-      </p:sp>
-      <p:sp>
-        <p:nvSpPr>
-          <p:cNvPr id="239" name="Google Shape;239;p42"/>
-          <p:cNvSpPr txBox="1"/>
-          <p:nvPr/>
-        </p:nvSpPr>
-        <p:spPr>
-          <a:xfrm>
-            <a:off x="248120" y="4191873"/>
-            <a:ext cx="3008400" cy="1475600"/>
-          </a:xfrm>
-          <a:prstGeom prst="rect">
-            <a:avLst/>
-          </a:prstGeom>
-          <a:noFill/>
-          <a:ln>
-            <a:noFill/>
-          </a:ln>
-        </p:spPr>
-        <p:txBody>
-          <a:bodyPr spcFirstLastPara="1" wrap="square" lIns="121900" tIns="121900" rIns="121900" bIns="121900" anchor="t" anchorCtr="0">
-            <a:noAutofit/>
-          </a:bodyPr>
-          <a:lstStyle/>
-          <a:p>
-            <a:pPr>
-              <a:buSzPts val="1400"/>
-            </a:pPr>
-            <a:r>
-              <a:rPr lang="en" sz="1867">
-                <a:solidFill>
-                  <a:srgbClr val="274E13"/>
-                </a:solidFill>
-              </a:rPr>
-              <a:t>What outcome are you predicting/estimating?</a:t>
-            </a:r>
-            <a:endParaRPr sz="1867">
-              <a:solidFill>
-                <a:srgbClr val="274E13"/>
-              </a:solidFill>
-            </a:endParaRPr>
-          </a:p>
-          <a:p>
-            <a:pPr>
-              <a:buSzPts val="1400"/>
-            </a:pPr>
-            <a:endParaRPr sz="1867">
-              <a:solidFill>
-                <a:srgbClr val="274E13"/>
-              </a:solidFill>
-            </a:endParaRPr>
-          </a:p>
-          <a:p>
-            <a:pPr>
-              <a:buSzPts val="1400"/>
-            </a:pPr>
-            <a:r>
-              <a:rPr lang="en" sz="1867">
-                <a:solidFill>
-                  <a:srgbClr val="B45F06"/>
-                </a:solidFill>
-              </a:rPr>
-              <a:t>For what purpose?</a:t>
-            </a:r>
-            <a:endParaRPr sz="1867">
-              <a:solidFill>
-                <a:srgbClr val="274E13"/>
-              </a:solidFill>
-            </a:endParaRPr>
-          </a:p>
-        </p:txBody>
-      </p:sp>
-    </p:spTree>
-  </p:cSld>
-  <p:clrMapOvr>
-    <a:masterClrMapping/>
-  </p:clrMapOvr>
-</p:sld>
-</file>
-
-<file path=ppt/slides/slide19.xml><?xml version="1.0" encoding="utf-8"?>
-<p:sld xmlns:a="http://schemas.openxmlformats.org/drawingml/2006/main" xmlns:r="http://schemas.openxmlformats.org/officeDocument/2006/relationships" xmlns:p="http://schemas.openxmlformats.org/presentationml/2006/main">
-  <p:cSld>
-    <p:spTree>
-      <p:nvGrpSpPr>
-        <p:cNvPr id="1" name="Shape 262"/>
-        <p:cNvGrpSpPr/>
-        <p:nvPr/>
-      </p:nvGrpSpPr>
-      <p:grpSpPr>
-        <a:xfrm>
-          <a:off x="0" y="0"/>
-          <a:ext cx="0" cy="0"/>
-          <a:chOff x="0" y="0"/>
-          <a:chExt cx="0" cy="0"/>
-        </a:xfrm>
-      </p:grpSpPr>
-      <p:sp>
-        <p:nvSpPr>
-          <p:cNvPr id="2" name="Text Placeholder 1">
-            <a:extLst>
-              <a:ext uri="{FF2B5EF4-FFF2-40B4-BE49-F238E27FC236}">
-                <a16:creationId xmlns:a16="http://schemas.microsoft.com/office/drawing/2014/main" id="{BB1BBD25-1C37-5157-CF0F-11E6D2EA892C}"/>
-              </a:ext>
-            </a:extLst>
-          </p:cNvPr>
-          <p:cNvSpPr>
-            <a:spLocks noGrp="1"/>
-          </p:cNvSpPr>
-          <p:nvPr>
-            <p:ph type="body" idx="1"/>
-          </p:nvPr>
-        </p:nvSpPr>
-        <p:spPr/>
-        <p:txBody>
-          <a:bodyPr/>
-          <a:lstStyle/>
-          <a:p>
-            <a:endParaRPr lang="en-US"/>
-          </a:p>
-        </p:txBody>
-      </p:sp>
-      <p:sp>
-        <p:nvSpPr>
-          <p:cNvPr id="263" name="Google Shape;263;p46"/>
-          <p:cNvSpPr txBox="1">
-            <a:spLocks noGrp="1"/>
-          </p:cNvSpPr>
-          <p:nvPr>
-            <p:ph type="title"/>
-          </p:nvPr>
-        </p:nvSpPr>
-        <p:spPr>
-          <a:prstGeom prst="rect">
-            <a:avLst/>
-          </a:prstGeom>
-        </p:spPr>
-        <p:txBody>
-          <a:bodyPr spcFirstLastPara="1" wrap="square" lIns="121900" tIns="121900" rIns="121900" bIns="121900" anchor="t" anchorCtr="0">
-            <a:normAutofit fontScale="90000"/>
-          </a:bodyPr>
-          <a:lstStyle/>
-          <a:p>
-            <a:r>
-              <a:rPr lang="en"/>
-              <a:t>Analytical Formulation</a:t>
-            </a:r>
-            <a:endParaRPr/>
-          </a:p>
-        </p:txBody>
-      </p:sp>
-      <p:sp>
-        <p:nvSpPr>
-          <p:cNvPr id="265" name="Google Shape;265;p46"/>
-          <p:cNvSpPr txBox="1"/>
-          <p:nvPr/>
-        </p:nvSpPr>
-        <p:spPr>
-          <a:xfrm>
-            <a:off x="3629033" y="1463200"/>
-            <a:ext cx="8147200" cy="4588395"/>
-          </a:xfrm>
-          <a:prstGeom prst="rect">
-            <a:avLst/>
-          </a:prstGeom>
-          <a:noFill/>
-          <a:ln>
-            <a:noFill/>
-          </a:ln>
-        </p:spPr>
-        <p:txBody>
-          <a:bodyPr spcFirstLastPara="1" wrap="square" lIns="121900" tIns="121900" rIns="121900" bIns="121900" anchor="t" anchorCtr="0">
-            <a:spAutoFit/>
-          </a:bodyPr>
-          <a:lstStyle/>
-          <a:p>
-            <a:pPr>
-              <a:lnSpc>
-                <a:spcPct val="115000"/>
-              </a:lnSpc>
-            </a:pPr>
-            <a:r>
-              <a:rPr lang="en" sz="3067" dirty="0">
-                <a:solidFill>
-                  <a:srgbClr val="FF0000"/>
-                </a:solidFill>
-                <a:latin typeface="Calibri"/>
-                <a:ea typeface="Calibri"/>
-                <a:cs typeface="Calibri"/>
-                <a:sym typeface="Calibri"/>
-              </a:rPr>
-              <a:t>Every time ACDHS gets eviction filing data (weekly),</a:t>
-            </a:r>
-            <a:r>
-              <a:rPr lang="en" sz="3067" dirty="0">
-                <a:solidFill>
-                  <a:srgbClr val="0000FF"/>
-                </a:solidFill>
-                <a:latin typeface="Calibri"/>
-                <a:ea typeface="Calibri"/>
-                <a:cs typeface="Calibri"/>
-                <a:sym typeface="Calibri"/>
-              </a:rPr>
-              <a:t> for all individuals who have interacted with ACDHS in the 12 months who are not currently homeless and have had an eviction filing in the last 4 months</a:t>
-            </a:r>
-            <a:r>
-              <a:rPr lang="en" sz="3067" dirty="0">
-                <a:latin typeface="Calibri"/>
-                <a:ea typeface="Calibri"/>
-                <a:cs typeface="Calibri"/>
-                <a:sym typeface="Calibri"/>
-              </a:rPr>
-              <a:t>, can we identify the </a:t>
-            </a:r>
-            <a:r>
-              <a:rPr lang="en" sz="3067" dirty="0">
-                <a:solidFill>
-                  <a:srgbClr val="FF00FF"/>
-                </a:solidFill>
-                <a:latin typeface="Calibri"/>
-                <a:ea typeface="Calibri"/>
-                <a:cs typeface="Calibri"/>
-                <a:sym typeface="Calibri"/>
-              </a:rPr>
-              <a:t>50 individuals at highest risk</a:t>
-            </a:r>
-            <a:r>
-              <a:rPr lang="en" sz="3067" dirty="0">
-                <a:latin typeface="Calibri"/>
-                <a:ea typeface="Calibri"/>
-                <a:cs typeface="Calibri"/>
-                <a:sym typeface="Calibri"/>
-              </a:rPr>
-              <a:t> </a:t>
-            </a:r>
-            <a:r>
-              <a:rPr lang="en" sz="3067" dirty="0">
-                <a:solidFill>
-                  <a:srgbClr val="38761D"/>
-                </a:solidFill>
-                <a:latin typeface="Calibri"/>
-                <a:ea typeface="Calibri"/>
-                <a:cs typeface="Calibri"/>
-                <a:sym typeface="Calibri"/>
-              </a:rPr>
-              <a:t>of entering into homelessness in the next 12 months </a:t>
-            </a:r>
-            <a:r>
-              <a:rPr lang="en" sz="3067" dirty="0">
-                <a:solidFill>
-                  <a:srgbClr val="B45F06"/>
-                </a:solidFill>
-                <a:latin typeface="Calibri"/>
-                <a:ea typeface="Calibri"/>
-                <a:cs typeface="Calibri"/>
-                <a:sym typeface="Calibri"/>
-              </a:rPr>
-              <a:t>to prioritize for distribution of rental assistance?</a:t>
-            </a:r>
-            <a:endParaRPr sz="3467" dirty="0">
-              <a:solidFill>
-                <a:srgbClr val="B45F06"/>
-              </a:solidFill>
-              <a:latin typeface="Calibri"/>
-              <a:ea typeface="Calibri"/>
-              <a:cs typeface="Calibri"/>
-              <a:sym typeface="Calibri"/>
-            </a:endParaRPr>
-          </a:p>
-        </p:txBody>
-      </p:sp>
-      <p:sp>
-        <p:nvSpPr>
-          <p:cNvPr id="266" name="Google Shape;266;p46"/>
-          <p:cNvSpPr/>
-          <p:nvPr/>
-        </p:nvSpPr>
-        <p:spPr>
-          <a:xfrm>
-            <a:off x="190320" y="1463207"/>
-            <a:ext cx="3124000" cy="4204400"/>
-          </a:xfrm>
-          <a:prstGeom prst="rect">
-            <a:avLst/>
-          </a:prstGeom>
-          <a:solidFill>
-            <a:srgbClr val="EEEEEE"/>
-          </a:solidFill>
-          <a:ln w="9525" cap="flat" cmpd="sng">
-            <a:solidFill>
-              <a:srgbClr val="595959"/>
-            </a:solidFill>
-            <a:prstDash val="solid"/>
-            <a:round/>
-            <a:headEnd type="none" w="sm" len="sm"/>
-            <a:tailEnd type="none" w="sm" len="sm"/>
-          </a:ln>
-        </p:spPr>
-        <p:txBody>
-          <a:bodyPr spcFirstLastPara="1" wrap="square" lIns="121900" tIns="121900" rIns="121900" bIns="121900" anchor="ctr" anchorCtr="0">
-            <a:noAutofit/>
-          </a:bodyPr>
-          <a:lstStyle/>
-          <a:p>
-            <a:pPr>
-              <a:buSzPts val="1400"/>
-            </a:pPr>
-            <a:endParaRPr sz="1867"/>
-          </a:p>
-        </p:txBody>
-      </p:sp>
-      <p:sp>
-        <p:nvSpPr>
-          <p:cNvPr id="267" name="Google Shape;267;p46"/>
-          <p:cNvSpPr txBox="1"/>
-          <p:nvPr/>
-        </p:nvSpPr>
-        <p:spPr>
-          <a:xfrm>
-            <a:off x="248120" y="1463207"/>
-            <a:ext cx="3008400" cy="796000"/>
-          </a:xfrm>
-          <a:prstGeom prst="rect">
-            <a:avLst/>
-          </a:prstGeom>
-          <a:noFill/>
-          <a:ln>
-            <a:noFill/>
-          </a:ln>
-        </p:spPr>
-        <p:txBody>
-          <a:bodyPr spcFirstLastPara="1" wrap="square" lIns="121900" tIns="121900" rIns="121900" bIns="121900" anchor="t" anchorCtr="0">
-            <a:noAutofit/>
-          </a:bodyPr>
-          <a:lstStyle/>
-          <a:p>
-            <a:pPr>
-              <a:buSzPts val="1400"/>
-            </a:pPr>
-            <a:r>
-              <a:rPr lang="en" sz="1867">
-                <a:solidFill>
-                  <a:srgbClr val="FF0000"/>
-                </a:solidFill>
-              </a:rPr>
-              <a:t>When and How often is the recommendation / decision being made?</a:t>
-            </a:r>
-            <a:endParaRPr sz="1867">
-              <a:solidFill>
-                <a:srgbClr val="FF0000"/>
-              </a:solidFill>
-            </a:endParaRPr>
-          </a:p>
-        </p:txBody>
-      </p:sp>
-      <p:sp>
-        <p:nvSpPr>
-          <p:cNvPr id="268" name="Google Shape;268;p46"/>
-          <p:cNvSpPr txBox="1"/>
-          <p:nvPr/>
-        </p:nvSpPr>
-        <p:spPr>
-          <a:xfrm>
-            <a:off x="253253" y="2632740"/>
-            <a:ext cx="3008400" cy="796000"/>
-          </a:xfrm>
-          <a:prstGeom prst="rect">
-            <a:avLst/>
-          </a:prstGeom>
-          <a:noFill/>
-          <a:ln>
-            <a:noFill/>
-          </a:ln>
-        </p:spPr>
-        <p:txBody>
-          <a:bodyPr spcFirstLastPara="1" wrap="square" lIns="121900" tIns="121900" rIns="121900" bIns="121900" anchor="t" anchorCtr="0">
-            <a:noAutofit/>
-          </a:bodyPr>
-          <a:lstStyle/>
-          <a:p>
-            <a:pPr>
-              <a:buSzPts val="1400"/>
-            </a:pPr>
-            <a:br>
-              <a:rPr lang="en" sz="1867">
-                <a:solidFill>
-                  <a:srgbClr val="0000FF"/>
-                </a:solidFill>
-              </a:rPr>
-            </a:br>
-            <a:r>
-              <a:rPr lang="en" sz="1867">
-                <a:solidFill>
-                  <a:srgbClr val="0000FF"/>
-                </a:solidFill>
-              </a:rPr>
-              <a:t>Who/what is included in the cohort?</a:t>
-            </a:r>
-            <a:endParaRPr sz="1867">
-              <a:solidFill>
-                <a:srgbClr val="0000FF"/>
-              </a:solidFill>
-            </a:endParaRPr>
-          </a:p>
-        </p:txBody>
-      </p:sp>
-      <p:sp>
-        <p:nvSpPr>
-          <p:cNvPr id="269" name="Google Shape;269;p46"/>
-          <p:cNvSpPr txBox="1"/>
-          <p:nvPr/>
-        </p:nvSpPr>
-        <p:spPr>
-          <a:xfrm>
-            <a:off x="253253" y="3497473"/>
-            <a:ext cx="3008400" cy="796000"/>
-          </a:xfrm>
-          <a:prstGeom prst="rect">
-            <a:avLst/>
-          </a:prstGeom>
-          <a:noFill/>
-          <a:ln>
-            <a:noFill/>
-          </a:ln>
-        </p:spPr>
-        <p:txBody>
-          <a:bodyPr spcFirstLastPara="1" wrap="square" lIns="121900" tIns="121900" rIns="121900" bIns="121900" anchor="t" anchorCtr="0">
-            <a:noAutofit/>
-          </a:bodyPr>
-          <a:lstStyle/>
-          <a:p>
-            <a:pPr>
-              <a:buSzPts val="1400"/>
-            </a:pPr>
-            <a:br>
-              <a:rPr lang="en" sz="1867">
-                <a:solidFill>
-                  <a:srgbClr val="FF00FF"/>
-                </a:solidFill>
-              </a:rPr>
-            </a:br>
-            <a:r>
-              <a:rPr lang="en" sz="1867">
-                <a:solidFill>
-                  <a:srgbClr val="FF00FF"/>
-                </a:solidFill>
-              </a:rPr>
-              <a:t>What is the output?</a:t>
-            </a:r>
-            <a:endParaRPr sz="1867">
-              <a:solidFill>
-                <a:srgbClr val="FF00FF"/>
-              </a:solidFill>
-            </a:endParaRPr>
-          </a:p>
-        </p:txBody>
-      </p:sp>
-      <p:sp>
-        <p:nvSpPr>
-          <p:cNvPr id="270" name="Google Shape;270;p46"/>
-          <p:cNvSpPr txBox="1"/>
-          <p:nvPr/>
-        </p:nvSpPr>
-        <p:spPr>
-          <a:xfrm>
-            <a:off x="248120" y="4191873"/>
-            <a:ext cx="3008400" cy="1475600"/>
-          </a:xfrm>
-          <a:prstGeom prst="rect">
-            <a:avLst/>
-          </a:prstGeom>
-          <a:noFill/>
-          <a:ln>
-            <a:noFill/>
-          </a:ln>
-        </p:spPr>
-        <p:txBody>
-          <a:bodyPr spcFirstLastPara="1" wrap="square" lIns="121900" tIns="121900" rIns="121900" bIns="121900" anchor="t" anchorCtr="0">
-            <a:noAutofit/>
-          </a:bodyPr>
-          <a:lstStyle/>
-          <a:p>
-            <a:pPr>
-              <a:buSzPts val="1400"/>
-            </a:pPr>
-            <a:r>
-              <a:rPr lang="en" sz="1867">
-                <a:solidFill>
-                  <a:srgbClr val="274E13"/>
-                </a:solidFill>
-              </a:rPr>
-              <a:t>What outcome are you predicting/estimating?</a:t>
-            </a:r>
-            <a:endParaRPr sz="1867">
-              <a:solidFill>
-                <a:srgbClr val="274E13"/>
-              </a:solidFill>
-            </a:endParaRPr>
-          </a:p>
-          <a:p>
-            <a:pPr>
-              <a:buSzPts val="1400"/>
-            </a:pPr>
-            <a:endParaRPr sz="1867">
-              <a:solidFill>
-                <a:srgbClr val="274E13"/>
-              </a:solidFill>
-            </a:endParaRPr>
-          </a:p>
-          <a:p>
-            <a:pPr>
-              <a:buSzPts val="1400"/>
-            </a:pPr>
-            <a:r>
-              <a:rPr lang="en" sz="1867">
-                <a:solidFill>
-                  <a:srgbClr val="B45F06"/>
-                </a:solidFill>
-              </a:rPr>
-              <a:t>For what purpose?</a:t>
-            </a:r>
-            <a:endParaRPr sz="1867">
-              <a:solidFill>
-                <a:srgbClr val="274E13"/>
-              </a:solidFill>
-            </a:endParaRPr>
-          </a:p>
-        </p:txBody>
-      </p:sp>
-    </p:spTree>
+    <p:extLst>
+      <p:ext uri="{BB962C8B-B14F-4D97-AF65-F5344CB8AC3E}">
+        <p14:creationId xmlns:p14="http://schemas.microsoft.com/office/powerpoint/2010/main" val="1039242333"/>
+      </p:ext>
+    </p:extLst>
   </p:cSld>
   <p:clrMapOvr>
     <a:masterClrMapping/>
@@ -12637,7 +11929,7 @@
             </a:pPr>
             <a:r>
               <a:rPr lang="en-US" dirty="0"/>
-              <a:t>Monday – project update assignment (Formulation and Baselines)</a:t>
+              <a:t>End of Monday – project update assignment (Formulation and Baselines)</a:t>
             </a:r>
           </a:p>
           <a:p>
@@ -12680,6 +11972,1397 @@
 </file>
 
 <file path=ppt/slides/slide20.xml><?xml version="1.0" encoding="utf-8"?>
+<p:sld xmlns:a="http://schemas.openxmlformats.org/drawingml/2006/main" xmlns:r="http://schemas.openxmlformats.org/officeDocument/2006/relationships" xmlns:p="http://schemas.openxmlformats.org/presentationml/2006/main">
+  <p:cSld>
+    <p:spTree>
+      <p:nvGrpSpPr>
+        <p:cNvPr id="1" name="Shape 144"/>
+        <p:cNvGrpSpPr/>
+        <p:nvPr/>
+      </p:nvGrpSpPr>
+      <p:grpSpPr>
+        <a:xfrm>
+          <a:off x="0" y="0"/>
+          <a:ext cx="0" cy="0"/>
+          <a:chOff x="0" y="0"/>
+          <a:chExt cx="0" cy="0"/>
+        </a:xfrm>
+      </p:grpSpPr>
+      <p:sp>
+        <p:nvSpPr>
+          <p:cNvPr id="2" name="Text Placeholder 1">
+            <a:extLst>
+              <a:ext uri="{FF2B5EF4-FFF2-40B4-BE49-F238E27FC236}">
+                <a16:creationId xmlns:a16="http://schemas.microsoft.com/office/drawing/2014/main" id="{F99FE356-1ECD-E2A9-D4E2-8BCE7296DD38}"/>
+              </a:ext>
+            </a:extLst>
+          </p:cNvPr>
+          <p:cNvSpPr>
+            <a:spLocks noGrp="1"/>
+          </p:cNvSpPr>
+          <p:nvPr>
+            <p:ph type="body" idx="1"/>
+          </p:nvPr>
+        </p:nvSpPr>
+        <p:spPr/>
+        <p:txBody>
+          <a:bodyPr/>
+          <a:lstStyle/>
+          <a:p>
+            <a:endParaRPr lang="en-US" dirty="0"/>
+          </a:p>
+        </p:txBody>
+      </p:sp>
+      <p:sp>
+        <p:nvSpPr>
+          <p:cNvPr id="145" name="Google Shape;145;p30"/>
+          <p:cNvSpPr txBox="1">
+            <a:spLocks noGrp="1"/>
+          </p:cNvSpPr>
+          <p:nvPr>
+            <p:ph type="title"/>
+          </p:nvPr>
+        </p:nvSpPr>
+        <p:spPr>
+          <a:prstGeom prst="rect">
+            <a:avLst/>
+          </a:prstGeom>
+        </p:spPr>
+        <p:txBody>
+          <a:bodyPr spcFirstLastPara="1" wrap="square" lIns="121900" tIns="121900" rIns="121900" bIns="121900" anchor="t" anchorCtr="0">
+            <a:normAutofit fontScale="90000"/>
+          </a:bodyPr>
+          <a:lstStyle/>
+          <a:p>
+            <a:r>
+              <a:rPr lang="en"/>
+              <a:t>Analytical Formulation</a:t>
+            </a:r>
+            <a:endParaRPr/>
+          </a:p>
+        </p:txBody>
+      </p:sp>
+      <p:sp>
+        <p:nvSpPr>
+          <p:cNvPr id="146" name="Google Shape;146;p30"/>
+          <p:cNvSpPr/>
+          <p:nvPr/>
+        </p:nvSpPr>
+        <p:spPr>
+          <a:xfrm>
+            <a:off x="190320" y="1463207"/>
+            <a:ext cx="3124000" cy="4204400"/>
+          </a:xfrm>
+          <a:prstGeom prst="rect">
+            <a:avLst/>
+          </a:prstGeom>
+          <a:solidFill>
+            <a:srgbClr val="EEEEEE"/>
+          </a:solidFill>
+          <a:ln w="9525" cap="flat" cmpd="sng">
+            <a:solidFill>
+              <a:srgbClr val="595959"/>
+            </a:solidFill>
+            <a:prstDash val="solid"/>
+            <a:round/>
+            <a:headEnd type="none" w="sm" len="sm"/>
+            <a:tailEnd type="none" w="sm" len="sm"/>
+          </a:ln>
+        </p:spPr>
+        <p:txBody>
+          <a:bodyPr spcFirstLastPara="1" wrap="square" lIns="121900" tIns="121900" rIns="121900" bIns="121900" anchor="ctr" anchorCtr="0">
+            <a:noAutofit/>
+          </a:bodyPr>
+          <a:lstStyle/>
+          <a:p>
+            <a:pPr>
+              <a:buSzPts val="1400"/>
+            </a:pPr>
+            <a:endParaRPr sz="1867"/>
+          </a:p>
+        </p:txBody>
+      </p:sp>
+      <p:sp>
+        <p:nvSpPr>
+          <p:cNvPr id="147" name="Google Shape;147;p30"/>
+          <p:cNvSpPr txBox="1"/>
+          <p:nvPr/>
+        </p:nvSpPr>
+        <p:spPr>
+          <a:xfrm>
+            <a:off x="3566453" y="1341573"/>
+            <a:ext cx="8531200" cy="4555200"/>
+          </a:xfrm>
+          <a:prstGeom prst="rect">
+            <a:avLst/>
+          </a:prstGeom>
+          <a:noFill/>
+          <a:ln>
+            <a:noFill/>
+          </a:ln>
+        </p:spPr>
+        <p:txBody>
+          <a:bodyPr spcFirstLastPara="1" wrap="square" lIns="121900" tIns="121900" rIns="121900" bIns="121900" anchor="t" anchorCtr="0">
+            <a:noAutofit/>
+          </a:bodyPr>
+          <a:lstStyle/>
+          <a:p>
+            <a:pPr>
+              <a:lnSpc>
+                <a:spcPct val="115000"/>
+              </a:lnSpc>
+              <a:spcAft>
+                <a:spcPts val="2133"/>
+              </a:spcAft>
+            </a:pPr>
+            <a:r>
+              <a:rPr lang="en" sz="3467" dirty="0">
+                <a:solidFill>
+                  <a:srgbClr val="FF0000"/>
+                </a:solidFill>
+              </a:rPr>
+              <a:t>On the 1</a:t>
+            </a:r>
+            <a:r>
+              <a:rPr lang="en" sz="3467" baseline="30000" dirty="0">
+                <a:solidFill>
+                  <a:srgbClr val="FF0000"/>
+                </a:solidFill>
+              </a:rPr>
+              <a:t>st</a:t>
+            </a:r>
+            <a:r>
+              <a:rPr lang="en" sz="3467" dirty="0">
+                <a:solidFill>
+                  <a:srgbClr val="FF0000"/>
+                </a:solidFill>
+              </a:rPr>
+              <a:t> of every month</a:t>
+            </a:r>
+            <a:r>
+              <a:rPr lang="en" sz="3467" dirty="0">
+                <a:solidFill>
+                  <a:srgbClr val="595959"/>
+                </a:solidFill>
+              </a:rPr>
+              <a:t>, for </a:t>
+            </a:r>
+            <a:r>
+              <a:rPr lang="en" sz="3467" dirty="0">
+                <a:solidFill>
+                  <a:srgbClr val="0000FF"/>
+                </a:solidFill>
+              </a:rPr>
+              <a:t>all individuals who have interacted with the program in the last 3 years</a:t>
+            </a:r>
+            <a:r>
+              <a:rPr lang="en" sz="3467" dirty="0">
+                <a:solidFill>
+                  <a:srgbClr val="595959"/>
+                </a:solidFill>
+              </a:rPr>
+              <a:t>, can we identify the </a:t>
+            </a:r>
+            <a:r>
+              <a:rPr lang="en" sz="3467" dirty="0">
+                <a:solidFill>
+                  <a:srgbClr val="FF00FF"/>
+                </a:solidFill>
+              </a:rPr>
+              <a:t>100 individuals </a:t>
+            </a:r>
+            <a:r>
+              <a:rPr lang="en" sz="3467" dirty="0">
+                <a:solidFill>
+                  <a:srgbClr val="595959"/>
+                </a:solidFill>
+              </a:rPr>
+              <a:t>who are </a:t>
+            </a:r>
+            <a:r>
+              <a:rPr lang="en" sz="3467" dirty="0">
+                <a:solidFill>
+                  <a:srgbClr val="38761D"/>
+                </a:solidFill>
+              </a:rPr>
+              <a:t>at highest risk to die by suicide or overdose in the next 6 months </a:t>
+            </a:r>
+            <a:r>
+              <a:rPr lang="en" sz="3467" dirty="0">
+                <a:solidFill>
+                  <a:srgbClr val="B45F06"/>
+                </a:solidFill>
+              </a:rPr>
+              <a:t>to recommend for proactive behavioral health outreach</a:t>
+            </a:r>
+            <a:r>
+              <a:rPr lang="en" sz="3467" dirty="0">
+                <a:solidFill>
+                  <a:srgbClr val="595959"/>
+                </a:solidFill>
+              </a:rPr>
+              <a:t>?</a:t>
+            </a:r>
+            <a:endParaRPr sz="3467" dirty="0">
+              <a:solidFill>
+                <a:srgbClr val="595959"/>
+              </a:solidFill>
+            </a:endParaRPr>
+          </a:p>
+        </p:txBody>
+      </p:sp>
+      <p:sp>
+        <p:nvSpPr>
+          <p:cNvPr id="148" name="Google Shape;148;p30"/>
+          <p:cNvSpPr txBox="1"/>
+          <p:nvPr/>
+        </p:nvSpPr>
+        <p:spPr>
+          <a:xfrm>
+            <a:off x="248120" y="1463207"/>
+            <a:ext cx="3008400" cy="796000"/>
+          </a:xfrm>
+          <a:prstGeom prst="rect">
+            <a:avLst/>
+          </a:prstGeom>
+          <a:noFill/>
+          <a:ln>
+            <a:noFill/>
+          </a:ln>
+        </p:spPr>
+        <p:txBody>
+          <a:bodyPr spcFirstLastPara="1" wrap="square" lIns="121900" tIns="121900" rIns="121900" bIns="121900" anchor="t" anchorCtr="0">
+            <a:noAutofit/>
+          </a:bodyPr>
+          <a:lstStyle/>
+          <a:p>
+            <a:pPr>
+              <a:buSzPts val="1400"/>
+            </a:pPr>
+            <a:r>
+              <a:rPr lang="en" sz="1867">
+                <a:solidFill>
+                  <a:srgbClr val="FF0000"/>
+                </a:solidFill>
+              </a:rPr>
+              <a:t>When and How often is the recommendation / decision being made?</a:t>
+            </a:r>
+            <a:endParaRPr sz="1867">
+              <a:solidFill>
+                <a:srgbClr val="FF0000"/>
+              </a:solidFill>
+            </a:endParaRPr>
+          </a:p>
+        </p:txBody>
+      </p:sp>
+      <p:sp>
+        <p:nvSpPr>
+          <p:cNvPr id="149" name="Google Shape;149;p30"/>
+          <p:cNvSpPr txBox="1"/>
+          <p:nvPr/>
+        </p:nvSpPr>
+        <p:spPr>
+          <a:xfrm>
+            <a:off x="253253" y="2632740"/>
+            <a:ext cx="3008400" cy="796000"/>
+          </a:xfrm>
+          <a:prstGeom prst="rect">
+            <a:avLst/>
+          </a:prstGeom>
+          <a:noFill/>
+          <a:ln>
+            <a:noFill/>
+          </a:ln>
+        </p:spPr>
+        <p:txBody>
+          <a:bodyPr spcFirstLastPara="1" wrap="square" lIns="121900" tIns="121900" rIns="121900" bIns="121900" anchor="t" anchorCtr="0">
+            <a:noAutofit/>
+          </a:bodyPr>
+          <a:lstStyle/>
+          <a:p>
+            <a:pPr>
+              <a:buSzPts val="1400"/>
+            </a:pPr>
+            <a:r>
+              <a:rPr lang="en" sz="1867">
+                <a:solidFill>
+                  <a:srgbClr val="0000FF"/>
+                </a:solidFill>
+              </a:rPr>
+              <a:t>Who/what is included in the cohort?</a:t>
+            </a:r>
+            <a:endParaRPr sz="1867">
+              <a:solidFill>
+                <a:srgbClr val="0000FF"/>
+              </a:solidFill>
+            </a:endParaRPr>
+          </a:p>
+        </p:txBody>
+      </p:sp>
+      <p:sp>
+        <p:nvSpPr>
+          <p:cNvPr id="150" name="Google Shape;150;p30"/>
+          <p:cNvSpPr txBox="1"/>
+          <p:nvPr/>
+        </p:nvSpPr>
+        <p:spPr>
+          <a:xfrm>
+            <a:off x="253253" y="3497473"/>
+            <a:ext cx="3008400" cy="796000"/>
+          </a:xfrm>
+          <a:prstGeom prst="rect">
+            <a:avLst/>
+          </a:prstGeom>
+          <a:noFill/>
+          <a:ln>
+            <a:noFill/>
+          </a:ln>
+        </p:spPr>
+        <p:txBody>
+          <a:bodyPr spcFirstLastPara="1" wrap="square" lIns="121900" tIns="121900" rIns="121900" bIns="121900" anchor="t" anchorCtr="0">
+            <a:noAutofit/>
+          </a:bodyPr>
+          <a:lstStyle/>
+          <a:p>
+            <a:pPr>
+              <a:buSzPts val="1400"/>
+            </a:pPr>
+            <a:r>
+              <a:rPr lang="en" sz="1867">
+                <a:solidFill>
+                  <a:srgbClr val="FF00FF"/>
+                </a:solidFill>
+              </a:rPr>
+              <a:t>What is the output?</a:t>
+            </a:r>
+            <a:endParaRPr sz="1867">
+              <a:solidFill>
+                <a:srgbClr val="FF00FF"/>
+              </a:solidFill>
+            </a:endParaRPr>
+          </a:p>
+        </p:txBody>
+      </p:sp>
+      <p:sp>
+        <p:nvSpPr>
+          <p:cNvPr id="151" name="Google Shape;151;p30"/>
+          <p:cNvSpPr txBox="1"/>
+          <p:nvPr/>
+        </p:nvSpPr>
+        <p:spPr>
+          <a:xfrm>
+            <a:off x="248120" y="4191873"/>
+            <a:ext cx="3008400" cy="1475600"/>
+          </a:xfrm>
+          <a:prstGeom prst="rect">
+            <a:avLst/>
+          </a:prstGeom>
+          <a:noFill/>
+          <a:ln>
+            <a:noFill/>
+          </a:ln>
+        </p:spPr>
+        <p:txBody>
+          <a:bodyPr spcFirstLastPara="1" wrap="square" lIns="121900" tIns="121900" rIns="121900" bIns="121900" anchor="t" anchorCtr="0">
+            <a:noAutofit/>
+          </a:bodyPr>
+          <a:lstStyle/>
+          <a:p>
+            <a:pPr>
+              <a:buSzPts val="1400"/>
+            </a:pPr>
+            <a:r>
+              <a:rPr lang="en" sz="1867">
+                <a:solidFill>
+                  <a:srgbClr val="274E13"/>
+                </a:solidFill>
+              </a:rPr>
+              <a:t>What outcome are you predicting/estimating?</a:t>
+            </a:r>
+            <a:endParaRPr sz="1867">
+              <a:solidFill>
+                <a:srgbClr val="274E13"/>
+              </a:solidFill>
+            </a:endParaRPr>
+          </a:p>
+          <a:p>
+            <a:pPr>
+              <a:buSzPts val="1400"/>
+            </a:pPr>
+            <a:endParaRPr sz="1867">
+              <a:solidFill>
+                <a:srgbClr val="274E13"/>
+              </a:solidFill>
+            </a:endParaRPr>
+          </a:p>
+          <a:p>
+            <a:pPr>
+              <a:buSzPts val="1400"/>
+            </a:pPr>
+            <a:r>
+              <a:rPr lang="en" sz="1867">
+                <a:solidFill>
+                  <a:srgbClr val="B45F06"/>
+                </a:solidFill>
+              </a:rPr>
+              <a:t>For what purpose?</a:t>
+            </a:r>
+            <a:endParaRPr sz="1867">
+              <a:solidFill>
+                <a:srgbClr val="274E13"/>
+              </a:solidFill>
+            </a:endParaRPr>
+          </a:p>
+        </p:txBody>
+      </p:sp>
+    </p:spTree>
+  </p:cSld>
+  <p:clrMapOvr>
+    <a:masterClrMapping/>
+  </p:clrMapOvr>
+</p:sld>
+</file>
+
+<file path=ppt/slides/slide21.xml><?xml version="1.0" encoding="utf-8"?>
+<p:sld xmlns:a="http://schemas.openxmlformats.org/drawingml/2006/main" xmlns:r="http://schemas.openxmlformats.org/officeDocument/2006/relationships" xmlns:p="http://schemas.openxmlformats.org/presentationml/2006/main">
+  <p:cSld>
+    <p:spTree>
+      <p:nvGrpSpPr>
+        <p:cNvPr id="1" name="Shape 202"/>
+        <p:cNvGrpSpPr/>
+        <p:nvPr/>
+      </p:nvGrpSpPr>
+      <p:grpSpPr>
+        <a:xfrm>
+          <a:off x="0" y="0"/>
+          <a:ext cx="0" cy="0"/>
+          <a:chOff x="0" y="0"/>
+          <a:chExt cx="0" cy="0"/>
+        </a:xfrm>
+      </p:grpSpPr>
+      <p:sp>
+        <p:nvSpPr>
+          <p:cNvPr id="2" name="Text Placeholder 1">
+            <a:extLst>
+              <a:ext uri="{FF2B5EF4-FFF2-40B4-BE49-F238E27FC236}">
+                <a16:creationId xmlns:a16="http://schemas.microsoft.com/office/drawing/2014/main" id="{10E49ADA-B971-3A74-683D-F7E6AB709A58}"/>
+              </a:ext>
+            </a:extLst>
+          </p:cNvPr>
+          <p:cNvSpPr>
+            <a:spLocks noGrp="1"/>
+          </p:cNvSpPr>
+          <p:nvPr>
+            <p:ph type="body" idx="1"/>
+          </p:nvPr>
+        </p:nvSpPr>
+        <p:spPr/>
+        <p:txBody>
+          <a:bodyPr/>
+          <a:lstStyle/>
+          <a:p>
+            <a:endParaRPr lang="en-US"/>
+          </a:p>
+        </p:txBody>
+      </p:sp>
+      <p:sp>
+        <p:nvSpPr>
+          <p:cNvPr id="203" name="Google Shape;203;p38"/>
+          <p:cNvSpPr txBox="1">
+            <a:spLocks noGrp="1"/>
+          </p:cNvSpPr>
+          <p:nvPr>
+            <p:ph type="title"/>
+          </p:nvPr>
+        </p:nvSpPr>
+        <p:spPr>
+          <a:prstGeom prst="rect">
+            <a:avLst/>
+          </a:prstGeom>
+        </p:spPr>
+        <p:txBody>
+          <a:bodyPr spcFirstLastPara="1" wrap="square" lIns="121900" tIns="121900" rIns="121900" bIns="121900" anchor="t" anchorCtr="0">
+            <a:normAutofit fontScale="90000"/>
+          </a:bodyPr>
+          <a:lstStyle/>
+          <a:p>
+            <a:r>
+              <a:rPr lang="en"/>
+              <a:t>Analytical Formulation</a:t>
+            </a:r>
+            <a:endParaRPr/>
+          </a:p>
+        </p:txBody>
+      </p:sp>
+      <p:sp>
+        <p:nvSpPr>
+          <p:cNvPr id="204" name="Google Shape;204;p38"/>
+          <p:cNvSpPr/>
+          <p:nvPr/>
+        </p:nvSpPr>
+        <p:spPr>
+          <a:xfrm>
+            <a:off x="190320" y="1463207"/>
+            <a:ext cx="3124000" cy="4204400"/>
+          </a:xfrm>
+          <a:prstGeom prst="rect">
+            <a:avLst/>
+          </a:prstGeom>
+          <a:solidFill>
+            <a:srgbClr val="EEEEEE"/>
+          </a:solidFill>
+          <a:ln w="9525" cap="flat" cmpd="sng">
+            <a:solidFill>
+              <a:srgbClr val="595959"/>
+            </a:solidFill>
+            <a:prstDash val="solid"/>
+            <a:round/>
+            <a:headEnd type="none" w="sm" len="sm"/>
+            <a:tailEnd type="none" w="sm" len="sm"/>
+          </a:ln>
+        </p:spPr>
+        <p:txBody>
+          <a:bodyPr spcFirstLastPara="1" wrap="square" lIns="121900" tIns="121900" rIns="121900" bIns="121900" anchor="ctr" anchorCtr="0">
+            <a:noAutofit/>
+          </a:bodyPr>
+          <a:lstStyle/>
+          <a:p>
+            <a:pPr>
+              <a:buSzPts val="1400"/>
+            </a:pPr>
+            <a:endParaRPr sz="1867"/>
+          </a:p>
+        </p:txBody>
+      </p:sp>
+      <p:sp>
+        <p:nvSpPr>
+          <p:cNvPr id="205" name="Google Shape;205;p38"/>
+          <p:cNvSpPr txBox="1"/>
+          <p:nvPr/>
+        </p:nvSpPr>
+        <p:spPr>
+          <a:xfrm>
+            <a:off x="3566453" y="1341573"/>
+            <a:ext cx="8531200" cy="4555200"/>
+          </a:xfrm>
+          <a:prstGeom prst="rect">
+            <a:avLst/>
+          </a:prstGeom>
+          <a:noFill/>
+          <a:ln>
+            <a:noFill/>
+          </a:ln>
+        </p:spPr>
+        <p:txBody>
+          <a:bodyPr spcFirstLastPara="1" wrap="square" lIns="121900" tIns="121900" rIns="121900" bIns="121900" anchor="t" anchorCtr="0">
+            <a:noAutofit/>
+          </a:bodyPr>
+          <a:lstStyle/>
+          <a:p>
+            <a:pPr>
+              <a:lnSpc>
+                <a:spcPct val="115000"/>
+              </a:lnSpc>
+              <a:spcAft>
+                <a:spcPts val="2133"/>
+              </a:spcAft>
+            </a:pPr>
+            <a:r>
+              <a:rPr lang="en" sz="3467" dirty="0">
+                <a:solidFill>
+                  <a:srgbClr val="FF0000"/>
+                </a:solidFill>
+              </a:rPr>
+              <a:t>Every year, when new aerial data arrives</a:t>
+            </a:r>
+            <a:r>
+              <a:rPr lang="en" sz="3467" dirty="0">
+                <a:solidFill>
+                  <a:srgbClr val="595959"/>
+                </a:solidFill>
+              </a:rPr>
+              <a:t>, for </a:t>
+            </a:r>
+            <a:r>
+              <a:rPr lang="en" sz="3467" dirty="0">
+                <a:solidFill>
+                  <a:srgbClr val="0000FF"/>
+                </a:solidFill>
+              </a:rPr>
+              <a:t>all </a:t>
+            </a:r>
+            <a:r>
+              <a:rPr lang="en" sz="3467" dirty="0" err="1">
+                <a:solidFill>
+                  <a:srgbClr val="0000FF"/>
+                </a:solidFill>
+              </a:rPr>
+              <a:t>blocklots</a:t>
+            </a:r>
+            <a:r>
+              <a:rPr lang="en" sz="3467" dirty="0">
+                <a:solidFill>
+                  <a:srgbClr val="0000FF"/>
+                </a:solidFill>
+              </a:rPr>
+              <a:t> in Baltimore City</a:t>
+            </a:r>
+            <a:r>
+              <a:rPr lang="en" sz="3467" dirty="0">
+                <a:solidFill>
+                  <a:srgbClr val="595959"/>
+                </a:solidFill>
+              </a:rPr>
+              <a:t>, can we identify </a:t>
+            </a:r>
+            <a:r>
+              <a:rPr lang="en" sz="3467" dirty="0">
+                <a:solidFill>
+                  <a:srgbClr val="FF00FF"/>
+                </a:solidFill>
+              </a:rPr>
+              <a:t>1,000 </a:t>
+            </a:r>
+            <a:r>
+              <a:rPr lang="en" sz="3467" dirty="0" err="1">
+                <a:solidFill>
+                  <a:srgbClr val="FF00FF"/>
+                </a:solidFill>
+              </a:rPr>
+              <a:t>blocklots</a:t>
+            </a:r>
+            <a:r>
+              <a:rPr lang="en" sz="3467" dirty="0">
+                <a:solidFill>
+                  <a:srgbClr val="FF00FF"/>
+                </a:solidFill>
+              </a:rPr>
+              <a:t> </a:t>
+            </a:r>
+            <a:r>
+              <a:rPr lang="en" sz="3467" dirty="0">
+                <a:solidFill>
+                  <a:srgbClr val="595959"/>
+                </a:solidFill>
+              </a:rPr>
+              <a:t>with a </a:t>
+            </a:r>
+            <a:r>
+              <a:rPr lang="en" sz="3467" dirty="0">
+                <a:solidFill>
+                  <a:srgbClr val="38761D"/>
+                </a:solidFill>
+              </a:rPr>
+              <a:t>“high” level of roof damage </a:t>
+            </a:r>
+            <a:r>
+              <a:rPr lang="en" sz="3467" dirty="0">
+                <a:solidFill>
+                  <a:srgbClr val="B45F06"/>
+                </a:solidFill>
+              </a:rPr>
+              <a:t>to prioritize for demo or stabilization inspection in the next year</a:t>
+            </a:r>
+            <a:r>
+              <a:rPr lang="en" sz="3467" dirty="0">
+                <a:solidFill>
+                  <a:srgbClr val="595959"/>
+                </a:solidFill>
+              </a:rPr>
+              <a:t>?</a:t>
+            </a:r>
+            <a:endParaRPr sz="3467" dirty="0">
+              <a:solidFill>
+                <a:srgbClr val="595959"/>
+              </a:solidFill>
+            </a:endParaRPr>
+          </a:p>
+        </p:txBody>
+      </p:sp>
+      <p:sp>
+        <p:nvSpPr>
+          <p:cNvPr id="206" name="Google Shape;206;p38"/>
+          <p:cNvSpPr txBox="1"/>
+          <p:nvPr/>
+        </p:nvSpPr>
+        <p:spPr>
+          <a:xfrm>
+            <a:off x="248120" y="1463207"/>
+            <a:ext cx="3008400" cy="796000"/>
+          </a:xfrm>
+          <a:prstGeom prst="rect">
+            <a:avLst/>
+          </a:prstGeom>
+          <a:noFill/>
+          <a:ln>
+            <a:noFill/>
+          </a:ln>
+        </p:spPr>
+        <p:txBody>
+          <a:bodyPr spcFirstLastPara="1" wrap="square" lIns="121900" tIns="121900" rIns="121900" bIns="121900" anchor="t" anchorCtr="0">
+            <a:noAutofit/>
+          </a:bodyPr>
+          <a:lstStyle/>
+          <a:p>
+            <a:pPr>
+              <a:buSzPts val="1400"/>
+            </a:pPr>
+            <a:r>
+              <a:rPr lang="en" sz="1867">
+                <a:solidFill>
+                  <a:srgbClr val="FF0000"/>
+                </a:solidFill>
+              </a:rPr>
+              <a:t>When and How often is the recommendation / decision being made?</a:t>
+            </a:r>
+            <a:endParaRPr sz="1867">
+              <a:solidFill>
+                <a:srgbClr val="FF0000"/>
+              </a:solidFill>
+            </a:endParaRPr>
+          </a:p>
+        </p:txBody>
+      </p:sp>
+      <p:sp>
+        <p:nvSpPr>
+          <p:cNvPr id="207" name="Google Shape;207;p38"/>
+          <p:cNvSpPr txBox="1"/>
+          <p:nvPr/>
+        </p:nvSpPr>
+        <p:spPr>
+          <a:xfrm>
+            <a:off x="253253" y="2632740"/>
+            <a:ext cx="3008400" cy="796000"/>
+          </a:xfrm>
+          <a:prstGeom prst="rect">
+            <a:avLst/>
+          </a:prstGeom>
+          <a:noFill/>
+          <a:ln>
+            <a:noFill/>
+          </a:ln>
+        </p:spPr>
+        <p:txBody>
+          <a:bodyPr spcFirstLastPara="1" wrap="square" lIns="121900" tIns="121900" rIns="121900" bIns="121900" anchor="t" anchorCtr="0">
+            <a:noAutofit/>
+          </a:bodyPr>
+          <a:lstStyle/>
+          <a:p>
+            <a:pPr>
+              <a:buSzPts val="1400"/>
+            </a:pPr>
+            <a:br>
+              <a:rPr lang="en" sz="1867">
+                <a:solidFill>
+                  <a:srgbClr val="0000FF"/>
+                </a:solidFill>
+              </a:rPr>
+            </a:br>
+            <a:r>
+              <a:rPr lang="en" sz="1867">
+                <a:solidFill>
+                  <a:srgbClr val="0000FF"/>
+                </a:solidFill>
+              </a:rPr>
+              <a:t>Who/what is included in the cohort?</a:t>
+            </a:r>
+            <a:endParaRPr sz="1867">
+              <a:solidFill>
+                <a:srgbClr val="0000FF"/>
+              </a:solidFill>
+            </a:endParaRPr>
+          </a:p>
+        </p:txBody>
+      </p:sp>
+      <p:sp>
+        <p:nvSpPr>
+          <p:cNvPr id="208" name="Google Shape;208;p38"/>
+          <p:cNvSpPr txBox="1"/>
+          <p:nvPr/>
+        </p:nvSpPr>
+        <p:spPr>
+          <a:xfrm>
+            <a:off x="253253" y="3497473"/>
+            <a:ext cx="3008400" cy="796000"/>
+          </a:xfrm>
+          <a:prstGeom prst="rect">
+            <a:avLst/>
+          </a:prstGeom>
+          <a:noFill/>
+          <a:ln>
+            <a:noFill/>
+          </a:ln>
+        </p:spPr>
+        <p:txBody>
+          <a:bodyPr spcFirstLastPara="1" wrap="square" lIns="121900" tIns="121900" rIns="121900" bIns="121900" anchor="t" anchorCtr="0">
+            <a:noAutofit/>
+          </a:bodyPr>
+          <a:lstStyle/>
+          <a:p>
+            <a:pPr>
+              <a:buSzPts val="1400"/>
+            </a:pPr>
+            <a:br>
+              <a:rPr lang="en" sz="1867">
+                <a:solidFill>
+                  <a:srgbClr val="FF00FF"/>
+                </a:solidFill>
+              </a:rPr>
+            </a:br>
+            <a:r>
+              <a:rPr lang="en" sz="1867">
+                <a:solidFill>
+                  <a:srgbClr val="FF00FF"/>
+                </a:solidFill>
+              </a:rPr>
+              <a:t>What is the output?</a:t>
+            </a:r>
+            <a:endParaRPr sz="1867">
+              <a:solidFill>
+                <a:srgbClr val="FF00FF"/>
+              </a:solidFill>
+            </a:endParaRPr>
+          </a:p>
+        </p:txBody>
+      </p:sp>
+      <p:sp>
+        <p:nvSpPr>
+          <p:cNvPr id="209" name="Google Shape;209;p38"/>
+          <p:cNvSpPr txBox="1"/>
+          <p:nvPr/>
+        </p:nvSpPr>
+        <p:spPr>
+          <a:xfrm>
+            <a:off x="248120" y="4191873"/>
+            <a:ext cx="3008400" cy="1475600"/>
+          </a:xfrm>
+          <a:prstGeom prst="rect">
+            <a:avLst/>
+          </a:prstGeom>
+          <a:noFill/>
+          <a:ln>
+            <a:noFill/>
+          </a:ln>
+        </p:spPr>
+        <p:txBody>
+          <a:bodyPr spcFirstLastPara="1" wrap="square" lIns="121900" tIns="121900" rIns="121900" bIns="121900" anchor="t" anchorCtr="0">
+            <a:noAutofit/>
+          </a:bodyPr>
+          <a:lstStyle/>
+          <a:p>
+            <a:pPr>
+              <a:buSzPts val="1400"/>
+            </a:pPr>
+            <a:r>
+              <a:rPr lang="en" sz="1867">
+                <a:solidFill>
+                  <a:srgbClr val="274E13"/>
+                </a:solidFill>
+              </a:rPr>
+              <a:t>What outcome are you predicting/estimating?</a:t>
+            </a:r>
+            <a:endParaRPr sz="1867">
+              <a:solidFill>
+                <a:srgbClr val="274E13"/>
+              </a:solidFill>
+            </a:endParaRPr>
+          </a:p>
+          <a:p>
+            <a:pPr>
+              <a:buSzPts val="1400"/>
+            </a:pPr>
+            <a:endParaRPr sz="1867">
+              <a:solidFill>
+                <a:srgbClr val="274E13"/>
+              </a:solidFill>
+            </a:endParaRPr>
+          </a:p>
+          <a:p>
+            <a:pPr>
+              <a:buSzPts val="1400"/>
+            </a:pPr>
+            <a:r>
+              <a:rPr lang="en" sz="1867">
+                <a:solidFill>
+                  <a:srgbClr val="B45F06"/>
+                </a:solidFill>
+              </a:rPr>
+              <a:t>For what purpose?</a:t>
+            </a:r>
+            <a:endParaRPr sz="1867">
+              <a:solidFill>
+                <a:srgbClr val="274E13"/>
+              </a:solidFill>
+            </a:endParaRPr>
+          </a:p>
+        </p:txBody>
+      </p:sp>
+    </p:spTree>
+  </p:cSld>
+  <p:clrMapOvr>
+    <a:masterClrMapping/>
+  </p:clrMapOvr>
+</p:sld>
+</file>
+
+<file path=ppt/slides/slide22.xml><?xml version="1.0" encoding="utf-8"?>
+<p:sld xmlns:a="http://schemas.openxmlformats.org/drawingml/2006/main" xmlns:r="http://schemas.openxmlformats.org/officeDocument/2006/relationships" xmlns:p="http://schemas.openxmlformats.org/presentationml/2006/main">
+  <p:cSld>
+    <p:spTree>
+      <p:nvGrpSpPr>
+        <p:cNvPr id="1" name="Shape 262"/>
+        <p:cNvGrpSpPr/>
+        <p:nvPr/>
+      </p:nvGrpSpPr>
+      <p:grpSpPr>
+        <a:xfrm>
+          <a:off x="0" y="0"/>
+          <a:ext cx="0" cy="0"/>
+          <a:chOff x="0" y="0"/>
+          <a:chExt cx="0" cy="0"/>
+        </a:xfrm>
+      </p:grpSpPr>
+      <p:sp>
+        <p:nvSpPr>
+          <p:cNvPr id="2" name="Text Placeholder 1">
+            <a:extLst>
+              <a:ext uri="{FF2B5EF4-FFF2-40B4-BE49-F238E27FC236}">
+                <a16:creationId xmlns:a16="http://schemas.microsoft.com/office/drawing/2014/main" id="{BB1BBD25-1C37-5157-CF0F-11E6D2EA892C}"/>
+              </a:ext>
+            </a:extLst>
+          </p:cNvPr>
+          <p:cNvSpPr>
+            <a:spLocks noGrp="1"/>
+          </p:cNvSpPr>
+          <p:nvPr>
+            <p:ph type="body" idx="1"/>
+          </p:nvPr>
+        </p:nvSpPr>
+        <p:spPr/>
+        <p:txBody>
+          <a:bodyPr/>
+          <a:lstStyle/>
+          <a:p>
+            <a:endParaRPr lang="en-US"/>
+          </a:p>
+        </p:txBody>
+      </p:sp>
+      <p:sp>
+        <p:nvSpPr>
+          <p:cNvPr id="263" name="Google Shape;263;p46"/>
+          <p:cNvSpPr txBox="1">
+            <a:spLocks noGrp="1"/>
+          </p:cNvSpPr>
+          <p:nvPr>
+            <p:ph type="title"/>
+          </p:nvPr>
+        </p:nvSpPr>
+        <p:spPr>
+          <a:prstGeom prst="rect">
+            <a:avLst/>
+          </a:prstGeom>
+        </p:spPr>
+        <p:txBody>
+          <a:bodyPr spcFirstLastPara="1" wrap="square" lIns="121900" tIns="121900" rIns="121900" bIns="121900" anchor="t" anchorCtr="0">
+            <a:normAutofit fontScale="90000"/>
+          </a:bodyPr>
+          <a:lstStyle/>
+          <a:p>
+            <a:r>
+              <a:rPr lang="en"/>
+              <a:t>Analytical Formulation</a:t>
+            </a:r>
+            <a:endParaRPr/>
+          </a:p>
+        </p:txBody>
+      </p:sp>
+      <p:sp>
+        <p:nvSpPr>
+          <p:cNvPr id="265" name="Google Shape;265;p46"/>
+          <p:cNvSpPr txBox="1"/>
+          <p:nvPr/>
+        </p:nvSpPr>
+        <p:spPr>
+          <a:xfrm>
+            <a:off x="3629033" y="1463200"/>
+            <a:ext cx="8147200" cy="4588395"/>
+          </a:xfrm>
+          <a:prstGeom prst="rect">
+            <a:avLst/>
+          </a:prstGeom>
+          <a:noFill/>
+          <a:ln>
+            <a:noFill/>
+          </a:ln>
+        </p:spPr>
+        <p:txBody>
+          <a:bodyPr spcFirstLastPara="1" wrap="square" lIns="121900" tIns="121900" rIns="121900" bIns="121900" anchor="t" anchorCtr="0">
+            <a:spAutoFit/>
+          </a:bodyPr>
+          <a:lstStyle/>
+          <a:p>
+            <a:pPr>
+              <a:lnSpc>
+                <a:spcPct val="115000"/>
+              </a:lnSpc>
+            </a:pPr>
+            <a:r>
+              <a:rPr lang="en" sz="3067" dirty="0">
+                <a:solidFill>
+                  <a:srgbClr val="FF0000"/>
+                </a:solidFill>
+                <a:latin typeface="Calibri"/>
+                <a:ea typeface="Calibri"/>
+                <a:cs typeface="Calibri"/>
+                <a:sym typeface="Calibri"/>
+              </a:rPr>
+              <a:t>Every time ACDHS gets eviction filing data (weekly),</a:t>
+            </a:r>
+            <a:r>
+              <a:rPr lang="en" sz="3067" dirty="0">
+                <a:solidFill>
+                  <a:srgbClr val="0000FF"/>
+                </a:solidFill>
+                <a:latin typeface="Calibri"/>
+                <a:ea typeface="Calibri"/>
+                <a:cs typeface="Calibri"/>
+                <a:sym typeface="Calibri"/>
+              </a:rPr>
+              <a:t> for all individuals who have interacted with ACDHS in the 12 months who are not currently homeless and have had an eviction filing in the last 4 months</a:t>
+            </a:r>
+            <a:r>
+              <a:rPr lang="en" sz="3067" dirty="0">
+                <a:latin typeface="Calibri"/>
+                <a:ea typeface="Calibri"/>
+                <a:cs typeface="Calibri"/>
+                <a:sym typeface="Calibri"/>
+              </a:rPr>
+              <a:t>, can we identify the </a:t>
+            </a:r>
+            <a:r>
+              <a:rPr lang="en" sz="3067" dirty="0">
+                <a:solidFill>
+                  <a:srgbClr val="FF00FF"/>
+                </a:solidFill>
+                <a:latin typeface="Calibri"/>
+                <a:ea typeface="Calibri"/>
+                <a:cs typeface="Calibri"/>
+                <a:sym typeface="Calibri"/>
+              </a:rPr>
+              <a:t>50 individuals at highest risk</a:t>
+            </a:r>
+            <a:r>
+              <a:rPr lang="en" sz="3067" dirty="0">
+                <a:latin typeface="Calibri"/>
+                <a:ea typeface="Calibri"/>
+                <a:cs typeface="Calibri"/>
+                <a:sym typeface="Calibri"/>
+              </a:rPr>
+              <a:t> </a:t>
+            </a:r>
+            <a:r>
+              <a:rPr lang="en" sz="3067" dirty="0">
+                <a:solidFill>
+                  <a:srgbClr val="38761D"/>
+                </a:solidFill>
+                <a:latin typeface="Calibri"/>
+                <a:ea typeface="Calibri"/>
+                <a:cs typeface="Calibri"/>
+                <a:sym typeface="Calibri"/>
+              </a:rPr>
+              <a:t>of entering into homelessness in the next 12 months </a:t>
+            </a:r>
+            <a:r>
+              <a:rPr lang="en" sz="3067" dirty="0">
+                <a:solidFill>
+                  <a:srgbClr val="B45F06"/>
+                </a:solidFill>
+                <a:latin typeface="Calibri"/>
+                <a:ea typeface="Calibri"/>
+                <a:cs typeface="Calibri"/>
+                <a:sym typeface="Calibri"/>
+              </a:rPr>
+              <a:t>to prioritize for distribution of rental assistance?</a:t>
+            </a:r>
+            <a:endParaRPr sz="3467" dirty="0">
+              <a:solidFill>
+                <a:srgbClr val="B45F06"/>
+              </a:solidFill>
+              <a:latin typeface="Calibri"/>
+              <a:ea typeface="Calibri"/>
+              <a:cs typeface="Calibri"/>
+              <a:sym typeface="Calibri"/>
+            </a:endParaRPr>
+          </a:p>
+        </p:txBody>
+      </p:sp>
+      <p:sp>
+        <p:nvSpPr>
+          <p:cNvPr id="266" name="Google Shape;266;p46"/>
+          <p:cNvSpPr/>
+          <p:nvPr/>
+        </p:nvSpPr>
+        <p:spPr>
+          <a:xfrm>
+            <a:off x="190320" y="1463207"/>
+            <a:ext cx="3124000" cy="4204400"/>
+          </a:xfrm>
+          <a:prstGeom prst="rect">
+            <a:avLst/>
+          </a:prstGeom>
+          <a:solidFill>
+            <a:srgbClr val="EEEEEE"/>
+          </a:solidFill>
+          <a:ln w="9525" cap="flat" cmpd="sng">
+            <a:solidFill>
+              <a:srgbClr val="595959"/>
+            </a:solidFill>
+            <a:prstDash val="solid"/>
+            <a:round/>
+            <a:headEnd type="none" w="sm" len="sm"/>
+            <a:tailEnd type="none" w="sm" len="sm"/>
+          </a:ln>
+        </p:spPr>
+        <p:txBody>
+          <a:bodyPr spcFirstLastPara="1" wrap="square" lIns="121900" tIns="121900" rIns="121900" bIns="121900" anchor="ctr" anchorCtr="0">
+            <a:noAutofit/>
+          </a:bodyPr>
+          <a:lstStyle/>
+          <a:p>
+            <a:pPr>
+              <a:buSzPts val="1400"/>
+            </a:pPr>
+            <a:endParaRPr sz="1867"/>
+          </a:p>
+        </p:txBody>
+      </p:sp>
+      <p:sp>
+        <p:nvSpPr>
+          <p:cNvPr id="267" name="Google Shape;267;p46"/>
+          <p:cNvSpPr txBox="1"/>
+          <p:nvPr/>
+        </p:nvSpPr>
+        <p:spPr>
+          <a:xfrm>
+            <a:off x="248120" y="1463207"/>
+            <a:ext cx="3008400" cy="796000"/>
+          </a:xfrm>
+          <a:prstGeom prst="rect">
+            <a:avLst/>
+          </a:prstGeom>
+          <a:noFill/>
+          <a:ln>
+            <a:noFill/>
+          </a:ln>
+        </p:spPr>
+        <p:txBody>
+          <a:bodyPr spcFirstLastPara="1" wrap="square" lIns="121900" tIns="121900" rIns="121900" bIns="121900" anchor="t" anchorCtr="0">
+            <a:noAutofit/>
+          </a:bodyPr>
+          <a:lstStyle/>
+          <a:p>
+            <a:pPr>
+              <a:buSzPts val="1400"/>
+            </a:pPr>
+            <a:r>
+              <a:rPr lang="en" sz="1867">
+                <a:solidFill>
+                  <a:srgbClr val="FF0000"/>
+                </a:solidFill>
+              </a:rPr>
+              <a:t>When and How often is the recommendation / decision being made?</a:t>
+            </a:r>
+            <a:endParaRPr sz="1867">
+              <a:solidFill>
+                <a:srgbClr val="FF0000"/>
+              </a:solidFill>
+            </a:endParaRPr>
+          </a:p>
+        </p:txBody>
+      </p:sp>
+      <p:sp>
+        <p:nvSpPr>
+          <p:cNvPr id="268" name="Google Shape;268;p46"/>
+          <p:cNvSpPr txBox="1"/>
+          <p:nvPr/>
+        </p:nvSpPr>
+        <p:spPr>
+          <a:xfrm>
+            <a:off x="253253" y="2632740"/>
+            <a:ext cx="3008400" cy="796000"/>
+          </a:xfrm>
+          <a:prstGeom prst="rect">
+            <a:avLst/>
+          </a:prstGeom>
+          <a:noFill/>
+          <a:ln>
+            <a:noFill/>
+          </a:ln>
+        </p:spPr>
+        <p:txBody>
+          <a:bodyPr spcFirstLastPara="1" wrap="square" lIns="121900" tIns="121900" rIns="121900" bIns="121900" anchor="t" anchorCtr="0">
+            <a:noAutofit/>
+          </a:bodyPr>
+          <a:lstStyle/>
+          <a:p>
+            <a:pPr>
+              <a:buSzPts val="1400"/>
+            </a:pPr>
+            <a:br>
+              <a:rPr lang="en" sz="1867">
+                <a:solidFill>
+                  <a:srgbClr val="0000FF"/>
+                </a:solidFill>
+              </a:rPr>
+            </a:br>
+            <a:r>
+              <a:rPr lang="en" sz="1867">
+                <a:solidFill>
+                  <a:srgbClr val="0000FF"/>
+                </a:solidFill>
+              </a:rPr>
+              <a:t>Who/what is included in the cohort?</a:t>
+            </a:r>
+            <a:endParaRPr sz="1867">
+              <a:solidFill>
+                <a:srgbClr val="0000FF"/>
+              </a:solidFill>
+            </a:endParaRPr>
+          </a:p>
+        </p:txBody>
+      </p:sp>
+      <p:sp>
+        <p:nvSpPr>
+          <p:cNvPr id="269" name="Google Shape;269;p46"/>
+          <p:cNvSpPr txBox="1"/>
+          <p:nvPr/>
+        </p:nvSpPr>
+        <p:spPr>
+          <a:xfrm>
+            <a:off x="253253" y="3497473"/>
+            <a:ext cx="3008400" cy="796000"/>
+          </a:xfrm>
+          <a:prstGeom prst="rect">
+            <a:avLst/>
+          </a:prstGeom>
+          <a:noFill/>
+          <a:ln>
+            <a:noFill/>
+          </a:ln>
+        </p:spPr>
+        <p:txBody>
+          <a:bodyPr spcFirstLastPara="1" wrap="square" lIns="121900" tIns="121900" rIns="121900" bIns="121900" anchor="t" anchorCtr="0">
+            <a:noAutofit/>
+          </a:bodyPr>
+          <a:lstStyle/>
+          <a:p>
+            <a:pPr>
+              <a:buSzPts val="1400"/>
+            </a:pPr>
+            <a:br>
+              <a:rPr lang="en" sz="1867">
+                <a:solidFill>
+                  <a:srgbClr val="FF00FF"/>
+                </a:solidFill>
+              </a:rPr>
+            </a:br>
+            <a:r>
+              <a:rPr lang="en" sz="1867">
+                <a:solidFill>
+                  <a:srgbClr val="FF00FF"/>
+                </a:solidFill>
+              </a:rPr>
+              <a:t>What is the output?</a:t>
+            </a:r>
+            <a:endParaRPr sz="1867">
+              <a:solidFill>
+                <a:srgbClr val="FF00FF"/>
+              </a:solidFill>
+            </a:endParaRPr>
+          </a:p>
+        </p:txBody>
+      </p:sp>
+      <p:sp>
+        <p:nvSpPr>
+          <p:cNvPr id="270" name="Google Shape;270;p46"/>
+          <p:cNvSpPr txBox="1"/>
+          <p:nvPr/>
+        </p:nvSpPr>
+        <p:spPr>
+          <a:xfrm>
+            <a:off x="248120" y="4191873"/>
+            <a:ext cx="3008400" cy="1475600"/>
+          </a:xfrm>
+          <a:prstGeom prst="rect">
+            <a:avLst/>
+          </a:prstGeom>
+          <a:noFill/>
+          <a:ln>
+            <a:noFill/>
+          </a:ln>
+        </p:spPr>
+        <p:txBody>
+          <a:bodyPr spcFirstLastPara="1" wrap="square" lIns="121900" tIns="121900" rIns="121900" bIns="121900" anchor="t" anchorCtr="0">
+            <a:noAutofit/>
+          </a:bodyPr>
+          <a:lstStyle/>
+          <a:p>
+            <a:pPr>
+              <a:buSzPts val="1400"/>
+            </a:pPr>
+            <a:r>
+              <a:rPr lang="en" sz="1867">
+                <a:solidFill>
+                  <a:srgbClr val="274E13"/>
+                </a:solidFill>
+              </a:rPr>
+              <a:t>What outcome are you predicting/estimating?</a:t>
+            </a:r>
+            <a:endParaRPr sz="1867">
+              <a:solidFill>
+                <a:srgbClr val="274E13"/>
+              </a:solidFill>
+            </a:endParaRPr>
+          </a:p>
+          <a:p>
+            <a:pPr>
+              <a:buSzPts val="1400"/>
+            </a:pPr>
+            <a:endParaRPr sz="1867">
+              <a:solidFill>
+                <a:srgbClr val="274E13"/>
+              </a:solidFill>
+            </a:endParaRPr>
+          </a:p>
+          <a:p>
+            <a:pPr>
+              <a:buSzPts val="1400"/>
+            </a:pPr>
+            <a:r>
+              <a:rPr lang="en" sz="1867">
+                <a:solidFill>
+                  <a:srgbClr val="B45F06"/>
+                </a:solidFill>
+              </a:rPr>
+              <a:t>For what purpose?</a:t>
+            </a:r>
+            <a:endParaRPr sz="1867">
+              <a:solidFill>
+                <a:srgbClr val="274E13"/>
+              </a:solidFill>
+            </a:endParaRPr>
+          </a:p>
+        </p:txBody>
+      </p:sp>
+    </p:spTree>
+  </p:cSld>
+  <p:clrMapOvr>
+    <a:masterClrMapping/>
+  </p:clrMapOvr>
+</p:sld>
+</file>
+
+<file path=ppt/slides/slide23.xml><?xml version="1.0" encoding="utf-8"?>
 <p:sld xmlns:a="http://schemas.openxmlformats.org/drawingml/2006/main" xmlns:r="http://schemas.openxmlformats.org/officeDocument/2006/relationships" xmlns:p="http://schemas.openxmlformats.org/presentationml/2006/main">
   <p:cSld>
     <p:spTree>
@@ -13135,7 +13818,7 @@
 </p:sld>
 </file>
 
-<file path=ppt/slides/slide21.xml><?xml version="1.0" encoding="utf-8"?>
+<file path=ppt/slides/slide24.xml><?xml version="1.0" encoding="utf-8"?>
 <p:sld xmlns:a="http://schemas.openxmlformats.org/drawingml/2006/main" xmlns:r="http://schemas.openxmlformats.org/officeDocument/2006/relationships" xmlns:p="http://schemas.openxmlformats.org/presentationml/2006/main">
   <p:cSld>
     <p:spTree>
@@ -13229,7 +13912,7 @@
 </p:sld>
 </file>
 
-<file path=ppt/slides/slide22.xml><?xml version="1.0" encoding="utf-8"?>
+<file path=ppt/slides/slide25.xml><?xml version="1.0" encoding="utf-8"?>
 <p:sld xmlns:a="http://schemas.openxmlformats.org/drawingml/2006/main" xmlns:r="http://schemas.openxmlformats.org/officeDocument/2006/relationships" xmlns:p="http://schemas.openxmlformats.org/presentationml/2006/main">
   <p:cSld>
     <p:spTree>
@@ -13352,8 +14035,8 @@
 </p:sld>
 </file>
 
-<file path=ppt/slides/slide23.xml><?xml version="1.0" encoding="utf-8"?>
-<p:sld xmlns:a="http://schemas.openxmlformats.org/drawingml/2006/main" xmlns:r="http://schemas.openxmlformats.org/officeDocument/2006/relationships" xmlns:p="http://schemas.openxmlformats.org/presentationml/2006/main">
+<file path=ppt/slides/slide26.xml><?xml version="1.0" encoding="utf-8"?>
+<p:sld xmlns:a="http://schemas.openxmlformats.org/drawingml/2006/main" xmlns:r="http://schemas.openxmlformats.org/officeDocument/2006/relationships" xmlns:p="http://schemas.openxmlformats.org/presentationml/2006/main" show="0">
   <p:cSld>
     <p:spTree>
       <p:nvGrpSpPr>
@@ -13396,8 +14079,8 @@
           <a:lstStyle/>
           <a:p>
             <a:r>
-              <a:rPr lang="en-US" dirty="0"/>
-              <a:t>For the Netflix example, what would be a reasonable baseline method that doesn't require using any ML?</a:t>
+              <a:rPr lang="en-US" b="1" dirty="0"/>
+              <a:t>For a social media post recommender baseline method that doesn't require using any ML?</a:t>
             </a:r>
           </a:p>
         </p:txBody>
@@ -13477,7 +14160,532 @@
 </p:sld>
 </file>
 
-<file path=ppt/slides/slide24.xml><?xml version="1.0" encoding="utf-8"?>
+<file path=ppt/slides/slide27.xml><?xml version="1.0" encoding="utf-8"?>
+<p:sld xmlns:a="http://schemas.openxmlformats.org/drawingml/2006/main" xmlns:r="http://schemas.openxmlformats.org/officeDocument/2006/relationships" xmlns:p="http://schemas.openxmlformats.org/presentationml/2006/main" showMasterSp="0">
+  <p:cSld>
+    <p:bg>
+      <p:bgPr>
+        <a:solidFill>
+          <a:srgbClr val="FFFFFF"/>
+        </a:solidFill>
+        <a:effectLst/>
+      </p:bgPr>
+    </p:bg>
+    <p:spTree>
+      <p:nvGrpSpPr>
+        <p:cNvPr id="1" name=""/>
+        <p:cNvGrpSpPr/>
+        <p:nvPr/>
+      </p:nvGrpSpPr>
+      <p:grpSpPr>
+        <a:xfrm>
+          <a:off x="0" y="0"/>
+          <a:ext cx="0" cy="0"/>
+          <a:chOff x="0" y="0"/>
+          <a:chExt cx="0" cy="0"/>
+        </a:xfrm>
+      </p:grpSpPr>
+      <p:sp>
+        <p:nvSpPr>
+          <p:cNvPr id="2" name="Rectangle 1">
+            <a:extLst>
+              <a:ext uri="{FF2B5EF4-FFF2-40B4-BE49-F238E27FC236}">
+                <a16:creationId xmlns:a16="http://schemas.microsoft.com/office/drawing/2014/main" id="{D86E07AB-60E2-FF60-1E55-FA25DFC20EA8}"/>
+              </a:ext>
+            </a:extLst>
+          </p:cNvPr>
+          <p:cNvSpPr/>
+          <p:nvPr>
+            <p:custDataLst>
+              <p:tags r:id="rId2"/>
+            </p:custDataLst>
+          </p:nvPr>
+        </p:nvSpPr>
+        <p:spPr>
+          <a:xfrm>
+            <a:off x="444693" y="1742703"/>
+            <a:ext cx="2371696" cy="2371696"/>
+          </a:xfrm>
+          <a:prstGeom prst="rect">
+            <a:avLst/>
+          </a:prstGeom>
+          <a:blipFill>
+            <a:blip r:embed="rId5">
+              <a:extLst>
+                <a:ext uri="{96DAC541-7B7A-43D3-8B79-37D633B846F1}">
+                  <asvg:svgBlip xmlns:asvg="http://schemas.microsoft.com/office/drawing/2016/SVG/main" r:embed="rId6"/>
+                </a:ext>
+              </a:extLst>
+            </a:blip>
+            <a:stretch>
+              <a:fillRect/>
+            </a:stretch>
+          </a:blipFill>
+          <a:ln>
+            <a:solidFill>
+              <a:srgbClr val="FFFFFF"/>
+            </a:solidFill>
+          </a:ln>
+        </p:spPr>
+        <p:style>
+          <a:lnRef idx="2">
+            <a:schemeClr val="accent1">
+              <a:shade val="15000"/>
+            </a:schemeClr>
+          </a:lnRef>
+          <a:fillRef idx="1">
+            <a:schemeClr val="accent1"/>
+          </a:fillRef>
+          <a:effectRef idx="0">
+            <a:schemeClr val="accent1"/>
+          </a:effectRef>
+          <a:fontRef idx="minor">
+            <a:schemeClr val="lt1"/>
+          </a:fontRef>
+        </p:style>
+        <p:txBody>
+          <a:bodyPr rtlCol="0" anchor="ctr"/>
+          <a:lstStyle/>
+          <a:p>
+            <a:pPr algn="ctr"/>
+            <a:endParaRPr lang="en-US"/>
+          </a:p>
+        </p:txBody>
+      </p:sp>
+      <p:sp>
+        <p:nvSpPr>
+          <p:cNvPr id="3" name="Rectangle 2">
+            <a:extLst>
+              <a:ext uri="{FF2B5EF4-FFF2-40B4-BE49-F238E27FC236}">
+                <a16:creationId xmlns:a16="http://schemas.microsoft.com/office/drawing/2014/main" id="{141DAD34-BF23-3A37-13FB-26496E16EFE5}"/>
+              </a:ext>
+            </a:extLst>
+          </p:cNvPr>
+          <p:cNvSpPr/>
+          <p:nvPr>
+            <p:custDataLst>
+              <p:tags r:id="rId3"/>
+            </p:custDataLst>
+          </p:nvPr>
+        </p:nvSpPr>
+        <p:spPr>
+          <a:xfrm>
+            <a:off x="3112851" y="1000897"/>
+            <a:ext cx="8486226" cy="3855308"/>
+          </a:xfrm>
+          <a:prstGeom prst="rect">
+            <a:avLst/>
+          </a:prstGeom>
+          <a:noFill/>
+          <a:ln w="25400" cap="flat" cmpd="sng" algn="ctr">
+            <a:solidFill>
+              <a:srgbClr val="FFFFFF"/>
+            </a:solidFill>
+            <a:prstDash val="solid"/>
+          </a:ln>
+          <a:effectLst/>
+          <a:extLst>
+            <a:ext uri="{909E8E84-426E-40DD-AFC4-6F175D3DCCD1}">
+              <a14:hiddenFill xmlns:a14="http://schemas.microsoft.com/office/drawing/2010/main">
+                <a:solidFill>
+                  <a:schemeClr val="accent1"/>
+                </a:solidFill>
+              </a14:hiddenFill>
+            </a:ext>
+          </a:extLst>
+        </p:spPr>
+        <p:style>
+          <a:lnRef idx="2">
+            <a:schemeClr val="accent1">
+              <a:shade val="15000"/>
+            </a:schemeClr>
+          </a:lnRef>
+          <a:fillRef idx="1">
+            <a:schemeClr val="accent1"/>
+          </a:fillRef>
+          <a:effectRef idx="0">
+            <a:schemeClr val="accent1"/>
+          </a:effectRef>
+          <a:fontRef idx="minor">
+            <a:schemeClr val="lt1"/>
+          </a:fontRef>
+        </p:style>
+        <p:txBody>
+          <a:bodyPr rtlCol="0" anchor="ctr"/>
+          <a:lstStyle/>
+          <a:p>
+            <a:r>
+              <a:rPr lang="en-US" sz="3700" b="1">
+                <a:solidFill>
+                  <a:srgbClr val="000000"/>
+                </a:solidFill>
+              </a:rPr>
+              <a:t>For a social media post recommender baseline method that doesn't require using any ML?</a:t>
+            </a:r>
+          </a:p>
+        </p:txBody>
+      </p:sp>
+      <p:sp>
+        <p:nvSpPr>
+          <p:cNvPr id="4" name="Rectangle 3">
+            <a:extLst>
+              <a:ext uri="{FF2B5EF4-FFF2-40B4-BE49-F238E27FC236}">
+                <a16:creationId xmlns:a16="http://schemas.microsoft.com/office/drawing/2014/main" id="{B8342579-4005-A976-B0D5-9B045C544F6A}"/>
+              </a:ext>
+            </a:extLst>
+          </p:cNvPr>
+          <p:cNvSpPr/>
+          <p:nvPr/>
+        </p:nvSpPr>
+        <p:spPr>
+          <a:xfrm>
+            <a:off x="0" y="5820032"/>
+            <a:ext cx="12192001" cy="1037968"/>
+          </a:xfrm>
+          <a:prstGeom prst="rect">
+            <a:avLst/>
+          </a:prstGeom>
+          <a:solidFill>
+            <a:srgbClr val="198038"/>
+          </a:solidFill>
+          <a:ln w="25400" cap="flat" cmpd="sng" algn="ctr">
+            <a:noFill/>
+            <a:prstDash val="solid"/>
+          </a:ln>
+          <a:effectLst/>
+          <a:extLst>
+            <a:ext uri="{91240B29-F687-4F45-9708-019B960494DF}">
+              <a14:hiddenLine xmlns:a14="http://schemas.microsoft.com/office/drawing/2010/main" w="25400" cap="flat" cmpd="sng" algn="ctr">
+                <a:solidFill>
+                  <a:schemeClr val="accent1">
+                    <a:shade val="15000"/>
+                  </a:schemeClr>
+                </a:solidFill>
+                <a:prstDash val="solid"/>
+              </a14:hiddenLine>
+            </a:ext>
+          </a:extLst>
+        </p:spPr>
+        <p:style>
+          <a:lnRef idx="2">
+            <a:schemeClr val="accent1">
+              <a:shade val="15000"/>
+            </a:schemeClr>
+          </a:lnRef>
+          <a:fillRef idx="1">
+            <a:schemeClr val="accent1"/>
+          </a:fillRef>
+          <a:effectRef idx="0">
+            <a:schemeClr val="accent1"/>
+          </a:effectRef>
+          <a:fontRef idx="minor">
+            <a:schemeClr val="lt1"/>
+          </a:fontRef>
+        </p:style>
+        <p:txBody>
+          <a:bodyPr lIns="741155" tIns="259492" rIns="1852888" bIns="203886" rtlCol="0" anchor="ctr">
+            <a:normAutofit fontScale="85000" lnSpcReduction="10000"/>
+          </a:bodyPr>
+          <a:lstStyle/>
+          <a:p>
+            <a:r>
+              <a:rPr lang="en-US" sz="2600">
+                <a:solidFill>
+                  <a:srgbClr val="FFFFFF"/>
+                </a:solidFill>
+              </a:rPr>
+              <a:t>The </a:t>
+            </a:r>
+            <a:r>
+              <a:rPr lang="en-US" sz="2600">
+                <a:solidFill>
+                  <a:srgbClr val="FFFFFF"/>
+                </a:solidFill>
+                <a:hlinkClick r:id="rId7">
+                  <a:extLst>
+                    <a:ext uri="{A12FA001-AC4F-418D-AE19-62706E023703}">
+                      <ahyp:hlinkClr xmlns:ahyp="http://schemas.microsoft.com/office/drawing/2018/hyperlinkcolor" val="tx"/>
+                    </a:ext>
+                  </a:extLst>
+                </a:hlinkClick>
+              </a:rPr>
+              <a:t>Slido app</a:t>
+            </a:r>
+            <a:r>
+              <a:rPr lang="en-US" sz="2600">
+                <a:solidFill>
+                  <a:srgbClr val="FFFFFF"/>
+                </a:solidFill>
+              </a:rPr>
+              <a:t> must be installed on every computer you’re presenting from</a:t>
+            </a:r>
+          </a:p>
+        </p:txBody>
+      </p:sp>
+      <p:pic>
+        <p:nvPicPr>
+          <p:cNvPr id="6" name="Graphic 5">
+            <a:extLst>
+              <a:ext uri="{FF2B5EF4-FFF2-40B4-BE49-F238E27FC236}">
+                <a16:creationId xmlns:a16="http://schemas.microsoft.com/office/drawing/2014/main" id="{3058EC9D-79B4-709F-86AB-E35C3E7CE77D}"/>
+              </a:ext>
+            </a:extLst>
+          </p:cNvPr>
+          <p:cNvPicPr>
+            <a:picLocks/>
+          </p:cNvPicPr>
+          <p:nvPr/>
+        </p:nvPicPr>
+        <p:blipFill>
+          <a:blip r:embed="rId8">
+            <a:extLst>
+              <a:ext uri="{96DAC541-7B7A-43D3-8B79-37D633B846F1}">
+                <asvg:svgBlip xmlns:asvg="http://schemas.microsoft.com/office/drawing/2016/SVG/main" r:embed="rId9"/>
+              </a:ext>
+            </a:extLst>
+          </a:blip>
+          <a:stretch>
+            <a:fillRect/>
+          </a:stretch>
+        </p:blipFill>
+        <p:spPr>
+          <a:xfrm>
+            <a:off x="296462" y="6190785"/>
+            <a:ext cx="296462" cy="296462"/>
+          </a:xfrm>
+          <a:prstGeom prst="rect">
+            <a:avLst/>
+          </a:prstGeom>
+        </p:spPr>
+      </p:pic>
+      <p:sp>
+        <p:nvSpPr>
+          <p:cNvPr id="7" name="Trapezoid 6">
+            <a:extLst>
+              <a:ext uri="{FF2B5EF4-FFF2-40B4-BE49-F238E27FC236}">
+                <a16:creationId xmlns:a16="http://schemas.microsoft.com/office/drawing/2014/main" id="{BB2459A8-6F47-1647-449B-F75925455042}"/>
+              </a:ext>
+            </a:extLst>
+          </p:cNvPr>
+          <p:cNvSpPr/>
+          <p:nvPr/>
+        </p:nvSpPr>
+        <p:spPr>
+          <a:xfrm rot="2700000">
+            <a:off x="9620371" y="514924"/>
+            <a:ext cx="3335198" cy="778213"/>
+          </a:xfrm>
+          <a:prstGeom prst="trapezoid">
+            <a:avLst>
+              <a:gd name="adj" fmla="val 100000"/>
+            </a:avLst>
+          </a:prstGeom>
+          <a:solidFill>
+            <a:srgbClr val="EDFAF2"/>
+          </a:solidFill>
+          <a:ln w="25400" cap="flat" cmpd="sng" algn="ctr">
+            <a:noFill/>
+            <a:prstDash val="solid"/>
+          </a:ln>
+          <a:effectLst/>
+          <a:extLst>
+            <a:ext uri="{91240B29-F687-4F45-9708-019B960494DF}">
+              <a14:hiddenLine xmlns:a14="http://schemas.microsoft.com/office/drawing/2010/main" w="25400" cap="flat" cmpd="sng" algn="ctr">
+                <a:solidFill>
+                  <a:schemeClr val="accent1">
+                    <a:shade val="15000"/>
+                  </a:schemeClr>
+                </a:solidFill>
+                <a:prstDash val="solid"/>
+              </a14:hiddenLine>
+            </a:ext>
+          </a:extLst>
+        </p:spPr>
+        <p:style>
+          <a:lnRef idx="2">
+            <a:schemeClr val="accent1">
+              <a:shade val="15000"/>
+            </a:schemeClr>
+          </a:lnRef>
+          <a:fillRef idx="1">
+            <a:schemeClr val="accent1"/>
+          </a:fillRef>
+          <a:effectRef idx="0">
+            <a:schemeClr val="accent1"/>
+          </a:effectRef>
+          <a:fontRef idx="minor">
+            <a:schemeClr val="lt1"/>
+          </a:fontRef>
+        </p:style>
+        <p:txBody>
+          <a:bodyPr tIns="0" bIns="0" rtlCol="0" anchor="t">
+            <a:normAutofit fontScale="70000" lnSpcReduction="20000"/>
+          </a:bodyPr>
+          <a:lstStyle/>
+          <a:p>
+            <a:pPr algn="ctr"/>
+            <a:r>
+              <a:rPr lang="en-US" sz="2600" b="1">
+                <a:solidFill>
+                  <a:srgbClr val="198038"/>
+                </a:solidFill>
+              </a:rPr>
+              <a:t>Do not edit
+</a:t>
+            </a:r>
+            <a:r>
+              <a:rPr lang="en-US" sz="2200">
+                <a:solidFill>
+                  <a:srgbClr val="198038"/>
+                </a:solidFill>
+                <a:hlinkClick r:id="rId10">
+                  <a:extLst>
+                    <a:ext uri="{A12FA001-AC4F-418D-AE19-62706E023703}">
+                      <ahyp:hlinkClr xmlns:ahyp="http://schemas.microsoft.com/office/drawing/2018/hyperlinkcolor" val="tx"/>
+                    </a:ext>
+                  </a:extLst>
+                </a:hlinkClick>
+              </a:rPr>
+              <a:t>How to change the design</a:t>
+            </a:r>
+            <a:endParaRPr lang="en-US" sz="2200">
+              <a:solidFill>
+                <a:srgbClr val="198038"/>
+              </a:solidFill>
+            </a:endParaRPr>
+          </a:p>
+        </p:txBody>
+      </p:sp>
+      <p:pic>
+        <p:nvPicPr>
+          <p:cNvPr id="9" name="Graphic 8">
+            <a:extLst>
+              <a:ext uri="{FF2B5EF4-FFF2-40B4-BE49-F238E27FC236}">
+                <a16:creationId xmlns:a16="http://schemas.microsoft.com/office/drawing/2014/main" id="{99DBEC85-3A0E-C697-1B5A-A21776BE644E}"/>
+              </a:ext>
+            </a:extLst>
+          </p:cNvPr>
+          <p:cNvPicPr>
+            <a:picLocks/>
+          </p:cNvPicPr>
+          <p:nvPr/>
+        </p:nvPicPr>
+        <p:blipFill>
+          <a:blip r:embed="rId11">
+            <a:extLst>
+              <a:ext uri="{96DAC541-7B7A-43D3-8B79-37D633B846F1}">
+                <asvg:svgBlip xmlns:asvg="http://schemas.microsoft.com/office/drawing/2016/SVG/main" r:embed="rId12"/>
+              </a:ext>
+            </a:extLst>
+          </a:blip>
+          <a:stretch>
+            <a:fillRect/>
+          </a:stretch>
+        </p:blipFill>
+        <p:spPr>
+          <a:xfrm>
+            <a:off x="10746748" y="6153727"/>
+            <a:ext cx="1111733" cy="370578"/>
+          </a:xfrm>
+          <a:prstGeom prst="rect">
+            <a:avLst/>
+          </a:prstGeom>
+        </p:spPr>
+      </p:pic>
+    </p:spTree>
+    <p:custDataLst>
+      <p:tags r:id="rId1"/>
+    </p:custDataLst>
+    <p:extLst>
+      <p:ext uri="{BB962C8B-B14F-4D97-AF65-F5344CB8AC3E}">
+        <p14:creationId xmlns:p14="http://schemas.microsoft.com/office/powerpoint/2010/main" val="4268165178"/>
+      </p:ext>
+    </p:extLst>
+  </p:cSld>
+  <p:clrMapOvr>
+    <a:masterClrMapping/>
+  </p:clrMapOvr>
+  <p:timing>
+    <p:tnLst>
+      <p:par>
+        <p:cTn id="1" dur="indefinite" restart="never" nodeType="tmRoot">
+          <p:childTnLst>
+            <p:seq concurrent="1" nextAc="seek">
+              <p:cTn id="2" dur="indefinite" nodeType="mainSeq">
+                <p:childTnLst>
+                  <p:par>
+                    <p:cTn id="3" fill="hold">
+                      <p:stCondLst>
+                        <p:cond delay="indefinite"/>
+                      </p:stCondLst>
+                      <p:childTnLst>
+                        <p:par>
+                          <p:cTn id="4" fill="hold">
+                            <p:stCondLst>
+                              <p:cond delay="0"/>
+                            </p:stCondLst>
+                            <p:childTnLst>
+                              <p:par>
+                                <p:cTn id="5" presetID="26" presetClass="emph" presetSubtype="0" fill="hold" grpId="0" nodeType="clickEffect">
+                                  <p:stCondLst>
+                                    <p:cond delay="0"/>
+                                  </p:stCondLst>
+                                  <p:childTnLst>
+                                    <p:animEffect transition="out" filter="fade">
+                                      <p:cBhvr>
+                                        <p:cTn id="6" dur="50" tmFilter="0, 0; .2, .5; .8, .5; 1, 0"/>
+                                        <p:tgtEl>
+                                          <p:spTgt spid="3"/>
+                                        </p:tgtEl>
+                                      </p:cBhvr>
+                                    </p:animEffect>
+                                    <p:animScale>
+                                      <p:cBhvr>
+                                        <p:cTn id="7" dur="25" autoRev="1" fill="hold"/>
+                                        <p:tgtEl>
+                                          <p:spTgt spid="3"/>
+                                        </p:tgtEl>
+                                      </p:cBhvr>
+                                      <p:by x="105000" y="105000"/>
+                                    </p:animScale>
+                                  </p:childTnLst>
+                                </p:cTn>
+                              </p:par>
+                            </p:childTnLst>
+                          </p:cTn>
+                        </p:par>
+                      </p:childTnLst>
+                    </p:cTn>
+                  </p:par>
+                </p:childTnLst>
+              </p:cTn>
+              <p:prevCondLst>
+                <p:cond evt="onPrev" delay="0">
+                  <p:tgtEl>
+                    <p:sldTgt/>
+                  </p:tgtEl>
+                </p:cond>
+              </p:prevCondLst>
+              <p:nextCondLst>
+                <p:cond evt="onNext" delay="0">
+                  <p:tgtEl>
+                    <p:sldTgt/>
+                  </p:tgtEl>
+                </p:cond>
+              </p:nextCondLst>
+            </p:seq>
+          </p:childTnLst>
+        </p:cTn>
+      </p:par>
+    </p:tnLst>
+    <p:bldLst>
+      <p:bldP spid="3" grpId="0" animBg="1"/>
+    </p:bldLst>
+  </p:timing>
+</p:sld>
+</file>
+
+<file path=ppt/slides/slide28.xml><?xml version="1.0" encoding="utf-8"?>
 <p:sld xmlns:a="http://schemas.openxmlformats.org/drawingml/2006/main" xmlns:r="http://schemas.openxmlformats.org/officeDocument/2006/relationships" xmlns:p="http://schemas.openxmlformats.org/presentationml/2006/main">
   <p:cSld>
     <p:spTree>
@@ -13600,7 +14808,7 @@
 </p:sld>
 </file>
 
-<file path=ppt/slides/slide25.xml><?xml version="1.0" encoding="utf-8"?>
+<file path=ppt/slides/slide29.xml><?xml version="1.0" encoding="utf-8"?>
 <p:sld xmlns:a="http://schemas.openxmlformats.org/drawingml/2006/main" xmlns:r="http://schemas.openxmlformats.org/officeDocument/2006/relationships" xmlns:p="http://schemas.openxmlformats.org/presentationml/2006/main">
   <p:cSld>
     <p:spTree>
@@ -13679,163 +14887,6 @@
     <p:extLst>
       <p:ext uri="{BB962C8B-B14F-4D97-AF65-F5344CB8AC3E}">
         <p14:creationId xmlns:p14="http://schemas.microsoft.com/office/powerpoint/2010/main" val="4120948450"/>
-      </p:ext>
-    </p:extLst>
-  </p:cSld>
-  <p:clrMapOvr>
-    <a:masterClrMapping/>
-  </p:clrMapOvr>
-</p:sld>
-</file>
-
-<file path=ppt/slides/slide26.xml><?xml version="1.0" encoding="utf-8"?>
-<p:sld xmlns:a="http://schemas.openxmlformats.org/drawingml/2006/main" xmlns:r="http://schemas.openxmlformats.org/officeDocument/2006/relationships" xmlns:p="http://schemas.openxmlformats.org/presentationml/2006/main">
-  <p:cSld>
-    <p:spTree>
-      <p:nvGrpSpPr>
-        <p:cNvPr id="1" name=""/>
-        <p:cNvGrpSpPr/>
-        <p:nvPr/>
-      </p:nvGrpSpPr>
-      <p:grpSpPr>
-        <a:xfrm>
-          <a:off x="0" y="0"/>
-          <a:ext cx="0" cy="0"/>
-          <a:chOff x="0" y="0"/>
-          <a:chExt cx="0" cy="0"/>
-        </a:xfrm>
-      </p:grpSpPr>
-      <p:sp>
-        <p:nvSpPr>
-          <p:cNvPr id="3" name="Title 2">
-            <a:extLst>
-              <a:ext uri="{FF2B5EF4-FFF2-40B4-BE49-F238E27FC236}">
-                <a16:creationId xmlns:a16="http://schemas.microsoft.com/office/drawing/2014/main" id="{9323871C-7CA8-1448-8FFC-1AE6E1838941}"/>
-              </a:ext>
-            </a:extLst>
-          </p:cNvPr>
-          <p:cNvSpPr>
-            <a:spLocks noGrp="1"/>
-          </p:cNvSpPr>
-          <p:nvPr>
-            <p:ph type="title"/>
-          </p:nvPr>
-        </p:nvSpPr>
-        <p:spPr/>
-        <p:txBody>
-          <a:bodyPr/>
-          <a:lstStyle/>
-          <a:p>
-            <a:r>
-              <a:rPr lang="en-US" dirty="0"/>
-              <a:t>Things to remember</a:t>
-            </a:r>
-          </a:p>
-        </p:txBody>
-      </p:sp>
-      <p:sp>
-        <p:nvSpPr>
-          <p:cNvPr id="4" name="Text Placeholder 3">
-            <a:extLst>
-              <a:ext uri="{FF2B5EF4-FFF2-40B4-BE49-F238E27FC236}">
-                <a16:creationId xmlns:a16="http://schemas.microsoft.com/office/drawing/2014/main" id="{5E600BA7-FA45-884F-9820-9E5F2CB7AA48}"/>
-              </a:ext>
-            </a:extLst>
-          </p:cNvPr>
-          <p:cNvSpPr>
-            <a:spLocks noGrp="1"/>
-          </p:cNvSpPr>
-          <p:nvPr>
-            <p:ph type="body" idx="1"/>
-          </p:nvPr>
-        </p:nvSpPr>
-        <p:spPr/>
-        <p:txBody>
-          <a:bodyPr/>
-          <a:lstStyle/>
-          <a:p>
-            <a:r>
-              <a:rPr lang="en-US" b="1" dirty="0"/>
-              <a:t>Should be able to access: </a:t>
-            </a:r>
-            <a:r>
-              <a:rPr lang="en-US" b="1" dirty="0" err="1"/>
-              <a:t>github</a:t>
-            </a:r>
-            <a:r>
-              <a:rPr lang="en-US" b="1" dirty="0"/>
-              <a:t> and data</a:t>
-            </a:r>
-          </a:p>
-          <a:p>
-            <a:endParaRPr lang="en-US" dirty="0"/>
-          </a:p>
-          <a:p>
-            <a:pPr>
-              <a:lnSpc>
-                <a:spcPct val="100000"/>
-              </a:lnSpc>
-            </a:pPr>
-            <a:r>
-              <a:rPr lang="en-US" dirty="0"/>
-              <a:t>Due Next Week:</a:t>
-            </a:r>
-          </a:p>
-          <a:p>
-            <a:pPr lvl="1">
-              <a:lnSpc>
-                <a:spcPct val="100000"/>
-              </a:lnSpc>
-              <a:spcBef>
-                <a:spcPts val="800"/>
-              </a:spcBef>
-            </a:pPr>
-            <a:r>
-              <a:rPr lang="en-US" dirty="0"/>
-              <a:t>Monday – project update assignment </a:t>
-            </a:r>
-            <a:r>
-              <a:rPr lang="en-US" dirty="0">
-                <a:hlinkClick r:id="rId2"/>
-              </a:rPr>
-              <a:t>(Formulation and Baselines)</a:t>
-            </a:r>
-            <a:endParaRPr lang="en-US" dirty="0"/>
-          </a:p>
-          <a:p>
-            <a:pPr lvl="1">
-              <a:lnSpc>
-                <a:spcPct val="100000"/>
-              </a:lnSpc>
-              <a:spcBef>
-                <a:spcPts val="800"/>
-              </a:spcBef>
-            </a:pPr>
-            <a:r>
-              <a:rPr lang="en-US" dirty="0"/>
-              <a:t>Tuesday – weekly feedback form</a:t>
-            </a:r>
-            <a:br>
-              <a:rPr lang="en-US" dirty="0"/>
-            </a:br>
-            <a:endParaRPr lang="en-US" dirty="0"/>
-          </a:p>
-          <a:p>
-            <a:r>
-              <a:rPr lang="en-US" dirty="0">
-                <a:highlight>
-                  <a:srgbClr val="FFFF00"/>
-                </a:highlight>
-              </a:rPr>
-              <a:t>Readings for Tuesday</a:t>
-            </a:r>
-          </a:p>
-        </p:txBody>
-      </p:sp>
-    </p:spTree>
-    <p:extLst>
-      <p:ext uri="{BB962C8B-B14F-4D97-AF65-F5344CB8AC3E}">
-        <p14:creationId xmlns:p14="http://schemas.microsoft.com/office/powerpoint/2010/main" val="2131409271"/>
       </p:ext>
     </p:extLst>
   </p:cSld>
@@ -13974,7 +15025,287 @@
 </p:sld>
 </file>
 
+<file path=ppt/slides/slide30.xml><?xml version="1.0" encoding="utf-8"?>
+<p:sld xmlns:a="http://schemas.openxmlformats.org/drawingml/2006/main" xmlns:r="http://schemas.openxmlformats.org/officeDocument/2006/relationships" xmlns:p="http://schemas.openxmlformats.org/presentationml/2006/main">
+  <p:cSld>
+    <p:spTree>
+      <p:nvGrpSpPr>
+        <p:cNvPr id="1" name=""/>
+        <p:cNvGrpSpPr/>
+        <p:nvPr/>
+      </p:nvGrpSpPr>
+      <p:grpSpPr>
+        <a:xfrm>
+          <a:off x="0" y="0"/>
+          <a:ext cx="0" cy="0"/>
+          <a:chOff x="0" y="0"/>
+          <a:chExt cx="0" cy="0"/>
+        </a:xfrm>
+      </p:grpSpPr>
+      <p:sp>
+        <p:nvSpPr>
+          <p:cNvPr id="3" name="Title 2">
+            <a:extLst>
+              <a:ext uri="{FF2B5EF4-FFF2-40B4-BE49-F238E27FC236}">
+                <a16:creationId xmlns:a16="http://schemas.microsoft.com/office/drawing/2014/main" id="{9323871C-7CA8-1448-8FFC-1AE6E1838941}"/>
+              </a:ext>
+            </a:extLst>
+          </p:cNvPr>
+          <p:cNvSpPr>
+            <a:spLocks noGrp="1"/>
+          </p:cNvSpPr>
+          <p:nvPr>
+            <p:ph type="title"/>
+          </p:nvPr>
+        </p:nvSpPr>
+        <p:spPr/>
+        <p:txBody>
+          <a:bodyPr/>
+          <a:lstStyle/>
+          <a:p>
+            <a:r>
+              <a:rPr lang="en-US" dirty="0"/>
+              <a:t>Things to remember</a:t>
+            </a:r>
+          </a:p>
+        </p:txBody>
+      </p:sp>
+      <p:sp>
+        <p:nvSpPr>
+          <p:cNvPr id="4" name="Text Placeholder 3">
+            <a:extLst>
+              <a:ext uri="{FF2B5EF4-FFF2-40B4-BE49-F238E27FC236}">
+                <a16:creationId xmlns:a16="http://schemas.microsoft.com/office/drawing/2014/main" id="{5E600BA7-FA45-884F-9820-9E5F2CB7AA48}"/>
+              </a:ext>
+            </a:extLst>
+          </p:cNvPr>
+          <p:cNvSpPr>
+            <a:spLocks noGrp="1"/>
+          </p:cNvSpPr>
+          <p:nvPr>
+            <p:ph type="body" idx="1"/>
+          </p:nvPr>
+        </p:nvSpPr>
+        <p:spPr/>
+        <p:txBody>
+          <a:bodyPr/>
+          <a:lstStyle/>
+          <a:p>
+            <a:r>
+              <a:rPr lang="en-US" b="1" dirty="0"/>
+              <a:t>Should be able to access: </a:t>
+            </a:r>
+            <a:r>
+              <a:rPr lang="en-US" b="1" dirty="0" err="1"/>
+              <a:t>github</a:t>
+            </a:r>
+            <a:r>
+              <a:rPr lang="en-US" b="1" dirty="0"/>
+              <a:t> and data (see canvas </a:t>
+            </a:r>
+            <a:r>
+              <a:rPr lang="en-US" b="1"/>
+              <a:t>assignment for </a:t>
+            </a:r>
+            <a:r>
+              <a:rPr lang="en-US" b="1" dirty="0"/>
+              <a:t>us to confirm)</a:t>
+            </a:r>
+          </a:p>
+          <a:p>
+            <a:endParaRPr lang="en-US" dirty="0"/>
+          </a:p>
+          <a:p>
+            <a:pPr>
+              <a:lnSpc>
+                <a:spcPct val="100000"/>
+              </a:lnSpc>
+            </a:pPr>
+            <a:r>
+              <a:rPr lang="en-US" dirty="0"/>
+              <a:t>Due Next Week:</a:t>
+            </a:r>
+          </a:p>
+          <a:p>
+            <a:pPr lvl="1">
+              <a:lnSpc>
+                <a:spcPct val="100000"/>
+              </a:lnSpc>
+              <a:spcBef>
+                <a:spcPts val="800"/>
+              </a:spcBef>
+            </a:pPr>
+            <a:r>
+              <a:rPr lang="en-US" dirty="0"/>
+              <a:t>Monday – project update assignment </a:t>
+            </a:r>
+            <a:r>
+              <a:rPr lang="en-US" dirty="0">
+                <a:hlinkClick r:id="rId2"/>
+              </a:rPr>
+              <a:t>(Formulation and Baselines)</a:t>
+            </a:r>
+            <a:endParaRPr lang="en-US" dirty="0"/>
+          </a:p>
+          <a:p>
+            <a:pPr lvl="1">
+              <a:lnSpc>
+                <a:spcPct val="100000"/>
+              </a:lnSpc>
+              <a:spcBef>
+                <a:spcPts val="800"/>
+              </a:spcBef>
+            </a:pPr>
+            <a:r>
+              <a:rPr lang="en-US" dirty="0"/>
+              <a:t>Tuesday – weekly feedback form</a:t>
+            </a:r>
+            <a:br>
+              <a:rPr lang="en-US" dirty="0"/>
+            </a:br>
+            <a:endParaRPr lang="en-US" dirty="0"/>
+          </a:p>
+          <a:p>
+            <a:r>
+              <a:rPr lang="en-US" dirty="0">
+                <a:highlight>
+                  <a:srgbClr val="FFFF00"/>
+                </a:highlight>
+              </a:rPr>
+              <a:t>Readings for Tuesday</a:t>
+            </a:r>
+          </a:p>
+        </p:txBody>
+      </p:sp>
+    </p:spTree>
+    <p:extLst>
+      <p:ext uri="{BB962C8B-B14F-4D97-AF65-F5344CB8AC3E}">
+        <p14:creationId xmlns:p14="http://schemas.microsoft.com/office/powerpoint/2010/main" val="2131409271"/>
+      </p:ext>
+    </p:extLst>
+  </p:cSld>
+  <p:clrMapOvr>
+    <a:masterClrMapping/>
+  </p:clrMapOvr>
+</p:sld>
+</file>
+
 <file path=ppt/slides/slide4.xml><?xml version="1.0" encoding="utf-8"?>
+<p:sld xmlns:a="http://schemas.openxmlformats.org/drawingml/2006/main" xmlns:r="http://schemas.openxmlformats.org/officeDocument/2006/relationships" xmlns:p="http://schemas.openxmlformats.org/presentationml/2006/main">
+  <p:cSld>
+    <p:spTree>
+      <p:nvGrpSpPr>
+        <p:cNvPr id="1" name=""/>
+        <p:cNvGrpSpPr/>
+        <p:nvPr/>
+      </p:nvGrpSpPr>
+      <p:grpSpPr>
+        <a:xfrm>
+          <a:off x="0" y="0"/>
+          <a:ext cx="0" cy="0"/>
+          <a:chOff x="0" y="0"/>
+          <a:chExt cx="0" cy="0"/>
+        </a:xfrm>
+      </p:grpSpPr>
+      <p:sp>
+        <p:nvSpPr>
+          <p:cNvPr id="4" name="Text Placeholder 3">
+            <a:extLst>
+              <a:ext uri="{FF2B5EF4-FFF2-40B4-BE49-F238E27FC236}">
+                <a16:creationId xmlns:a16="http://schemas.microsoft.com/office/drawing/2014/main" id="{56E3C146-7255-5392-DBEE-71B9EB43B864}"/>
+              </a:ext>
+            </a:extLst>
+          </p:cNvPr>
+          <p:cNvSpPr>
+            <a:spLocks noGrp="1"/>
+          </p:cNvSpPr>
+          <p:nvPr>
+            <p:ph type="body" idx="1"/>
+          </p:nvPr>
+        </p:nvSpPr>
+        <p:spPr/>
+        <p:txBody>
+          <a:bodyPr/>
+          <a:lstStyle/>
+          <a:p>
+            <a:r>
+              <a:rPr lang="en-US" dirty="0"/>
+              <a:t>Learn how to go from scope to an ML Formulation: what decisions needs to be made and how?</a:t>
+            </a:r>
+          </a:p>
+          <a:p>
+            <a:endParaRPr lang="en-US" dirty="0"/>
+          </a:p>
+          <a:p>
+            <a:r>
+              <a:rPr lang="en-US" dirty="0"/>
+              <a:t>Discuss the case study reading related to Formulation</a:t>
+            </a:r>
+          </a:p>
+          <a:p>
+            <a:endParaRPr lang="en-US" dirty="0"/>
+          </a:p>
+          <a:p>
+            <a:endParaRPr lang="en-US" dirty="0"/>
+          </a:p>
+          <a:p>
+            <a:r>
+              <a:rPr lang="en-US" dirty="0"/>
+              <a:t>Learn about effective baselines and how to develop them </a:t>
+            </a:r>
+            <a:r>
+              <a:rPr lang="en-US" b="1" dirty="0"/>
+              <a:t>before</a:t>
+            </a:r>
+            <a:r>
+              <a:rPr lang="en-US" dirty="0"/>
+              <a:t> building a complex ML model</a:t>
+            </a:r>
+          </a:p>
+        </p:txBody>
+      </p:sp>
+      <p:sp>
+        <p:nvSpPr>
+          <p:cNvPr id="3" name="Title 2">
+            <a:extLst>
+              <a:ext uri="{FF2B5EF4-FFF2-40B4-BE49-F238E27FC236}">
+                <a16:creationId xmlns:a16="http://schemas.microsoft.com/office/drawing/2014/main" id="{27BE0E7C-5CAB-B4EE-6949-4BF71549011E}"/>
+              </a:ext>
+            </a:extLst>
+          </p:cNvPr>
+          <p:cNvSpPr>
+            <a:spLocks noGrp="1"/>
+          </p:cNvSpPr>
+          <p:nvPr>
+            <p:ph type="title"/>
+          </p:nvPr>
+        </p:nvSpPr>
+        <p:spPr/>
+        <p:txBody>
+          <a:bodyPr/>
+          <a:lstStyle/>
+          <a:p>
+            <a:r>
+              <a:rPr lang="en-US" dirty="0"/>
+              <a:t>Plan for today</a:t>
+            </a:r>
+          </a:p>
+        </p:txBody>
+      </p:sp>
+    </p:spTree>
+    <p:extLst>
+      <p:ext uri="{BB962C8B-B14F-4D97-AF65-F5344CB8AC3E}">
+        <p14:creationId xmlns:p14="http://schemas.microsoft.com/office/powerpoint/2010/main" val="2253840176"/>
+      </p:ext>
+    </p:extLst>
+  </p:cSld>
+  <p:clrMapOvr>
+    <a:masterClrMapping/>
+  </p:clrMapOvr>
+</p:sld>
+</file>
+
+<file path=ppt/slides/slide5.xml><?xml version="1.0" encoding="utf-8"?>
 <p:sld xmlns:a="http://schemas.openxmlformats.org/drawingml/2006/main" xmlns:r="http://schemas.openxmlformats.org/officeDocument/2006/relationships" xmlns:p="http://schemas.openxmlformats.org/presentationml/2006/main">
   <p:cSld>
     <p:spTree>
@@ -14110,7 +15441,7 @@
 </p:sld>
 </file>
 
-<file path=ppt/slides/slide5.xml><?xml version="1.0" encoding="utf-8"?>
+<file path=ppt/slides/slide6.xml><?xml version="1.0" encoding="utf-8"?>
 <p:sld xmlns:a="http://schemas.openxmlformats.org/drawingml/2006/main" xmlns:r="http://schemas.openxmlformats.org/officeDocument/2006/relationships" xmlns:p="http://schemas.openxmlformats.org/presentationml/2006/main">
   <p:cSld>
     <p:spTree>
@@ -14182,8 +15513,11 @@
           <a:p>
             <a:r>
               <a:rPr lang="en-US" dirty="0"/>
-              <a:t>The analytical formulation should be guided by –– and map back to –– how the system you’re building will be deployed and used</a:t>
-            </a:r>
+              <a:t>One scope can result in numerous formulations – we need to develop one that is feasible and best informs our goals</a:t>
+            </a:r>
+          </a:p>
+          <a:p>
+            <a:endParaRPr lang="en-US" dirty="0"/>
           </a:p>
         </p:txBody>
       </p:sp>
@@ -14219,95 +15553,6 @@
     <p:extLst>
       <p:ext uri="{BB962C8B-B14F-4D97-AF65-F5344CB8AC3E}">
         <p14:creationId xmlns:p14="http://schemas.microsoft.com/office/powerpoint/2010/main" val="3562142687"/>
-      </p:ext>
-    </p:extLst>
-  </p:cSld>
-  <p:clrMapOvr>
-    <a:masterClrMapping/>
-  </p:clrMapOvr>
-</p:sld>
-</file>
-
-<file path=ppt/slides/slide6.xml><?xml version="1.0" encoding="utf-8"?>
-<p:sld xmlns:a="http://schemas.openxmlformats.org/drawingml/2006/main" xmlns:r="http://schemas.openxmlformats.org/officeDocument/2006/relationships" xmlns:p="http://schemas.openxmlformats.org/presentationml/2006/main">
-  <p:cSld>
-    <p:spTree>
-      <p:nvGrpSpPr>
-        <p:cNvPr id="1" name=""/>
-        <p:cNvGrpSpPr/>
-        <p:nvPr/>
-      </p:nvGrpSpPr>
-      <p:grpSpPr>
-        <a:xfrm>
-          <a:off x="0" y="0"/>
-          <a:ext cx="0" cy="0"/>
-          <a:chOff x="0" y="0"/>
-          <a:chExt cx="0" cy="0"/>
-        </a:xfrm>
-      </p:grpSpPr>
-      <p:sp>
-        <p:nvSpPr>
-          <p:cNvPr id="3" name="Title 2">
-            <a:extLst>
-              <a:ext uri="{FF2B5EF4-FFF2-40B4-BE49-F238E27FC236}">
-                <a16:creationId xmlns:a16="http://schemas.microsoft.com/office/drawing/2014/main" id="{FC4F2F47-A164-2C41-A1CD-CFD1AFCBE708}"/>
-              </a:ext>
-            </a:extLst>
-          </p:cNvPr>
-          <p:cNvSpPr>
-            <a:spLocks noGrp="1"/>
-          </p:cNvSpPr>
-          <p:nvPr>
-            <p:ph type="title"/>
-          </p:nvPr>
-        </p:nvSpPr>
-        <p:spPr/>
-        <p:txBody>
-          <a:bodyPr/>
-          <a:lstStyle/>
-          <a:p>
-            <a:pPr algn="ctr"/>
-            <a:r>
-              <a:rPr lang="en-US" dirty="0"/>
-              <a:t>CASE STUDY</a:t>
-            </a:r>
-          </a:p>
-        </p:txBody>
-      </p:sp>
-      <p:pic>
-        <p:nvPicPr>
-          <p:cNvPr id="6" name="Picture 5">
-            <a:extLst>
-              <a:ext uri="{FF2B5EF4-FFF2-40B4-BE49-F238E27FC236}">
-                <a16:creationId xmlns:a16="http://schemas.microsoft.com/office/drawing/2014/main" id="{DD7C8A1F-AE56-5146-B94D-D4E3FEFBC845}"/>
-              </a:ext>
-            </a:extLst>
-          </p:cNvPr>
-          <p:cNvPicPr>
-            <a:picLocks noChangeAspect="1"/>
-          </p:cNvPicPr>
-          <p:nvPr/>
-        </p:nvPicPr>
-        <p:blipFill>
-          <a:blip r:embed="rId2"/>
-          <a:stretch>
-            <a:fillRect/>
-          </a:stretch>
-        </p:blipFill>
-        <p:spPr>
-          <a:xfrm>
-            <a:off x="1524000" y="1676572"/>
-            <a:ext cx="9144000" cy="3035300"/>
-          </a:xfrm>
-          <a:prstGeom prst="rect">
-            <a:avLst/>
-          </a:prstGeom>
-        </p:spPr>
-      </p:pic>
-    </p:spTree>
-    <p:extLst>
-      <p:ext uri="{BB962C8B-B14F-4D97-AF65-F5344CB8AC3E}">
-        <p14:creationId xmlns:p14="http://schemas.microsoft.com/office/powerpoint/2010/main" val="2007043753"/>
       </p:ext>
     </p:extLst>
   </p:cSld>
@@ -14339,7 +15584,7 @@
           <p:cNvPr id="2" name="Text Placeholder 1">
             <a:extLst>
               <a:ext uri="{FF2B5EF4-FFF2-40B4-BE49-F238E27FC236}">
-                <a16:creationId xmlns:a16="http://schemas.microsoft.com/office/drawing/2014/main" id="{CA2F7B32-9E66-8E5C-C019-A4D231FCAECB}"/>
+                <a16:creationId xmlns:a16="http://schemas.microsoft.com/office/drawing/2014/main" id="{8FEC392E-A1E6-5663-AC48-6AB4E39FEAA5}"/>
               </a:ext>
             </a:extLst>
           </p:cNvPr>
@@ -14355,9 +15600,12 @@
           <a:bodyPr/>
           <a:lstStyle/>
           <a:p>
-            <a:r>
-              <a:rPr lang="en-US" dirty="0"/>
-              <a:t>In the Obermeyer et al. reading, what formulation decision is the focus of the paper?</a:t>
+            <a:pPr marL="114300" indent="0">
+              <a:buNone/>
+            </a:pPr>
+            <a:r>
+              <a:rPr lang="en-US" sz="4000" dirty="0"/>
+              <a:t>ML systems sometimes fail because the model design, development, and validation does not match the deployment and use case setting</a:t>
             </a:r>
           </a:p>
         </p:txBody>
@@ -14367,7 +15615,7 @@
           <p:cNvPr id="3" name="Title 2">
             <a:extLst>
               <a:ext uri="{FF2B5EF4-FFF2-40B4-BE49-F238E27FC236}">
-                <a16:creationId xmlns:a16="http://schemas.microsoft.com/office/drawing/2014/main" id="{000EB0DE-95C0-EFAB-3EBC-E7036AE92059}"/>
+                <a16:creationId xmlns:a16="http://schemas.microsoft.com/office/drawing/2014/main" id="{0C8E2D1A-55E3-1D83-A26A-70B8D7CBBC22}"/>
               </a:ext>
             </a:extLst>
           </p:cNvPr>
@@ -14385,17 +15633,17 @@
           <a:p>
             <a:r>
               <a:rPr lang="en-US" dirty="0"/>
-              <a:t>Formulation Decisions</a:t>
+              <a:t>What failure are we trying to avoid?</a:t>
             </a:r>
           </a:p>
         </p:txBody>
       </p:sp>
       <p:sp>
         <p:nvSpPr>
-          <p:cNvPr id="4" name="TextBox 3">
+          <p:cNvPr id="5" name="TextBox 4">
             <a:extLst>
               <a:ext uri="{FF2B5EF4-FFF2-40B4-BE49-F238E27FC236}">
-                <a16:creationId xmlns:a16="http://schemas.microsoft.com/office/drawing/2014/main" id="{143541AF-EF0F-D7E7-CE20-EC98E6076CBB}"/>
+                <a16:creationId xmlns:a16="http://schemas.microsoft.com/office/drawing/2014/main" id="{1433167D-2D60-44CB-A36A-0B9CBA4B561D}"/>
               </a:ext>
             </a:extLst>
           </p:cNvPr>
@@ -14404,93 +15652,36 @@
         </p:nvSpPr>
         <p:spPr>
           <a:xfrm>
-            <a:off x="2908511" y="2907586"/>
-            <a:ext cx="4812536" cy="2308324"/>
+            <a:off x="782198" y="4795772"/>
+            <a:ext cx="10025349" cy="1384995"/>
           </a:xfrm>
           <a:prstGeom prst="rect">
             <a:avLst/>
           </a:prstGeom>
-          <a:noFill/>
+          <a:solidFill>
+            <a:schemeClr val="bg2">
+              <a:lumMod val="40000"/>
+              <a:lumOff val="60000"/>
+            </a:schemeClr>
+          </a:solidFill>
         </p:spPr>
         <p:txBody>
-          <a:bodyPr wrap="none" rtlCol="0">
+          <a:bodyPr wrap="square">
             <a:spAutoFit/>
           </a:bodyPr>
           <a:lstStyle/>
           <a:p>
             <a:r>
-              <a:rPr lang="en-US" sz="4800" dirty="0" err="1"/>
-              <a:t>Sli.do</a:t>
-            </a:r>
-            <a:r>
-              <a:rPr lang="en-US" sz="4800" dirty="0"/>
-              <a:t>      #10718</a:t>
-            </a:r>
-          </a:p>
-          <a:p>
-            <a:endParaRPr lang="en-US" sz="4800" dirty="0"/>
-          </a:p>
-          <a:p>
-            <a:r>
-              <a:rPr lang="en-US" sz="4800" dirty="0" err="1"/>
-              <a:t>sli.do</a:t>
-            </a:r>
-            <a:r>
-              <a:rPr lang="en-US" sz="4800" dirty="0"/>
-              <a:t>/10718</a:t>
-            </a:r>
-          </a:p>
-        </p:txBody>
-      </p:sp>
-      <p:sp>
-        <p:nvSpPr>
-          <p:cNvPr id="5" name="AutoShape 2" descr="qr code">
-            <a:extLst>
-              <a:ext uri="{FF2B5EF4-FFF2-40B4-BE49-F238E27FC236}">
-                <a16:creationId xmlns:a16="http://schemas.microsoft.com/office/drawing/2014/main" id="{5056FB75-71B9-8967-2245-4270362FADD7}"/>
-              </a:ext>
-            </a:extLst>
-          </p:cNvPr>
-          <p:cNvSpPr>
-            <a:spLocks noChangeAspect="1" noChangeArrowheads="1"/>
-          </p:cNvSpPr>
-          <p:nvPr/>
-        </p:nvSpPr>
-        <p:spPr bwMode="auto">
-          <a:xfrm>
-            <a:off x="5943600" y="3276600"/>
-            <a:ext cx="304800" cy="304800"/>
-          </a:xfrm>
-          <a:prstGeom prst="rect">
-            <a:avLst/>
-          </a:prstGeom>
-          <a:noFill/>
-          <a:extLst>
-            <a:ext uri="{909E8E84-426E-40DD-AFC4-6F175D3DCCD1}">
-              <a14:hiddenFill xmlns:a14="http://schemas.microsoft.com/office/drawing/2010/main">
-                <a:solidFill>
-                  <a:srgbClr val="FFFFFF"/>
-                </a:solidFill>
-              </a14:hiddenFill>
-            </a:ext>
-          </a:extLst>
-        </p:spPr>
-        <p:txBody>
-          <a:bodyPr vert="horz" wrap="square" lIns="91440" tIns="45720" rIns="91440" bIns="45720" numCol="1" anchor="t" anchorCtr="0" compatLnSpc="1">
-            <a:prstTxWarp prst="textNoShape">
-              <a:avLst/>
-            </a:prstTxWarp>
-          </a:bodyPr>
-          <a:lstStyle/>
-          <a:p>
-            <a:endParaRPr lang="en-US"/>
+              <a:rPr lang="en-US" sz="2800" dirty="0"/>
+              <a:t>The analytical formulation should be guided by –– and map back to –– how the system you’re building will be deployed and used</a:t>
+            </a:r>
           </a:p>
         </p:txBody>
       </p:sp>
     </p:spTree>
     <p:extLst>
       <p:ext uri="{BB962C8B-B14F-4D97-AF65-F5344CB8AC3E}">
-        <p14:creationId xmlns:p14="http://schemas.microsoft.com/office/powerpoint/2010/main" val="401324692"/>
+        <p14:creationId xmlns:p14="http://schemas.microsoft.com/office/powerpoint/2010/main" val="1538776111"/>
       </p:ext>
     </p:extLst>
   </p:cSld>
@@ -14519,10 +15710,82 @@
       </p:grpSpPr>
       <p:sp>
         <p:nvSpPr>
+          <p:cNvPr id="2" name="Text Placeholder 1">
+            <a:extLst>
+              <a:ext uri="{FF2B5EF4-FFF2-40B4-BE49-F238E27FC236}">
+                <a16:creationId xmlns:a16="http://schemas.microsoft.com/office/drawing/2014/main" id="{5AD8AC8D-7187-DEFA-5F2E-07D29AB20B27}"/>
+              </a:ext>
+            </a:extLst>
+          </p:cNvPr>
+          <p:cNvSpPr>
+            <a:spLocks noGrp="1"/>
+          </p:cNvSpPr>
+          <p:nvPr>
+            <p:ph type="body" idx="1"/>
+          </p:nvPr>
+        </p:nvSpPr>
+        <p:spPr/>
+        <p:txBody>
+          <a:bodyPr/>
+          <a:lstStyle/>
+          <a:p>
+            <a:r>
+              <a:rPr lang="en-US" dirty="0"/>
+              <a:t>Increase retention of users of a </a:t>
+            </a:r>
+            <a:r>
+              <a:rPr lang="en-US" dirty="0" err="1"/>
+              <a:t>genai</a:t>
+            </a:r>
+            <a:r>
+              <a:rPr lang="en-US" dirty="0"/>
+              <a:t> tool by offering them targeted offers</a:t>
+            </a:r>
+          </a:p>
+          <a:p>
+            <a:endParaRPr lang="en-US" dirty="0"/>
+          </a:p>
+          <a:p>
+            <a:r>
+              <a:rPr lang="en-US" dirty="0"/>
+              <a:t>Reduce # of students who will not graduate college on time by offering extra support</a:t>
+            </a:r>
+          </a:p>
+          <a:p>
+            <a:endParaRPr lang="en-US" dirty="0"/>
+          </a:p>
+          <a:p>
+            <a:r>
+              <a:rPr lang="en-US" dirty="0"/>
+              <a:t>Prevent people from getting late-stage Chronic Kidney Disease by doing early screening</a:t>
+            </a:r>
+          </a:p>
+          <a:p>
+            <a:endParaRPr lang="en-US" dirty="0"/>
+          </a:p>
+          <a:p>
+            <a:r>
+              <a:rPr lang="en-US" dirty="0"/>
+              <a:t>Reduce fraudulent credit card transactions</a:t>
+            </a:r>
+          </a:p>
+          <a:p>
+            <a:endParaRPr lang="en-US" dirty="0"/>
+          </a:p>
+          <a:p>
+            <a:endParaRPr lang="en-US" dirty="0"/>
+          </a:p>
+          <a:p>
+            <a:endParaRPr lang="en-US" dirty="0"/>
+          </a:p>
+        </p:txBody>
+      </p:sp>
+      <p:sp>
+        <p:nvSpPr>
           <p:cNvPr id="3" name="Title 2">
             <a:extLst>
               <a:ext uri="{FF2B5EF4-FFF2-40B4-BE49-F238E27FC236}">
-                <a16:creationId xmlns:a16="http://schemas.microsoft.com/office/drawing/2014/main" id="{FA5EDE9B-A257-2333-4DB4-CBD380E13236}"/>
+                <a16:creationId xmlns:a16="http://schemas.microsoft.com/office/drawing/2014/main" id="{D5803BBD-FD18-92CB-DFFF-B963BD1170C4}"/>
               </a:ext>
             </a:extLst>
           </p:cNvPr>
@@ -14540,370 +15803,15 @@
           <a:p>
             <a:r>
               <a:rPr lang="en-US" dirty="0"/>
-              <a:t>Analytical Formulation</a:t>
-            </a:r>
-          </a:p>
-        </p:txBody>
-      </p:sp>
-      <p:sp>
-        <p:nvSpPr>
-          <p:cNvPr id="12" name="TextBox 11">
-            <a:extLst>
-              <a:ext uri="{FF2B5EF4-FFF2-40B4-BE49-F238E27FC236}">
-                <a16:creationId xmlns:a16="http://schemas.microsoft.com/office/drawing/2014/main" id="{92628BEE-B8E7-C511-5764-E82AF6189A5B}"/>
-              </a:ext>
-            </a:extLst>
-          </p:cNvPr>
-          <p:cNvSpPr txBox="1"/>
-          <p:nvPr/>
-        </p:nvSpPr>
-        <p:spPr>
-          <a:xfrm>
-            <a:off x="161381" y="1607442"/>
-            <a:ext cx="3354513" cy="5139869"/>
-          </a:xfrm>
-          <a:prstGeom prst="rect">
-            <a:avLst/>
-          </a:prstGeom>
-          <a:solidFill>
-            <a:schemeClr val="bg2">
-              <a:lumMod val="20000"/>
-              <a:lumOff val="80000"/>
-            </a:schemeClr>
-          </a:solidFill>
-        </p:spPr>
-        <p:style>
-          <a:lnRef idx="2">
-            <a:schemeClr val="accent3">
-              <a:shade val="50000"/>
-            </a:schemeClr>
-          </a:lnRef>
-          <a:fillRef idx="1">
-            <a:schemeClr val="accent3"/>
-          </a:fillRef>
-          <a:effectRef idx="0">
-            <a:schemeClr val="accent3"/>
-          </a:effectRef>
-          <a:fontRef idx="minor">
-            <a:schemeClr val="lt1"/>
-          </a:fontRef>
-        </p:style>
-        <p:txBody>
-          <a:bodyPr wrap="square">
-            <a:spAutoFit/>
-          </a:bodyPr>
-          <a:lstStyle/>
-          <a:p>
-            <a:pPr rtl="0">
-              <a:spcBef>
-                <a:spcPts val="0"/>
-              </a:spcBef>
-              <a:spcAft>
-                <a:spcPts val="0"/>
-              </a:spcAft>
-            </a:pPr>
-            <a:br>
-              <a:rPr lang="en-US" sz="2000" b="0" dirty="0">
-                <a:effectLst/>
-              </a:rPr>
-            </a:br>
-            <a:r>
-              <a:rPr lang="en-US" sz="2000" b="0" i="0" u="none" strike="noStrike" dirty="0">
-                <a:solidFill>
-                  <a:srgbClr val="FF0000"/>
-                </a:solidFill>
-                <a:effectLst/>
-                <a:latin typeface="Arial" panose="020B0604020202020204" pitchFamily="34" charset="0"/>
-              </a:rPr>
-              <a:t>How often is the recommendation/decision being made?</a:t>
-            </a:r>
-            <a:endParaRPr lang="en-US" sz="2000" b="0" dirty="0">
-              <a:effectLst/>
-            </a:endParaRPr>
-          </a:p>
-          <a:p>
-            <a:pPr rtl="0">
-              <a:spcBef>
-                <a:spcPts val="0"/>
-              </a:spcBef>
-              <a:spcAft>
-                <a:spcPts val="0"/>
-              </a:spcAft>
-            </a:pPr>
-            <a:br>
-              <a:rPr lang="en-US" sz="2000" b="0" dirty="0">
-                <a:effectLst/>
-              </a:rPr>
-            </a:br>
-            <a:r>
-              <a:rPr lang="en-US" sz="2000" b="0" i="0" u="none" strike="noStrike" dirty="0">
-                <a:solidFill>
-                  <a:srgbClr val="0000FF"/>
-                </a:solidFill>
-                <a:effectLst/>
-                <a:latin typeface="Arial" panose="020B0604020202020204" pitchFamily="34" charset="0"/>
-              </a:rPr>
-              <a:t>Who/what is included in the cohort?</a:t>
-            </a:r>
-            <a:endParaRPr lang="en-US" sz="2000" b="0" dirty="0">
-              <a:effectLst/>
-            </a:endParaRPr>
-          </a:p>
-          <a:p>
-            <a:pPr rtl="0">
-              <a:spcBef>
-                <a:spcPts val="0"/>
-              </a:spcBef>
-              <a:spcAft>
-                <a:spcPts val="0"/>
-              </a:spcAft>
-            </a:pPr>
-            <a:br>
-              <a:rPr lang="en-US" sz="2000" b="0" dirty="0">
-                <a:effectLst/>
-              </a:rPr>
-            </a:br>
-            <a:r>
-              <a:rPr lang="en-US" sz="2000" b="0" i="0" u="none" strike="noStrike" dirty="0">
-                <a:solidFill>
-                  <a:srgbClr val="FF00FF"/>
-                </a:solidFill>
-                <a:effectLst/>
-                <a:latin typeface="Arial" panose="020B0604020202020204" pitchFamily="34" charset="0"/>
-              </a:rPr>
-              <a:t>What is the output?</a:t>
-            </a:r>
-            <a:endParaRPr lang="en-US" sz="2000" b="0" dirty="0">
-              <a:effectLst/>
-            </a:endParaRPr>
-          </a:p>
-          <a:p>
-            <a:pPr rtl="0">
-              <a:spcBef>
-                <a:spcPts val="0"/>
-              </a:spcBef>
-              <a:spcAft>
-                <a:spcPts val="0"/>
-              </a:spcAft>
-            </a:pPr>
-            <a:br>
-              <a:rPr lang="en-US" sz="2000" b="0" dirty="0">
-                <a:effectLst/>
-              </a:rPr>
-            </a:br>
-            <a:r>
-              <a:rPr lang="en-US" sz="2000" b="0" i="0" u="none" strike="noStrike" dirty="0">
-                <a:solidFill>
-                  <a:srgbClr val="274E13"/>
-                </a:solidFill>
-                <a:effectLst/>
-                <a:latin typeface="Arial" panose="020B0604020202020204" pitchFamily="34" charset="0"/>
-              </a:rPr>
-              <a:t>What outcome are you predicting/estimating/changing?</a:t>
-            </a:r>
-            <a:endParaRPr lang="en-US" sz="2000" b="0" dirty="0">
-              <a:effectLst/>
-            </a:endParaRPr>
-          </a:p>
-          <a:p>
-            <a:pPr rtl="0">
-              <a:spcBef>
-                <a:spcPts val="0"/>
-              </a:spcBef>
-              <a:spcAft>
-                <a:spcPts val="0"/>
-              </a:spcAft>
-            </a:pPr>
-            <a:br>
-              <a:rPr lang="en-US" sz="2000" b="0" dirty="0">
-                <a:effectLst/>
-              </a:rPr>
-            </a:br>
-            <a:r>
-              <a:rPr lang="en-US" sz="2000" b="0" i="0" u="none" strike="noStrike" dirty="0">
-                <a:solidFill>
-                  <a:srgbClr val="B45F06"/>
-                </a:solidFill>
-                <a:effectLst/>
-                <a:latin typeface="Arial" panose="020B0604020202020204" pitchFamily="34" charset="0"/>
-              </a:rPr>
-              <a:t>For what purpose?</a:t>
-            </a:r>
-            <a:endParaRPr lang="en-US" sz="2000" b="0" dirty="0">
-              <a:effectLst/>
-            </a:endParaRPr>
-          </a:p>
-          <a:p>
-            <a:br>
-              <a:rPr lang="en-US" dirty="0"/>
-            </a:br>
-            <a:endParaRPr lang="en-US" dirty="0"/>
-          </a:p>
-        </p:txBody>
-      </p:sp>
-      <p:sp>
-        <p:nvSpPr>
-          <p:cNvPr id="14" name="TextBox 13">
-            <a:extLst>
-              <a:ext uri="{FF2B5EF4-FFF2-40B4-BE49-F238E27FC236}">
-                <a16:creationId xmlns:a16="http://schemas.microsoft.com/office/drawing/2014/main" id="{4E220471-6DE3-15C3-47EA-D5F277E4C9DD}"/>
-              </a:ext>
-            </a:extLst>
-          </p:cNvPr>
-          <p:cNvSpPr txBox="1"/>
-          <p:nvPr/>
-        </p:nvSpPr>
-        <p:spPr>
-          <a:xfrm>
-            <a:off x="3673012" y="1607442"/>
-            <a:ext cx="8101172" cy="4052391"/>
-          </a:xfrm>
-          <a:prstGeom prst="rect">
-            <a:avLst/>
-          </a:prstGeom>
-          <a:noFill/>
-        </p:spPr>
-        <p:txBody>
-          <a:bodyPr wrap="square">
-            <a:spAutoFit/>
-          </a:bodyPr>
-          <a:lstStyle/>
-          <a:p>
-            <a:pPr rtl="0">
-              <a:lnSpc>
-                <a:spcPct val="150000"/>
-              </a:lnSpc>
-              <a:spcBef>
-                <a:spcPts val="0"/>
-              </a:spcBef>
-              <a:spcAft>
-                <a:spcPts val="1600"/>
-              </a:spcAft>
-            </a:pPr>
-            <a:r>
-              <a:rPr lang="en-US" sz="2400" b="0" i="0" u="none" strike="noStrike" dirty="0">
-                <a:solidFill>
-                  <a:srgbClr val="FF0000"/>
-                </a:solidFill>
-                <a:effectLst/>
-                <a:latin typeface="Arial" panose="020B0604020202020204" pitchFamily="34" charset="0"/>
-              </a:rPr>
-              <a:t>On the first day of every semester</a:t>
-            </a:r>
-            <a:r>
-              <a:rPr lang="en-US" sz="2400" b="0" i="0" u="none" strike="noStrike" dirty="0">
-                <a:solidFill>
-                  <a:srgbClr val="595959"/>
-                </a:solidFill>
-                <a:effectLst/>
-                <a:latin typeface="Arial" panose="020B0604020202020204" pitchFamily="34" charset="0"/>
-              </a:rPr>
-              <a:t>, for </a:t>
-            </a:r>
-            <a:r>
-              <a:rPr lang="en-US" sz="2400" b="0" i="0" u="none" strike="noStrike" dirty="0">
-                <a:solidFill>
-                  <a:srgbClr val="0000FF"/>
-                </a:solidFill>
-                <a:effectLst/>
-                <a:latin typeface="Arial" panose="020B0604020202020204" pitchFamily="34" charset="0"/>
-              </a:rPr>
-              <a:t>all the students who are currently enrolled in an undergraduate degree program</a:t>
-            </a:r>
-            <a:r>
-              <a:rPr lang="en-US" sz="2400" b="0" i="0" u="none" strike="noStrike" dirty="0">
-                <a:solidFill>
-                  <a:srgbClr val="595959"/>
-                </a:solidFill>
-                <a:effectLst/>
-                <a:latin typeface="Arial" panose="020B0604020202020204" pitchFamily="34" charset="0"/>
-              </a:rPr>
-              <a:t>, can we identify the </a:t>
-            </a:r>
-            <a:r>
-              <a:rPr lang="en-US" sz="2400" dirty="0">
-                <a:solidFill>
-                  <a:srgbClr val="FF00FF"/>
-                </a:solidFill>
-                <a:latin typeface="Arial" panose="020B0604020202020204" pitchFamily="34" charset="0"/>
-              </a:rPr>
-              <a:t>1</a:t>
-            </a:r>
-            <a:r>
-              <a:rPr lang="en-US" sz="2400" b="0" i="0" u="none" strike="noStrike" dirty="0">
-                <a:solidFill>
-                  <a:srgbClr val="FF00FF"/>
-                </a:solidFill>
-                <a:effectLst/>
-                <a:latin typeface="Arial" panose="020B0604020202020204" pitchFamily="34" charset="0"/>
-              </a:rPr>
-              <a:t>00 highest risk students</a:t>
-            </a:r>
-            <a:r>
-              <a:rPr lang="en-US" sz="2400" b="0" i="0" u="none" strike="noStrike" dirty="0">
-                <a:solidFill>
-                  <a:srgbClr val="595959"/>
-                </a:solidFill>
-                <a:effectLst/>
-                <a:latin typeface="Arial" panose="020B0604020202020204" pitchFamily="34" charset="0"/>
-              </a:rPr>
-              <a:t> who are </a:t>
-            </a:r>
-            <a:r>
-              <a:rPr lang="en-US" sz="2400" b="0" i="0" u="none" strike="noStrike" dirty="0">
-                <a:solidFill>
-                  <a:srgbClr val="38761D"/>
-                </a:solidFill>
-                <a:effectLst/>
-                <a:latin typeface="Arial" panose="020B0604020202020204" pitchFamily="34" charset="0"/>
-              </a:rPr>
-              <a:t>likely to </a:t>
-            </a:r>
-            <a:r>
-              <a:rPr lang="en-US" sz="2400" dirty="0">
-                <a:solidFill>
-                  <a:srgbClr val="38761D"/>
-                </a:solidFill>
-                <a:latin typeface="Arial" panose="020B0604020202020204" pitchFamily="34" charset="0"/>
-              </a:rPr>
-              <a:t>not graduate college within 5 years of their college start </a:t>
-            </a:r>
-            <a:r>
-              <a:rPr lang="en-US" sz="2400" b="0" i="0" u="none" strike="noStrike" dirty="0">
-                <a:solidFill>
-                  <a:srgbClr val="B45F06"/>
-                </a:solidFill>
-                <a:effectLst/>
-                <a:latin typeface="Arial" panose="020B0604020202020204" pitchFamily="34" charset="0"/>
-              </a:rPr>
-              <a:t>to prioritize for proactive academic or other interventions</a:t>
-            </a:r>
-            <a:r>
-              <a:rPr lang="en-US" sz="2400" b="0" i="0" u="none" strike="noStrike" dirty="0">
-                <a:solidFill>
-                  <a:srgbClr val="595959"/>
-                </a:solidFill>
-                <a:effectLst/>
-                <a:latin typeface="Arial" panose="020B0604020202020204" pitchFamily="34" charset="0"/>
-              </a:rPr>
-              <a:t>?</a:t>
-            </a:r>
-            <a:endParaRPr lang="en-US" sz="2400" b="0" dirty="0">
-              <a:effectLst/>
-            </a:endParaRPr>
-          </a:p>
-          <a:p>
-            <a:br>
-              <a:rPr lang="en-US" dirty="0"/>
-            </a:br>
-            <a:endParaRPr lang="en-US" dirty="0"/>
+              <a:t>Use cases</a:t>
+            </a:r>
           </a:p>
         </p:txBody>
       </p:sp>
     </p:spTree>
     <p:extLst>
       <p:ext uri="{BB962C8B-B14F-4D97-AF65-F5344CB8AC3E}">
-        <p14:creationId xmlns:p14="http://schemas.microsoft.com/office/powerpoint/2010/main" val="2025399898"/>
+        <p14:creationId xmlns:p14="http://schemas.microsoft.com/office/powerpoint/2010/main" val="2370902423"/>
       </p:ext>
     </p:extLst>
   </p:cSld>
@@ -14953,7 +15861,7 @@
           <a:p>
             <a:r>
               <a:rPr lang="en-US" dirty="0"/>
-              <a:t>What type of analysis are you doing?</a:t>
+              <a:t>What type of analysis are we doing?</a:t>
             </a:r>
             <a:br>
               <a:rPr lang="en-US" dirty="0"/>
@@ -15001,6 +15909,57 @@
     <a:masterClrMapping/>
   </p:clrMapOvr>
 </p:sld>
+</file>
+
+<file path=ppt/tags/tag1.xml><?xml version="1.0" encoding="utf-8"?>
+<p:tagLst xmlns:a="http://schemas.openxmlformats.org/drawingml/2006/main" xmlns:r="http://schemas.openxmlformats.org/officeDocument/2006/relationships" xmlns:p="http://schemas.openxmlformats.org/presentationml/2006/main">
+  <p:tag name="SLIDO_APP_VERSION" val="1.5.0.0"/>
+  <p:tag name="SLIDO_PRESENTATION_ID" val="caabcf39-13dc-4be0-b149-ab96eb521f47"/>
+  <p:tag name="SLIDO_EVENT_UUID" val="0161bee7-9b52-48ab-bd01-308fc07c8a33"/>
+  <p:tag name="SLIDO_EVENT_SECTION_UUID" val="53f7b2fd-9b37-4ce9-89ff-a9a7d9b782ad"/>
+</p:tagLst>
+</file>
+
+<file path=ppt/tags/tag2.xml><?xml version="1.0" encoding="utf-8"?>
+<p:tagLst xmlns:a="http://schemas.openxmlformats.org/drawingml/2006/main" xmlns:r="http://schemas.openxmlformats.org/officeDocument/2006/relationships" xmlns:p="http://schemas.openxmlformats.org/presentationml/2006/main">
+  <p:tag name="SLIDO_TYPE" val="SlidoPoll"/>
+  <p:tag name="SLIDO_POLL_UUID" val="59502b80-459f-417c-9ae7-7264e2710400"/>
+  <p:tag name="SLIDO_TIMELINE" val="W3sic2hvd1Jlc3VsdHMiOmZhbHNlLCJwb2xsUXVlc3Rpb25VdWlkIjoiZjBiMjY3NWItOTE1MC00ZDc1LTkzMTctNzQ5ODllMTY0YzkzIn0seyJzaG93UmVzdWx0cyI6dHJ1ZSwicG9sbFF1ZXN0aW9uVXVpZCI6ImYwYjI2NzViLTkxNTAtNGQ3NS05MzE3LTc0OTg5ZTE2NGM5MyJ9XQ=="/>
+</p:tagLst>
+</file>
+
+<file path=ppt/tags/tag3.xml><?xml version="1.0" encoding="utf-8"?>
+<p:tagLst xmlns:a="http://schemas.openxmlformats.org/drawingml/2006/main" xmlns:r="http://schemas.openxmlformats.org/officeDocument/2006/relationships" xmlns:p="http://schemas.openxmlformats.org/presentationml/2006/main">
+  <p:tag name="SLIDO_ELEMENT" val="interaction_image"/>
+  <p:tag name="INTERACTION_TYPE" val="OpenText"/>
+</p:tagLst>
+</file>
+
+<file path=ppt/tags/tag4.xml><?xml version="1.0" encoding="utf-8"?>
+<p:tagLst xmlns:a="http://schemas.openxmlformats.org/drawingml/2006/main" xmlns:r="http://schemas.openxmlformats.org/officeDocument/2006/relationships" xmlns:p="http://schemas.openxmlformats.org/presentationml/2006/main">
+  <p:tag name="SLIDO_ELEMENT" val="title"/>
+</p:tagLst>
+</file>
+
+<file path=ppt/tags/tag5.xml><?xml version="1.0" encoding="utf-8"?>
+<p:tagLst xmlns:a="http://schemas.openxmlformats.org/drawingml/2006/main" xmlns:r="http://schemas.openxmlformats.org/officeDocument/2006/relationships" xmlns:p="http://schemas.openxmlformats.org/presentationml/2006/main">
+  <p:tag name="SLIDO_TYPE" val="SlidoPoll"/>
+  <p:tag name="SLIDO_POLL_UUID" val="6c5a72f9-54d3-4dd2-ae37-6892c8d4fce8"/>
+  <p:tag name="SLIDO_TIMELINE" val="W3sic2hvd1Jlc3VsdHMiOmZhbHNlLCJwb2xsUXVlc3Rpb25VdWlkIjoiNTUzZWQ2NjMtZjVjNy00NWM4LWJkNTMtYmU1ZWY4YzQ2ZjE2In0seyJzaG93UmVzdWx0cyI6dHJ1ZSwicG9sbFF1ZXN0aW9uVXVpZCI6IjU1M2VkNjYzLWY1YzctNDVjOC1iZDUzLWJlNWVmOGM0NmYxNiJ9XQ=="/>
+</p:tagLst>
+</file>
+
+<file path=ppt/tags/tag6.xml><?xml version="1.0" encoding="utf-8"?>
+<p:tagLst xmlns:a="http://schemas.openxmlformats.org/drawingml/2006/main" xmlns:r="http://schemas.openxmlformats.org/officeDocument/2006/relationships" xmlns:p="http://schemas.openxmlformats.org/presentationml/2006/main">
+  <p:tag name="SLIDO_ELEMENT" val="interaction_image"/>
+  <p:tag name="INTERACTION_TYPE" val="OpenText"/>
+</p:tagLst>
+</file>
+
+<file path=ppt/tags/tag7.xml><?xml version="1.0" encoding="utf-8"?>
+<p:tagLst xmlns:a="http://schemas.openxmlformats.org/drawingml/2006/main" xmlns:r="http://schemas.openxmlformats.org/officeDocument/2006/relationships" xmlns:p="http://schemas.openxmlformats.org/presentationml/2006/main">
+  <p:tag name="SLIDO_ELEMENT" val="title"/>
+</p:tagLst>
 </file>
 
 <file path=ppt/theme/theme1.xml><?xml version="1.0" encoding="utf-8"?>

--- a/Lectures/Lecture4-Formulation.pptx
+++ b/Lectures/Lecture4-Formulation.pptx
@@ -15101,15 +15101,7 @@
             </a:r>
             <a:r>
               <a:rPr lang="en-US" b="1" dirty="0"/>
-              <a:t> and data (see canvas </a:t>
-            </a:r>
-            <a:r>
-              <a:rPr lang="en-US" b="1"/>
-              <a:t>assignment for </a:t>
-            </a:r>
-            <a:r>
-              <a:rPr lang="en-US" b="1" dirty="0"/>
-              <a:t>us to confirm)</a:t>
+              <a:t> and data (see canvas assignment for us to confirm)</a:t>
             </a:r>
           </a:p>
           <a:p>

--- a/Lectures/Lecture4-Formulation.pptx
+++ b/Lectures/Lecture4-Formulation.pptx
@@ -5,7 +5,7 @@
     <p:sldMasterId id="2147483648" r:id="rId1"/>
   </p:sldMasterIdLst>
   <p:notesMasterIdLst>
-    <p:notesMasterId r:id="rId32"/>
+    <p:notesMasterId r:id="rId37"/>
   </p:notesMasterIdLst>
   <p:sldIdLst>
     <p:sldId id="256" r:id="rId2"/>
@@ -26,23 +26,28 @@
     <p:sldId id="438" r:id="rId17"/>
     <p:sldId id="440" r:id="rId18"/>
     <p:sldId id="446" r:id="rId19"/>
-    <p:sldId id="447" r:id="rId20"/>
-    <p:sldId id="261" r:id="rId21"/>
-    <p:sldId id="269" r:id="rId22"/>
-    <p:sldId id="277" r:id="rId23"/>
-    <p:sldId id="285" r:id="rId24"/>
-    <p:sldId id="427" r:id="rId25"/>
-    <p:sldId id="432" r:id="rId26"/>
-    <p:sldId id="442" r:id="rId27"/>
-    <p:sldId id="448" r:id="rId28"/>
-    <p:sldId id="431" r:id="rId29"/>
-    <p:sldId id="433" r:id="rId30"/>
-    <p:sldId id="437" r:id="rId31"/>
+    <p:sldId id="449" r:id="rId20"/>
+    <p:sldId id="450" r:id="rId21"/>
+    <p:sldId id="451" r:id="rId22"/>
+    <p:sldId id="454" r:id="rId23"/>
+    <p:sldId id="452" r:id="rId24"/>
+    <p:sldId id="447" r:id="rId25"/>
+    <p:sldId id="261" r:id="rId26"/>
+    <p:sldId id="269" r:id="rId27"/>
+    <p:sldId id="277" r:id="rId28"/>
+    <p:sldId id="285" r:id="rId29"/>
+    <p:sldId id="427" r:id="rId30"/>
+    <p:sldId id="432" r:id="rId31"/>
+    <p:sldId id="442" r:id="rId32"/>
+    <p:sldId id="448" r:id="rId33"/>
+    <p:sldId id="431" r:id="rId34"/>
+    <p:sldId id="433" r:id="rId35"/>
+    <p:sldId id="437" r:id="rId36"/>
   </p:sldIdLst>
   <p:sldSz cx="12192000" cy="6858000"/>
   <p:notesSz cx="6858000" cy="9144000"/>
   <p:custDataLst>
-    <p:tags r:id="rId33"/>
+    <p:tags r:id="rId38"/>
   </p:custDataLst>
   <p:defaultTextStyle>
     <a:defPPr marR="0" lvl="0" algn="l" rtl="0">
@@ -296,6 +301,11 @@
             <p14:sldId id="438"/>
             <p14:sldId id="440"/>
             <p14:sldId id="446"/>
+            <p14:sldId id="449"/>
+            <p14:sldId id="450"/>
+            <p14:sldId id="451"/>
+            <p14:sldId id="454"/>
+            <p14:sldId id="452"/>
             <p14:sldId id="447"/>
             <p14:sldId id="261"/>
             <p14:sldId id="269"/>
@@ -320,7 +330,7 @@
       <p15:sldGuideLst xmlns:p15="http://schemas.microsoft.com/office/powerpoint/2012/main"/>
     </p:ext>
     <p:ext uri="http://customooxmlschemas.google.com/">
-      <go:slidesCustomData xmlns="" xmlns:mc="http://schemas.openxmlformats.org/markup-compatibility/2006" xmlns:mv="urn:schemas-microsoft-com:mac:vml" xmlns:c="http://schemas.openxmlformats.org/drawingml/2006/chart" xmlns:dgm="http://schemas.openxmlformats.org/drawingml/2006/diagram" xmlns:o="urn:schemas-microsoft-com:office:office" xmlns:v="urn:schemas-microsoft-com:vml" xmlns:pvml="urn:schemas-microsoft-com:office:powerpoint" xmlns:com="http://schemas.openxmlformats.org/drawingml/2006/compatibility" xmlns:p14="http://schemas.microsoft.com/office/powerpoint/2010/main" xmlns:p15="http://schemas.microsoft.com/office/powerpoint/2012/main" xmlns:go="http://customooxmlschemas.google.com/" r:id="rId34" roundtripDataSignature="AMtx7mjFyVUGRZWio+dc9dxzYsimUxNJbg=="/>
+      <go:slidesCustomData xmlns="" xmlns:mc="http://schemas.openxmlformats.org/markup-compatibility/2006" xmlns:mv="urn:schemas-microsoft-com:mac:vml" xmlns:c="http://schemas.openxmlformats.org/drawingml/2006/chart" xmlns:dgm="http://schemas.openxmlformats.org/drawingml/2006/diagram" xmlns:o="urn:schemas-microsoft-com:office:office" xmlns:v="urn:schemas-microsoft-com:vml" xmlns:pvml="urn:schemas-microsoft-com:office:powerpoint" xmlns:com="http://schemas.openxmlformats.org/drawingml/2006/compatibility" xmlns:p14="http://schemas.microsoft.com/office/powerpoint/2010/main" xmlns:p15="http://schemas.microsoft.com/office/powerpoint/2012/main" xmlns:go="http://customooxmlschemas.google.com/" r:id="rId39" roundtripDataSignature="AMtx7mjFyVUGRZWio+dc9dxzYsimUxNJbg=="/>
     </p:ext>
   </p:extLst>
 </p:presentation>
@@ -11759,7 +11769,7 @@
           <p:cNvPr id="2" name="Title 1">
             <a:extLst>
               <a:ext uri="{FF2B5EF4-FFF2-40B4-BE49-F238E27FC236}">
-                <a16:creationId xmlns:a16="http://schemas.microsoft.com/office/drawing/2014/main" id="{D301BA0D-10F8-92D2-C9D3-52205F55F155}"/>
+                <a16:creationId xmlns:a16="http://schemas.microsoft.com/office/drawing/2014/main" id="{77FE1A81-EB8A-6601-43BE-C895391C3E49}"/>
               </a:ext>
             </a:extLst>
           </p:cNvPr>
@@ -11767,13 +11777,13 @@
             <a:spLocks noGrp="1"/>
           </p:cNvSpPr>
           <p:nvPr>
-            <p:ph type="title"/>
+            <p:ph type="title" idx="4294967295"/>
           </p:nvPr>
         </p:nvSpPr>
         <p:spPr>
           <a:xfrm>
-            <a:off x="254544" y="402968"/>
-            <a:ext cx="12061442" cy="763500"/>
+            <a:off x="261259" y="3955145"/>
+            <a:ext cx="11740242" cy="2694214"/>
           </a:xfrm>
         </p:spPr>
         <p:txBody>
@@ -11781,41 +11791,95 @@
           <a:lstStyle/>
           <a:p>
             <a:r>
-              <a:rPr lang="en-US" sz="3200" dirty="0"/>
-              <a:t>Additional examples from real projects (not covered in class)</a:t>
+              <a:rPr lang="en-US" sz="3600" dirty="0">
+                <a:solidFill>
+                  <a:schemeClr val="bg2"/>
+                </a:solidFill>
+              </a:rPr>
+              <a:t>Why is this type of formulation necessary?</a:t>
+            </a:r>
+            <a:br>
+              <a:rPr lang="en-US" sz="3600" dirty="0">
+                <a:solidFill>
+                  <a:schemeClr val="bg2"/>
+                </a:solidFill>
+              </a:rPr>
+            </a:br>
+            <a:br>
+              <a:rPr lang="en-US" sz="3600" dirty="0">
+                <a:solidFill>
+                  <a:schemeClr val="bg2"/>
+                </a:solidFill>
+              </a:rPr>
+            </a:br>
+            <a:r>
+              <a:rPr lang="en-US" sz="3600" dirty="0">
+                <a:solidFill>
+                  <a:schemeClr val="bg2"/>
+                </a:solidFill>
+              </a:rPr>
+              <a:t>How does it help us with ML design decision?</a:t>
+            </a:r>
+            <a:br>
+              <a:rPr lang="en-US" sz="3600" dirty="0">
+                <a:solidFill>
+                  <a:schemeClr val="bg2"/>
+                </a:solidFill>
+              </a:rPr>
+            </a:br>
+            <a:br>
+              <a:rPr lang="en-US" sz="3600" dirty="0">
+                <a:solidFill>
+                  <a:schemeClr val="bg2"/>
+                </a:solidFill>
+              </a:rPr>
+            </a:br>
+            <a:r>
+              <a:rPr lang="en-US" sz="3600" dirty="0">
+                <a:solidFill>
+                  <a:schemeClr val="bg2"/>
+                </a:solidFill>
+              </a:rPr>
+              <a:t>What are the implications of each of these decisions?</a:t>
             </a:r>
           </a:p>
         </p:txBody>
       </p:sp>
-      <p:sp>
-        <p:nvSpPr>
-          <p:cNvPr id="3" name="Text Placeholder 2">
+      <p:pic>
+        <p:nvPicPr>
+          <p:cNvPr id="6" name="Picture 5">
             <a:extLst>
               <a:ext uri="{FF2B5EF4-FFF2-40B4-BE49-F238E27FC236}">
-                <a16:creationId xmlns:a16="http://schemas.microsoft.com/office/drawing/2014/main" id="{6929B6C7-5630-DFAD-982A-CD554DBAC0F5}"/>
+                <a16:creationId xmlns:a16="http://schemas.microsoft.com/office/drawing/2014/main" id="{AD9870D0-00A5-80FB-8C32-68B905F4AD83}"/>
               </a:ext>
             </a:extLst>
           </p:cNvPr>
-          <p:cNvSpPr>
-            <a:spLocks noGrp="1"/>
-          </p:cNvSpPr>
-          <p:nvPr>
-            <p:ph type="body" idx="1"/>
-          </p:nvPr>
-        </p:nvSpPr>
-        <p:spPr/>
-        <p:txBody>
-          <a:bodyPr/>
-          <a:lstStyle/>
-          <a:p>
-            <a:endParaRPr lang="en-US"/>
-          </a:p>
-        </p:txBody>
-      </p:sp>
+          <p:cNvPicPr>
+            <a:picLocks noChangeAspect="1"/>
+          </p:cNvPicPr>
+          <p:nvPr/>
+        </p:nvPicPr>
+        <p:blipFill>
+          <a:blip r:embed="rId2"/>
+          <a:srcRect b="3010"/>
+          <a:stretch>
+            <a:fillRect/>
+          </a:stretch>
+        </p:blipFill>
+        <p:spPr>
+          <a:xfrm>
+            <a:off x="1729867" y="81641"/>
+            <a:ext cx="8732265" cy="3862250"/>
+          </a:xfrm>
+          <a:prstGeom prst="rect">
+            <a:avLst/>
+          </a:prstGeom>
+        </p:spPr>
+      </p:pic>
     </p:spTree>
     <p:extLst>
       <p:ext uri="{BB962C8B-B14F-4D97-AF65-F5344CB8AC3E}">
-        <p14:creationId xmlns:p14="http://schemas.microsoft.com/office/powerpoint/2010/main" val="1039242333"/>
+        <p14:creationId xmlns:p14="http://schemas.microsoft.com/office/powerpoint/2010/main" val="1270719376"/>
       </p:ext>
     </p:extLst>
   </p:cSld>
@@ -11976,6 +12040,925 @@
   <p:cSld>
     <p:spTree>
       <p:nvGrpSpPr>
+        <p:cNvPr id="1" name="">
+          <a:extLst>
+            <a:ext uri="{FF2B5EF4-FFF2-40B4-BE49-F238E27FC236}">
+              <a16:creationId xmlns:a16="http://schemas.microsoft.com/office/drawing/2014/main" id="{00ED84BF-5D54-2B00-D950-E194989E7C9D}"/>
+            </a:ext>
+          </a:extLst>
+        </p:cNvPr>
+        <p:cNvGrpSpPr/>
+        <p:nvPr/>
+      </p:nvGrpSpPr>
+      <p:grpSpPr>
+        <a:xfrm>
+          <a:off x="0" y="0"/>
+          <a:ext cx="0" cy="0"/>
+          <a:chOff x="0" y="0"/>
+          <a:chExt cx="0" cy="0"/>
+        </a:xfrm>
+      </p:grpSpPr>
+      <p:pic>
+        <p:nvPicPr>
+          <p:cNvPr id="6" name="Picture 5">
+            <a:extLst>
+              <a:ext uri="{FF2B5EF4-FFF2-40B4-BE49-F238E27FC236}">
+                <a16:creationId xmlns:a16="http://schemas.microsoft.com/office/drawing/2014/main" id="{5E1EE72E-1ABD-4D56-5FE9-7E85F6ACAFEF}"/>
+              </a:ext>
+            </a:extLst>
+          </p:cNvPr>
+          <p:cNvPicPr>
+            <a:picLocks noChangeAspect="1"/>
+          </p:cNvPicPr>
+          <p:nvPr/>
+        </p:nvPicPr>
+        <p:blipFill>
+          <a:blip r:embed="rId2"/>
+          <a:srcRect b="3010"/>
+          <a:stretch>
+            <a:fillRect/>
+          </a:stretch>
+        </p:blipFill>
+        <p:spPr>
+          <a:xfrm>
+            <a:off x="205867" y="0"/>
+            <a:ext cx="8732265" cy="3862250"/>
+          </a:xfrm>
+          <a:prstGeom prst="rect">
+            <a:avLst/>
+          </a:prstGeom>
+        </p:spPr>
+      </p:pic>
+      <p:sp>
+        <p:nvSpPr>
+          <p:cNvPr id="4" name="TextBox 3">
+            <a:extLst>
+              <a:ext uri="{FF2B5EF4-FFF2-40B4-BE49-F238E27FC236}">
+                <a16:creationId xmlns:a16="http://schemas.microsoft.com/office/drawing/2014/main" id="{6863DC1F-C0E8-2E23-8834-FF8BC80B7402}"/>
+              </a:ext>
+            </a:extLst>
+          </p:cNvPr>
+          <p:cNvSpPr txBox="1"/>
+          <p:nvPr/>
+        </p:nvSpPr>
+        <p:spPr>
+          <a:xfrm>
+            <a:off x="2807969" y="2292590"/>
+            <a:ext cx="8938133" cy="1077218"/>
+          </a:xfrm>
+          <a:prstGeom prst="rect">
+            <a:avLst/>
+          </a:prstGeom>
+          <a:noFill/>
+        </p:spPr>
+        <p:txBody>
+          <a:bodyPr wrap="square">
+            <a:spAutoFit/>
+          </a:bodyPr>
+          <a:lstStyle/>
+          <a:p>
+            <a:br>
+              <a:rPr lang="en-US" sz="3200" b="0" dirty="0">
+                <a:effectLst/>
+              </a:rPr>
+            </a:br>
+            <a:r>
+              <a:rPr lang="en-US" sz="3200" dirty="0">
+                <a:solidFill>
+                  <a:srgbClr val="0000FF"/>
+                </a:solidFill>
+                <a:latin typeface="Arial" panose="020B0604020202020204" pitchFamily="34" charset="0"/>
+              </a:rPr>
+              <a:t>Who/what is included in the cohort?</a:t>
+            </a:r>
+            <a:endParaRPr lang="en-US" sz="3200" dirty="0"/>
+          </a:p>
+        </p:txBody>
+      </p:sp>
+      <p:sp>
+        <p:nvSpPr>
+          <p:cNvPr id="5" name="Down Arrow 4">
+            <a:extLst>
+              <a:ext uri="{FF2B5EF4-FFF2-40B4-BE49-F238E27FC236}">
+                <a16:creationId xmlns:a16="http://schemas.microsoft.com/office/drawing/2014/main" id="{510773F3-A79D-9BB4-9387-CC8FB9F5C50A}"/>
+              </a:ext>
+            </a:extLst>
+          </p:cNvPr>
+          <p:cNvSpPr/>
+          <p:nvPr/>
+        </p:nvSpPr>
+        <p:spPr>
+          <a:xfrm>
+            <a:off x="6206490" y="3703320"/>
+            <a:ext cx="708660" cy="994410"/>
+          </a:xfrm>
+          <a:prstGeom prst="downArrow">
+            <a:avLst/>
+          </a:prstGeom>
+        </p:spPr>
+        <p:style>
+          <a:lnRef idx="2">
+            <a:schemeClr val="accent1">
+              <a:shade val="15000"/>
+            </a:schemeClr>
+          </a:lnRef>
+          <a:fillRef idx="1">
+            <a:schemeClr val="accent1"/>
+          </a:fillRef>
+          <a:effectRef idx="0">
+            <a:schemeClr val="accent1"/>
+          </a:effectRef>
+          <a:fontRef idx="minor">
+            <a:schemeClr val="lt1"/>
+          </a:fontRef>
+        </p:style>
+        <p:txBody>
+          <a:bodyPr rtlCol="0" anchor="ctr"/>
+          <a:lstStyle/>
+          <a:p>
+            <a:pPr algn="ctr"/>
+            <a:endParaRPr lang="en-US"/>
+          </a:p>
+        </p:txBody>
+      </p:sp>
+      <p:sp>
+        <p:nvSpPr>
+          <p:cNvPr id="8" name="TextBox 7">
+            <a:extLst>
+              <a:ext uri="{FF2B5EF4-FFF2-40B4-BE49-F238E27FC236}">
+                <a16:creationId xmlns:a16="http://schemas.microsoft.com/office/drawing/2014/main" id="{9789FCA8-E0AD-31A1-6C8F-7970830CC638}"/>
+              </a:ext>
+            </a:extLst>
+          </p:cNvPr>
+          <p:cNvSpPr txBox="1"/>
+          <p:nvPr/>
+        </p:nvSpPr>
+        <p:spPr>
+          <a:xfrm>
+            <a:off x="1027093" y="5031242"/>
+            <a:ext cx="11067453" cy="461665"/>
+          </a:xfrm>
+          <a:prstGeom prst="rect">
+            <a:avLst/>
+          </a:prstGeom>
+          <a:noFill/>
+        </p:spPr>
+        <p:txBody>
+          <a:bodyPr wrap="none" rtlCol="0">
+            <a:spAutoFit/>
+          </a:bodyPr>
+          <a:lstStyle/>
+          <a:p>
+            <a:r>
+              <a:rPr lang="en-US" sz="2400" dirty="0"/>
+              <a:t>The rows in our “test” matrix – which people/</a:t>
+            </a:r>
+            <a:r>
+              <a:rPr lang="en-US" sz="2400" dirty="0" err="1"/>
+              <a:t>entites</a:t>
+            </a:r>
+            <a:r>
+              <a:rPr lang="en-US" sz="2400" dirty="0"/>
+              <a:t> are selected in each test set</a:t>
+            </a:r>
+          </a:p>
+        </p:txBody>
+      </p:sp>
+      <p:sp>
+        <p:nvSpPr>
+          <p:cNvPr id="9" name="TextBox 8">
+            <a:extLst>
+              <a:ext uri="{FF2B5EF4-FFF2-40B4-BE49-F238E27FC236}">
+                <a16:creationId xmlns:a16="http://schemas.microsoft.com/office/drawing/2014/main" id="{DAAD777C-343D-55DF-CFED-F8E82822FA95}"/>
+              </a:ext>
+            </a:extLst>
+          </p:cNvPr>
+          <p:cNvSpPr txBox="1"/>
+          <p:nvPr/>
+        </p:nvSpPr>
+        <p:spPr>
+          <a:xfrm>
+            <a:off x="1027093" y="5693175"/>
+            <a:ext cx="5012911" cy="461665"/>
+          </a:xfrm>
+          <a:prstGeom prst="rect">
+            <a:avLst/>
+          </a:prstGeom>
+          <a:noFill/>
+        </p:spPr>
+        <p:txBody>
+          <a:bodyPr wrap="none" rtlCol="0">
+            <a:spAutoFit/>
+          </a:bodyPr>
+          <a:lstStyle/>
+          <a:p>
+            <a:r>
+              <a:rPr lang="en-US" sz="2400" dirty="0"/>
+              <a:t>And possibly also in the training set</a:t>
+            </a:r>
+          </a:p>
+        </p:txBody>
+      </p:sp>
+    </p:spTree>
+    <p:extLst>
+      <p:ext uri="{BB962C8B-B14F-4D97-AF65-F5344CB8AC3E}">
+        <p14:creationId xmlns:p14="http://schemas.microsoft.com/office/powerpoint/2010/main" val="362699873"/>
+      </p:ext>
+    </p:extLst>
+  </p:cSld>
+  <p:clrMapOvr>
+    <a:masterClrMapping/>
+  </p:clrMapOvr>
+</p:sld>
+</file>
+
+<file path=ppt/slides/slide21.xml><?xml version="1.0" encoding="utf-8"?>
+<p:sld xmlns:a="http://schemas.openxmlformats.org/drawingml/2006/main" xmlns:r="http://schemas.openxmlformats.org/officeDocument/2006/relationships" xmlns:p="http://schemas.openxmlformats.org/presentationml/2006/main">
+  <p:cSld>
+    <p:spTree>
+      <p:nvGrpSpPr>
+        <p:cNvPr id="1" name="">
+          <a:extLst>
+            <a:ext uri="{FF2B5EF4-FFF2-40B4-BE49-F238E27FC236}">
+              <a16:creationId xmlns:a16="http://schemas.microsoft.com/office/drawing/2014/main" id="{9A266860-0C83-18FF-145F-6BDC0788B14E}"/>
+            </a:ext>
+          </a:extLst>
+        </p:cNvPr>
+        <p:cNvGrpSpPr/>
+        <p:nvPr/>
+      </p:nvGrpSpPr>
+      <p:grpSpPr>
+        <a:xfrm>
+          <a:off x="0" y="0"/>
+          <a:ext cx="0" cy="0"/>
+          <a:chOff x="0" y="0"/>
+          <a:chExt cx="0" cy="0"/>
+        </a:xfrm>
+      </p:grpSpPr>
+      <p:pic>
+        <p:nvPicPr>
+          <p:cNvPr id="6" name="Picture 5">
+            <a:extLst>
+              <a:ext uri="{FF2B5EF4-FFF2-40B4-BE49-F238E27FC236}">
+                <a16:creationId xmlns:a16="http://schemas.microsoft.com/office/drawing/2014/main" id="{61BBEB4D-F8FB-F07F-702E-B4D26740B397}"/>
+              </a:ext>
+            </a:extLst>
+          </p:cNvPr>
+          <p:cNvPicPr>
+            <a:picLocks noChangeAspect="1"/>
+          </p:cNvPicPr>
+          <p:nvPr/>
+        </p:nvPicPr>
+        <p:blipFill>
+          <a:blip r:embed="rId2"/>
+          <a:srcRect b="3010"/>
+          <a:stretch>
+            <a:fillRect/>
+          </a:stretch>
+        </p:blipFill>
+        <p:spPr>
+          <a:xfrm>
+            <a:off x="205867" y="0"/>
+            <a:ext cx="8732265" cy="3862250"/>
+          </a:xfrm>
+          <a:prstGeom prst="rect">
+            <a:avLst/>
+          </a:prstGeom>
+        </p:spPr>
+      </p:pic>
+      <p:sp>
+        <p:nvSpPr>
+          <p:cNvPr id="4" name="TextBox 3">
+            <a:extLst>
+              <a:ext uri="{FF2B5EF4-FFF2-40B4-BE49-F238E27FC236}">
+                <a16:creationId xmlns:a16="http://schemas.microsoft.com/office/drawing/2014/main" id="{427615F7-3D39-C848-F362-AF20940319B9}"/>
+              </a:ext>
+            </a:extLst>
+          </p:cNvPr>
+          <p:cNvSpPr txBox="1"/>
+          <p:nvPr/>
+        </p:nvSpPr>
+        <p:spPr>
+          <a:xfrm>
+            <a:off x="3553035" y="2084610"/>
+            <a:ext cx="8938133" cy="1569660"/>
+          </a:xfrm>
+          <a:prstGeom prst="rect">
+            <a:avLst/>
+          </a:prstGeom>
+          <a:noFill/>
+        </p:spPr>
+        <p:txBody>
+          <a:bodyPr wrap="square">
+            <a:spAutoFit/>
+          </a:bodyPr>
+          <a:lstStyle/>
+          <a:p>
+            <a:pPr rtl="0">
+              <a:spcBef>
+                <a:spcPts val="0"/>
+              </a:spcBef>
+              <a:spcAft>
+                <a:spcPts val="0"/>
+              </a:spcAft>
+            </a:pPr>
+            <a:br>
+              <a:rPr lang="en-US" sz="3200" b="0" dirty="0">
+                <a:effectLst/>
+              </a:rPr>
+            </a:br>
+            <a:r>
+              <a:rPr lang="en-US" sz="3200" b="0" i="0" u="none" strike="noStrike" dirty="0">
+                <a:solidFill>
+                  <a:srgbClr val="FF0000"/>
+                </a:solidFill>
+                <a:effectLst/>
+                <a:latin typeface="Arial" panose="020B0604020202020204" pitchFamily="34" charset="0"/>
+              </a:rPr>
+              <a:t>How often and when is the recommendation/decision being made?</a:t>
+            </a:r>
+            <a:endParaRPr lang="en-US" sz="3200" b="0" dirty="0">
+              <a:effectLst/>
+            </a:endParaRPr>
+          </a:p>
+        </p:txBody>
+      </p:sp>
+      <p:sp>
+        <p:nvSpPr>
+          <p:cNvPr id="5" name="Down Arrow 4">
+            <a:extLst>
+              <a:ext uri="{FF2B5EF4-FFF2-40B4-BE49-F238E27FC236}">
+                <a16:creationId xmlns:a16="http://schemas.microsoft.com/office/drawing/2014/main" id="{FF6EA5DD-444D-BA55-0CC4-7E2218237C56}"/>
+              </a:ext>
+            </a:extLst>
+          </p:cNvPr>
+          <p:cNvSpPr/>
+          <p:nvPr/>
+        </p:nvSpPr>
+        <p:spPr>
+          <a:xfrm>
+            <a:off x="6206490" y="3550921"/>
+            <a:ext cx="708660" cy="994410"/>
+          </a:xfrm>
+          <a:prstGeom prst="downArrow">
+            <a:avLst/>
+          </a:prstGeom>
+        </p:spPr>
+        <p:style>
+          <a:lnRef idx="2">
+            <a:schemeClr val="accent1">
+              <a:shade val="15000"/>
+            </a:schemeClr>
+          </a:lnRef>
+          <a:fillRef idx="1">
+            <a:schemeClr val="accent1"/>
+          </a:fillRef>
+          <a:effectRef idx="0">
+            <a:schemeClr val="accent1"/>
+          </a:effectRef>
+          <a:fontRef idx="minor">
+            <a:schemeClr val="lt1"/>
+          </a:fontRef>
+        </p:style>
+        <p:txBody>
+          <a:bodyPr rtlCol="0" anchor="ctr"/>
+          <a:lstStyle/>
+          <a:p>
+            <a:pPr algn="ctr"/>
+            <a:endParaRPr lang="en-US"/>
+          </a:p>
+        </p:txBody>
+      </p:sp>
+      <p:sp>
+        <p:nvSpPr>
+          <p:cNvPr id="2" name="TextBox 1">
+            <a:extLst>
+              <a:ext uri="{FF2B5EF4-FFF2-40B4-BE49-F238E27FC236}">
+                <a16:creationId xmlns:a16="http://schemas.microsoft.com/office/drawing/2014/main" id="{E61056E9-EEE4-D290-D688-53FDCE56261B}"/>
+              </a:ext>
+            </a:extLst>
+          </p:cNvPr>
+          <p:cNvSpPr txBox="1"/>
+          <p:nvPr/>
+        </p:nvSpPr>
+        <p:spPr>
+          <a:xfrm>
+            <a:off x="205867" y="4511463"/>
+            <a:ext cx="11833733" cy="2308324"/>
+          </a:xfrm>
+          <a:prstGeom prst="rect">
+            <a:avLst/>
+          </a:prstGeom>
+          <a:noFill/>
+        </p:spPr>
+        <p:txBody>
+          <a:bodyPr wrap="square" rtlCol="0">
+            <a:spAutoFit/>
+          </a:bodyPr>
+          <a:lstStyle/>
+          <a:p>
+            <a:r>
+              <a:rPr lang="en-US" sz="2400" dirty="0"/>
+              <a:t>The timestamp of each row in our test matrix – the cohort defines the who/what, and this choice defines the when</a:t>
+            </a:r>
+          </a:p>
+          <a:p>
+            <a:endParaRPr lang="en-US" sz="2400" dirty="0"/>
+          </a:p>
+          <a:p>
+            <a:r>
+              <a:rPr lang="en-US" sz="2400" dirty="0"/>
+              <a:t>The timestamp boundary for the features that can be included in that row</a:t>
+            </a:r>
+          </a:p>
+          <a:p>
+            <a:endParaRPr lang="en-US" sz="2400" dirty="0"/>
+          </a:p>
+          <a:p>
+            <a:r>
+              <a:rPr lang="en-US" sz="2400" dirty="0"/>
+              <a:t>How the train-validation-test sets are constructed</a:t>
+            </a:r>
+          </a:p>
+        </p:txBody>
+      </p:sp>
+    </p:spTree>
+    <p:extLst>
+      <p:ext uri="{BB962C8B-B14F-4D97-AF65-F5344CB8AC3E}">
+        <p14:creationId xmlns:p14="http://schemas.microsoft.com/office/powerpoint/2010/main" val="3496956064"/>
+      </p:ext>
+    </p:extLst>
+  </p:cSld>
+  <p:clrMapOvr>
+    <a:masterClrMapping/>
+  </p:clrMapOvr>
+</p:sld>
+</file>
+
+<file path=ppt/slides/slide22.xml><?xml version="1.0" encoding="utf-8"?>
+<p:sld xmlns:a="http://schemas.openxmlformats.org/drawingml/2006/main" xmlns:r="http://schemas.openxmlformats.org/officeDocument/2006/relationships" xmlns:p="http://schemas.openxmlformats.org/presentationml/2006/main">
+  <p:cSld>
+    <p:spTree>
+      <p:nvGrpSpPr>
+        <p:cNvPr id="1" name="">
+          <a:extLst>
+            <a:ext uri="{FF2B5EF4-FFF2-40B4-BE49-F238E27FC236}">
+              <a16:creationId xmlns:a16="http://schemas.microsoft.com/office/drawing/2014/main" id="{3C1D138B-DB81-BACC-2C11-8C4834813D70}"/>
+            </a:ext>
+          </a:extLst>
+        </p:cNvPr>
+        <p:cNvGrpSpPr/>
+        <p:nvPr/>
+      </p:nvGrpSpPr>
+      <p:grpSpPr>
+        <a:xfrm>
+          <a:off x="0" y="0"/>
+          <a:ext cx="0" cy="0"/>
+          <a:chOff x="0" y="0"/>
+          <a:chExt cx="0" cy="0"/>
+        </a:xfrm>
+      </p:grpSpPr>
+      <p:pic>
+        <p:nvPicPr>
+          <p:cNvPr id="6" name="Picture 5">
+            <a:extLst>
+              <a:ext uri="{FF2B5EF4-FFF2-40B4-BE49-F238E27FC236}">
+                <a16:creationId xmlns:a16="http://schemas.microsoft.com/office/drawing/2014/main" id="{4A77579C-A774-4756-5E01-76CDF85C7984}"/>
+              </a:ext>
+            </a:extLst>
+          </p:cNvPr>
+          <p:cNvPicPr>
+            <a:picLocks noChangeAspect="1"/>
+          </p:cNvPicPr>
+          <p:nvPr/>
+        </p:nvPicPr>
+        <p:blipFill>
+          <a:blip r:embed="rId2"/>
+          <a:srcRect b="3010"/>
+          <a:stretch>
+            <a:fillRect/>
+          </a:stretch>
+        </p:blipFill>
+        <p:spPr>
+          <a:xfrm>
+            <a:off x="205867" y="0"/>
+            <a:ext cx="8732265" cy="3862250"/>
+          </a:xfrm>
+          <a:prstGeom prst="rect">
+            <a:avLst/>
+          </a:prstGeom>
+        </p:spPr>
+      </p:pic>
+      <p:sp>
+        <p:nvSpPr>
+          <p:cNvPr id="4" name="TextBox 3">
+            <a:extLst>
+              <a:ext uri="{FF2B5EF4-FFF2-40B4-BE49-F238E27FC236}">
+                <a16:creationId xmlns:a16="http://schemas.microsoft.com/office/drawing/2014/main" id="{0D40C6A3-E240-FF96-72BA-CFD071D7C0A0}"/>
+              </a:ext>
+            </a:extLst>
+          </p:cNvPr>
+          <p:cNvSpPr txBox="1"/>
+          <p:nvPr/>
+        </p:nvSpPr>
+        <p:spPr>
+          <a:xfrm>
+            <a:off x="3253867" y="2558368"/>
+            <a:ext cx="8938133" cy="1077218"/>
+          </a:xfrm>
+          <a:prstGeom prst="rect">
+            <a:avLst/>
+          </a:prstGeom>
+          <a:noFill/>
+        </p:spPr>
+        <p:txBody>
+          <a:bodyPr wrap="square">
+            <a:spAutoFit/>
+          </a:bodyPr>
+          <a:lstStyle/>
+          <a:p>
+            <a:r>
+              <a:rPr lang="en-US" sz="3200" dirty="0">
+                <a:solidFill>
+                  <a:srgbClr val="274E13"/>
+                </a:solidFill>
+                <a:latin typeface="Arial" panose="020B0604020202020204" pitchFamily="34" charset="0"/>
+              </a:rPr>
+              <a:t>What outcome are you predicting/estimating/changing?</a:t>
+            </a:r>
+            <a:endParaRPr lang="en-US" sz="3200" dirty="0"/>
+          </a:p>
+        </p:txBody>
+      </p:sp>
+      <p:sp>
+        <p:nvSpPr>
+          <p:cNvPr id="5" name="Down Arrow 4">
+            <a:extLst>
+              <a:ext uri="{FF2B5EF4-FFF2-40B4-BE49-F238E27FC236}">
+                <a16:creationId xmlns:a16="http://schemas.microsoft.com/office/drawing/2014/main" id="{5BBCAADB-CFBA-1C5E-511F-2E56F3E51219}"/>
+              </a:ext>
+            </a:extLst>
+          </p:cNvPr>
+          <p:cNvSpPr/>
+          <p:nvPr/>
+        </p:nvSpPr>
+        <p:spPr>
+          <a:xfrm>
+            <a:off x="6206490" y="3686385"/>
+            <a:ext cx="708660" cy="994410"/>
+          </a:xfrm>
+          <a:prstGeom prst="downArrow">
+            <a:avLst/>
+          </a:prstGeom>
+        </p:spPr>
+        <p:style>
+          <a:lnRef idx="2">
+            <a:schemeClr val="accent1">
+              <a:shade val="15000"/>
+            </a:schemeClr>
+          </a:lnRef>
+          <a:fillRef idx="1">
+            <a:schemeClr val="accent1"/>
+          </a:fillRef>
+          <a:effectRef idx="0">
+            <a:schemeClr val="accent1"/>
+          </a:effectRef>
+          <a:fontRef idx="minor">
+            <a:schemeClr val="lt1"/>
+          </a:fontRef>
+        </p:style>
+        <p:txBody>
+          <a:bodyPr rtlCol="0" anchor="ctr"/>
+          <a:lstStyle/>
+          <a:p>
+            <a:pPr algn="ctr"/>
+            <a:endParaRPr lang="en-US"/>
+          </a:p>
+        </p:txBody>
+      </p:sp>
+      <p:sp>
+        <p:nvSpPr>
+          <p:cNvPr id="2" name="TextBox 1">
+            <a:extLst>
+              <a:ext uri="{FF2B5EF4-FFF2-40B4-BE49-F238E27FC236}">
+                <a16:creationId xmlns:a16="http://schemas.microsoft.com/office/drawing/2014/main" id="{33BD4A46-986D-C4A9-20A1-651F9BACB9C6}"/>
+              </a:ext>
+            </a:extLst>
+          </p:cNvPr>
+          <p:cNvSpPr txBox="1"/>
+          <p:nvPr/>
+        </p:nvSpPr>
+        <p:spPr>
+          <a:xfrm>
+            <a:off x="2542667" y="5036396"/>
+            <a:ext cx="11833733" cy="830997"/>
+          </a:xfrm>
+          <a:prstGeom prst="rect">
+            <a:avLst/>
+          </a:prstGeom>
+          <a:noFill/>
+        </p:spPr>
+        <p:txBody>
+          <a:bodyPr wrap="square" rtlCol="0">
+            <a:spAutoFit/>
+          </a:bodyPr>
+          <a:lstStyle/>
+          <a:p>
+            <a:r>
+              <a:rPr lang="en-US" sz="2400" dirty="0"/>
+              <a:t>Defines the what and when of the label for the ML models</a:t>
+            </a:r>
+          </a:p>
+          <a:p>
+            <a:endParaRPr lang="en-US" sz="2400" dirty="0"/>
+          </a:p>
+        </p:txBody>
+      </p:sp>
+    </p:spTree>
+    <p:extLst>
+      <p:ext uri="{BB962C8B-B14F-4D97-AF65-F5344CB8AC3E}">
+        <p14:creationId xmlns:p14="http://schemas.microsoft.com/office/powerpoint/2010/main" val="786448230"/>
+      </p:ext>
+    </p:extLst>
+  </p:cSld>
+  <p:clrMapOvr>
+    <a:masterClrMapping/>
+  </p:clrMapOvr>
+</p:sld>
+</file>
+
+<file path=ppt/slides/slide23.xml><?xml version="1.0" encoding="utf-8"?>
+<p:sld xmlns:a="http://schemas.openxmlformats.org/drawingml/2006/main" xmlns:r="http://schemas.openxmlformats.org/officeDocument/2006/relationships" xmlns:p="http://schemas.openxmlformats.org/presentationml/2006/main">
+  <p:cSld>
+    <p:spTree>
+      <p:nvGrpSpPr>
+        <p:cNvPr id="1" name="">
+          <a:extLst>
+            <a:ext uri="{FF2B5EF4-FFF2-40B4-BE49-F238E27FC236}">
+              <a16:creationId xmlns:a16="http://schemas.microsoft.com/office/drawing/2014/main" id="{B052F353-055F-633E-05C7-4CD2A127468A}"/>
+            </a:ext>
+          </a:extLst>
+        </p:cNvPr>
+        <p:cNvGrpSpPr/>
+        <p:nvPr/>
+      </p:nvGrpSpPr>
+      <p:grpSpPr>
+        <a:xfrm>
+          <a:off x="0" y="0"/>
+          <a:ext cx="0" cy="0"/>
+          <a:chOff x="0" y="0"/>
+          <a:chExt cx="0" cy="0"/>
+        </a:xfrm>
+      </p:grpSpPr>
+      <p:pic>
+        <p:nvPicPr>
+          <p:cNvPr id="6" name="Picture 5">
+            <a:extLst>
+              <a:ext uri="{FF2B5EF4-FFF2-40B4-BE49-F238E27FC236}">
+                <a16:creationId xmlns:a16="http://schemas.microsoft.com/office/drawing/2014/main" id="{B4E955B1-5AD5-A189-721F-6D8883CD7ACC}"/>
+              </a:ext>
+            </a:extLst>
+          </p:cNvPr>
+          <p:cNvPicPr>
+            <a:picLocks noChangeAspect="1"/>
+          </p:cNvPicPr>
+          <p:nvPr/>
+        </p:nvPicPr>
+        <p:blipFill>
+          <a:blip r:embed="rId2"/>
+          <a:srcRect b="3010"/>
+          <a:stretch>
+            <a:fillRect/>
+          </a:stretch>
+        </p:blipFill>
+        <p:spPr>
+          <a:xfrm>
+            <a:off x="205867" y="0"/>
+            <a:ext cx="8732265" cy="3862250"/>
+          </a:xfrm>
+          <a:prstGeom prst="rect">
+            <a:avLst/>
+          </a:prstGeom>
+        </p:spPr>
+      </p:pic>
+      <p:sp>
+        <p:nvSpPr>
+          <p:cNvPr id="4" name="TextBox 3">
+            <a:extLst>
+              <a:ext uri="{FF2B5EF4-FFF2-40B4-BE49-F238E27FC236}">
+                <a16:creationId xmlns:a16="http://schemas.microsoft.com/office/drawing/2014/main" id="{EBD7C139-6CDD-2C22-B9A5-AEFA8764AACC}"/>
+              </a:ext>
+            </a:extLst>
+          </p:cNvPr>
+          <p:cNvSpPr txBox="1"/>
+          <p:nvPr/>
+        </p:nvSpPr>
+        <p:spPr>
+          <a:xfrm>
+            <a:off x="3253867" y="1620583"/>
+            <a:ext cx="8938133" cy="1569660"/>
+          </a:xfrm>
+          <a:prstGeom prst="rect">
+            <a:avLst/>
+          </a:prstGeom>
+          <a:noFill/>
+        </p:spPr>
+        <p:txBody>
+          <a:bodyPr wrap="square">
+            <a:spAutoFit/>
+          </a:bodyPr>
+          <a:lstStyle/>
+          <a:p>
+            <a:br>
+              <a:rPr lang="en-US" sz="3200" b="0" dirty="0">
+                <a:effectLst/>
+              </a:rPr>
+            </a:br>
+            <a:br>
+              <a:rPr lang="en-US" sz="3200" dirty="0"/>
+            </a:br>
+            <a:r>
+              <a:rPr lang="en-US" sz="3200" dirty="0">
+                <a:solidFill>
+                  <a:srgbClr val="FF00FF"/>
+                </a:solidFill>
+                <a:latin typeface="Arial" panose="020B0604020202020204" pitchFamily="34" charset="0"/>
+              </a:rPr>
+              <a:t>What is the output?</a:t>
+            </a:r>
+            <a:endParaRPr lang="en-US" sz="3200" dirty="0"/>
+          </a:p>
+        </p:txBody>
+      </p:sp>
+      <p:sp>
+        <p:nvSpPr>
+          <p:cNvPr id="5" name="Down Arrow 4">
+            <a:extLst>
+              <a:ext uri="{FF2B5EF4-FFF2-40B4-BE49-F238E27FC236}">
+                <a16:creationId xmlns:a16="http://schemas.microsoft.com/office/drawing/2014/main" id="{CE7950D3-703F-8AB6-08F2-41052249BD9A}"/>
+              </a:ext>
+            </a:extLst>
+          </p:cNvPr>
+          <p:cNvSpPr/>
+          <p:nvPr/>
+        </p:nvSpPr>
+        <p:spPr>
+          <a:xfrm>
+            <a:off x="6206490" y="3533988"/>
+            <a:ext cx="708660" cy="994410"/>
+          </a:xfrm>
+          <a:prstGeom prst="downArrow">
+            <a:avLst/>
+          </a:prstGeom>
+        </p:spPr>
+        <p:style>
+          <a:lnRef idx="2">
+            <a:schemeClr val="accent1">
+              <a:shade val="15000"/>
+            </a:schemeClr>
+          </a:lnRef>
+          <a:fillRef idx="1">
+            <a:schemeClr val="accent1"/>
+          </a:fillRef>
+          <a:effectRef idx="0">
+            <a:schemeClr val="accent1"/>
+          </a:effectRef>
+          <a:fontRef idx="minor">
+            <a:schemeClr val="lt1"/>
+          </a:fontRef>
+        </p:style>
+        <p:txBody>
+          <a:bodyPr rtlCol="0" anchor="ctr"/>
+          <a:lstStyle/>
+          <a:p>
+            <a:pPr algn="ctr"/>
+            <a:endParaRPr lang="en-US"/>
+          </a:p>
+        </p:txBody>
+      </p:sp>
+      <p:sp>
+        <p:nvSpPr>
+          <p:cNvPr id="2" name="TextBox 1">
+            <a:extLst>
+              <a:ext uri="{FF2B5EF4-FFF2-40B4-BE49-F238E27FC236}">
+                <a16:creationId xmlns:a16="http://schemas.microsoft.com/office/drawing/2014/main" id="{F1E2671C-05B1-A3DF-4861-27E7377BE888}"/>
+              </a:ext>
+            </a:extLst>
+          </p:cNvPr>
+          <p:cNvSpPr txBox="1"/>
+          <p:nvPr/>
+        </p:nvSpPr>
+        <p:spPr>
+          <a:xfrm>
+            <a:off x="205867" y="4782396"/>
+            <a:ext cx="11833733" cy="1569660"/>
+          </a:xfrm>
+          <a:prstGeom prst="rect">
+            <a:avLst/>
+          </a:prstGeom>
+          <a:noFill/>
+        </p:spPr>
+        <p:txBody>
+          <a:bodyPr wrap="square" rtlCol="0">
+            <a:spAutoFit/>
+          </a:bodyPr>
+          <a:lstStyle/>
+          <a:p>
+            <a:r>
+              <a:rPr lang="en-US" sz="2400" dirty="0"/>
+              <a:t>What the model needs to produce for the end-users</a:t>
+            </a:r>
+          </a:p>
+          <a:p>
+            <a:endParaRPr lang="en-US" sz="2400" dirty="0"/>
+          </a:p>
+          <a:p>
+            <a:r>
+              <a:rPr lang="en-US" sz="2400" dirty="0"/>
+              <a:t>Also informs evaluation/model selection metrics at the model level</a:t>
+            </a:r>
+          </a:p>
+          <a:p>
+            <a:endParaRPr lang="en-US" sz="2400" dirty="0"/>
+          </a:p>
+        </p:txBody>
+      </p:sp>
+    </p:spTree>
+    <p:extLst>
+      <p:ext uri="{BB962C8B-B14F-4D97-AF65-F5344CB8AC3E}">
+        <p14:creationId xmlns:p14="http://schemas.microsoft.com/office/powerpoint/2010/main" val="3191964003"/>
+      </p:ext>
+    </p:extLst>
+  </p:cSld>
+  <p:clrMapOvr>
+    <a:masterClrMapping/>
+  </p:clrMapOvr>
+</p:sld>
+</file>
+
+<file path=ppt/slides/slide24.xml><?xml version="1.0" encoding="utf-8"?>
+<p:sld xmlns:a="http://schemas.openxmlformats.org/drawingml/2006/main" xmlns:r="http://schemas.openxmlformats.org/officeDocument/2006/relationships" xmlns:p="http://schemas.openxmlformats.org/presentationml/2006/main">
+  <p:cSld>
+    <p:spTree>
+      <p:nvGrpSpPr>
+        <p:cNvPr id="1" name=""/>
+        <p:cNvGrpSpPr/>
+        <p:nvPr/>
+      </p:nvGrpSpPr>
+      <p:grpSpPr>
+        <a:xfrm>
+          <a:off x="0" y="0"/>
+          <a:ext cx="0" cy="0"/>
+          <a:chOff x="0" y="0"/>
+          <a:chExt cx="0" cy="0"/>
+        </a:xfrm>
+      </p:grpSpPr>
+      <p:sp>
+        <p:nvSpPr>
+          <p:cNvPr id="2" name="Title 1">
+            <a:extLst>
+              <a:ext uri="{FF2B5EF4-FFF2-40B4-BE49-F238E27FC236}">
+                <a16:creationId xmlns:a16="http://schemas.microsoft.com/office/drawing/2014/main" id="{D301BA0D-10F8-92D2-C9D3-52205F55F155}"/>
+              </a:ext>
+            </a:extLst>
+          </p:cNvPr>
+          <p:cNvSpPr>
+            <a:spLocks noGrp="1"/>
+          </p:cNvSpPr>
+          <p:nvPr>
+            <p:ph type="title"/>
+          </p:nvPr>
+        </p:nvSpPr>
+        <p:spPr/>
+        <p:txBody>
+          <a:bodyPr/>
+          <a:lstStyle/>
+          <a:p>
+            <a:r>
+              <a:rPr lang="en-US" sz="3200" dirty="0"/>
+              <a:t>Additional examples from real projects (will not cover in class but may be helpful)</a:t>
+            </a:r>
+          </a:p>
+        </p:txBody>
+      </p:sp>
+    </p:spTree>
+    <p:extLst>
+      <p:ext uri="{BB962C8B-B14F-4D97-AF65-F5344CB8AC3E}">
+        <p14:creationId xmlns:p14="http://schemas.microsoft.com/office/powerpoint/2010/main" val="1039242333"/>
+      </p:ext>
+    </p:extLst>
+  </p:cSld>
+  <p:clrMapOvr>
+    <a:masterClrMapping/>
+  </p:clrMapOvr>
+</p:sld>
+</file>
+
+<file path=ppt/slides/slide25.xml><?xml version="1.0" encoding="utf-8"?>
+<p:sld xmlns:a="http://schemas.openxmlformats.org/drawingml/2006/main" xmlns:r="http://schemas.openxmlformats.org/officeDocument/2006/relationships" xmlns:p="http://schemas.openxmlformats.org/presentationml/2006/main">
+  <p:cSld>
+    <p:spTree>
+      <p:nvGrpSpPr>
         <p:cNvPr id="1" name="Shape 144"/>
         <p:cNvGrpSpPr/>
         <p:nvPr/>
@@ -12423,7 +13406,7 @@
 </p:sld>
 </file>
 
-<file path=ppt/slides/slide21.xml><?xml version="1.0" encoding="utf-8"?>
+<file path=ppt/slides/slide26.xml><?xml version="1.0" encoding="utf-8"?>
 <p:sld xmlns:a="http://schemas.openxmlformats.org/drawingml/2006/main" xmlns:r="http://schemas.openxmlformats.org/officeDocument/2006/relationships" xmlns:p="http://schemas.openxmlformats.org/presentationml/2006/main">
   <p:cSld>
     <p:spTree>
@@ -12905,7 +13888,7 @@
 </p:sld>
 </file>
 
-<file path=ppt/slides/slide22.xml><?xml version="1.0" encoding="utf-8"?>
+<file path=ppt/slides/slide27.xml><?xml version="1.0" encoding="utf-8"?>
 <p:sld xmlns:a="http://schemas.openxmlformats.org/drawingml/2006/main" xmlns:r="http://schemas.openxmlformats.org/officeDocument/2006/relationships" xmlns:p="http://schemas.openxmlformats.org/presentationml/2006/main">
   <p:cSld>
     <p:spTree>
@@ -13362,7 +14345,7 @@
 </p:sld>
 </file>
 
-<file path=ppt/slides/slide23.xml><?xml version="1.0" encoding="utf-8"?>
+<file path=ppt/slides/slide28.xml><?xml version="1.0" encoding="utf-8"?>
 <p:sld xmlns:a="http://schemas.openxmlformats.org/drawingml/2006/main" xmlns:r="http://schemas.openxmlformats.org/officeDocument/2006/relationships" xmlns:p="http://schemas.openxmlformats.org/presentationml/2006/main">
   <p:cSld>
     <p:spTree>
@@ -13818,7 +14801,7 @@
 </p:sld>
 </file>
 
-<file path=ppt/slides/slide24.xml><?xml version="1.0" encoding="utf-8"?>
+<file path=ppt/slides/slide29.xml><?xml version="1.0" encoding="utf-8"?>
 <p:sld xmlns:a="http://schemas.openxmlformats.org/drawingml/2006/main" xmlns:r="http://schemas.openxmlformats.org/officeDocument/2006/relationships" xmlns:p="http://schemas.openxmlformats.org/presentationml/2006/main">
   <p:cSld>
     <p:spTree>
@@ -13912,7 +14895,136 @@
 </p:sld>
 </file>
 
-<file path=ppt/slides/slide25.xml><?xml version="1.0" encoding="utf-8"?>
+<file path=ppt/slides/slide3.xml><?xml version="1.0" encoding="utf-8"?>
+<p:sld xmlns:a="http://schemas.openxmlformats.org/drawingml/2006/main" xmlns:r="http://schemas.openxmlformats.org/officeDocument/2006/relationships" xmlns:p="http://schemas.openxmlformats.org/presentationml/2006/main">
+  <p:cSld>
+    <p:spTree>
+      <p:nvGrpSpPr>
+        <p:cNvPr id="1" name=""/>
+        <p:cNvGrpSpPr/>
+        <p:nvPr/>
+      </p:nvGrpSpPr>
+      <p:grpSpPr>
+        <a:xfrm>
+          <a:off x="0" y="0"/>
+          <a:ext cx="0" cy="0"/>
+          <a:chOff x="0" y="0"/>
+          <a:chExt cx="0" cy="0"/>
+        </a:xfrm>
+      </p:grpSpPr>
+      <p:sp>
+        <p:nvSpPr>
+          <p:cNvPr id="2" name="Title 1">
+            <a:extLst>
+              <a:ext uri="{FF2B5EF4-FFF2-40B4-BE49-F238E27FC236}">
+                <a16:creationId xmlns:a16="http://schemas.microsoft.com/office/drawing/2014/main" id="{94CF2A94-A63F-6149-AA28-2E35B60E3D3E}"/>
+              </a:ext>
+            </a:extLst>
+          </p:cNvPr>
+          <p:cNvSpPr>
+            <a:spLocks noGrp="1"/>
+          </p:cNvSpPr>
+          <p:nvPr>
+            <p:ph type="title"/>
+          </p:nvPr>
+        </p:nvSpPr>
+        <p:spPr/>
+        <p:txBody>
+          <a:bodyPr/>
+          <a:lstStyle/>
+          <a:p>
+            <a:endParaRPr lang="en-US"/>
+          </a:p>
+        </p:txBody>
+      </p:sp>
+      <p:graphicFrame>
+        <p:nvGraphicFramePr>
+          <p:cNvPr id="3" name="Diagram 2">
+            <a:extLst>
+              <a:ext uri="{FF2B5EF4-FFF2-40B4-BE49-F238E27FC236}">
+                <a16:creationId xmlns:a16="http://schemas.microsoft.com/office/drawing/2014/main" id="{8E902576-68A9-6E48-B0FE-5B1889953DC8}"/>
+              </a:ext>
+            </a:extLst>
+          </p:cNvPr>
+          <p:cNvGraphicFramePr/>
+          <p:nvPr/>
+        </p:nvGraphicFramePr>
+        <p:xfrm>
+          <a:off x="180467" y="0"/>
+          <a:ext cx="11776400" cy="6858000"/>
+        </p:xfrm>
+        <a:graphic>
+          <a:graphicData uri="http://schemas.openxmlformats.org/drawingml/2006/diagram">
+            <dgm:relIds xmlns:dgm="http://schemas.openxmlformats.org/drawingml/2006/diagram" xmlns:r="http://schemas.openxmlformats.org/officeDocument/2006/relationships" r:dm="rId2" r:lo="rId3" r:qs="rId4" r:cs="rId5"/>
+          </a:graphicData>
+        </a:graphic>
+      </p:graphicFrame>
+      <p:sp>
+        <p:nvSpPr>
+          <p:cNvPr id="4" name="Rectangle 3">
+            <a:extLst>
+              <a:ext uri="{FF2B5EF4-FFF2-40B4-BE49-F238E27FC236}">
+                <a16:creationId xmlns:a16="http://schemas.microsoft.com/office/drawing/2014/main" id="{E2C99BF2-C81A-5246-89D3-E49BCDCAD699}"/>
+              </a:ext>
+            </a:extLst>
+          </p:cNvPr>
+          <p:cNvSpPr/>
+          <p:nvPr/>
+        </p:nvSpPr>
+        <p:spPr>
+          <a:xfrm>
+            <a:off x="9477338" y="263929"/>
+            <a:ext cx="2534195" cy="1789611"/>
+          </a:xfrm>
+          <a:prstGeom prst="rect">
+            <a:avLst/>
+          </a:prstGeom>
+          <a:noFill/>
+          <a:ln w="76200">
+            <a:solidFill>
+              <a:srgbClr val="C00000"/>
+            </a:solidFill>
+          </a:ln>
+        </p:spPr>
+        <p:style>
+          <a:lnRef idx="2">
+            <a:schemeClr val="accent1">
+              <a:shade val="50000"/>
+            </a:schemeClr>
+          </a:lnRef>
+          <a:fillRef idx="1">
+            <a:schemeClr val="accent1"/>
+          </a:fillRef>
+          <a:effectRef idx="0">
+            <a:schemeClr val="accent1"/>
+          </a:effectRef>
+          <a:fontRef idx="minor">
+            <a:schemeClr val="lt1"/>
+          </a:fontRef>
+        </p:style>
+        <p:txBody>
+          <a:bodyPr rtlCol="0" anchor="ctr"/>
+          <a:lstStyle/>
+          <a:p>
+            <a:pPr algn="ctr"/>
+            <a:endParaRPr lang="en-US"/>
+          </a:p>
+        </p:txBody>
+      </p:sp>
+    </p:spTree>
+    <p:extLst>
+      <p:ext uri="{BB962C8B-B14F-4D97-AF65-F5344CB8AC3E}">
+        <p14:creationId xmlns:p14="http://schemas.microsoft.com/office/powerpoint/2010/main" val="2624855364"/>
+      </p:ext>
+    </p:extLst>
+  </p:cSld>
+  <p:clrMapOvr>
+    <a:masterClrMapping/>
+  </p:clrMapOvr>
+</p:sld>
+</file>
+
+<file path=ppt/slides/slide30.xml><?xml version="1.0" encoding="utf-8"?>
 <p:sld xmlns:a="http://schemas.openxmlformats.org/drawingml/2006/main" xmlns:r="http://schemas.openxmlformats.org/officeDocument/2006/relationships" xmlns:p="http://schemas.openxmlformats.org/presentationml/2006/main">
   <p:cSld>
     <p:spTree>
@@ -13988,9 +15100,10 @@
           <a:p>
             <a:pPr lvl="1"/>
             <a:r>
-              <a:rPr lang="en-US" dirty="0"/>
+              <a:rPr lang="en-US"/>
               <a:t>What expected value would you get if you just choose at random (based on the data distribution)?</a:t>
             </a:r>
+            <a:endParaRPr lang="en-US" dirty="0"/>
           </a:p>
         </p:txBody>
       </p:sp>
@@ -14016,9 +15129,10 @@
           <a:lstStyle/>
           <a:p>
             <a:r>
-              <a:rPr lang="en-US" dirty="0"/>
+              <a:rPr lang="en-US"/>
               <a:t>Baseline Options</a:t>
             </a:r>
+            <a:endParaRPr lang="en-US" dirty="0"/>
           </a:p>
         </p:txBody>
       </p:sp>
@@ -14035,7 +15149,7 @@
 </p:sld>
 </file>
 
-<file path=ppt/slides/slide26.xml><?xml version="1.0" encoding="utf-8"?>
+<file path=ppt/slides/slide31.xml><?xml version="1.0" encoding="utf-8"?>
 <p:sld xmlns:a="http://schemas.openxmlformats.org/drawingml/2006/main" xmlns:r="http://schemas.openxmlformats.org/officeDocument/2006/relationships" xmlns:p="http://schemas.openxmlformats.org/presentationml/2006/main" show="0">
   <p:cSld>
     <p:spTree>
@@ -14160,7 +15274,7 @@
 </p:sld>
 </file>
 
-<file path=ppt/slides/slide27.xml><?xml version="1.0" encoding="utf-8"?>
+<file path=ppt/slides/slide32.xml><?xml version="1.0" encoding="utf-8"?>
 <p:sld xmlns:a="http://schemas.openxmlformats.org/drawingml/2006/main" xmlns:r="http://schemas.openxmlformats.org/officeDocument/2006/relationships" xmlns:p="http://schemas.openxmlformats.org/presentationml/2006/main" showMasterSp="0">
   <p:cSld>
     <p:bg>
@@ -14315,12 +15429,12 @@
           <a:lstStyle/>
           <a:p>
             <a:r>
-              <a:rPr lang="en-US" sz="3700" b="1">
+              <a:rPr lang="en-US" sz="2700" b="1">
                 <a:solidFill>
                   <a:srgbClr val="000000"/>
                 </a:solidFill>
               </a:rPr>
-              <a:t>For a social media post recommender baseline method that doesn't require using any ML?</a:t>
+              <a:t>What are some good baseline approaches that don’t require using any ML for a social media post recommender?</a:t>
             </a:r>
           </a:p>
         </p:txBody>
@@ -14685,7 +15799,7 @@
 </p:sld>
 </file>
 
-<file path=ppt/slides/slide28.xml><?xml version="1.0" encoding="utf-8"?>
+<file path=ppt/slides/slide33.xml><?xml version="1.0" encoding="utf-8"?>
 <p:sld xmlns:a="http://schemas.openxmlformats.org/drawingml/2006/main" xmlns:r="http://schemas.openxmlformats.org/officeDocument/2006/relationships" xmlns:p="http://schemas.openxmlformats.org/presentationml/2006/main">
   <p:cSld>
     <p:spTree>
@@ -14808,7 +15922,7 @@
 </p:sld>
 </file>
 
-<file path=ppt/slides/slide29.xml><?xml version="1.0" encoding="utf-8"?>
+<file path=ppt/slides/slide34.xml><?xml version="1.0" encoding="utf-8"?>
 <p:sld xmlns:a="http://schemas.openxmlformats.org/drawingml/2006/main" xmlns:r="http://schemas.openxmlformats.org/officeDocument/2006/relationships" xmlns:p="http://schemas.openxmlformats.org/presentationml/2006/main">
   <p:cSld>
     <p:spTree>
@@ -14851,7 +15965,67 @@
           <a:bodyPr/>
           <a:lstStyle/>
           <a:p>
-            <a:endParaRPr lang="en-US"/>
+            <a:pPr marL="114300" indent="0">
+              <a:buNone/>
+            </a:pPr>
+            <a:r>
+              <a:rPr lang="en-US" dirty="0"/>
+              <a:t>Non-ML based</a:t>
+            </a:r>
+          </a:p>
+          <a:p>
+            <a:pPr marL="114300" indent="0">
+              <a:buNone/>
+            </a:pPr>
+            <a:endParaRPr lang="en-US" dirty="0"/>
+          </a:p>
+          <a:p>
+            <a:pPr marL="114300" indent="0">
+              <a:buNone/>
+            </a:pPr>
+            <a:endParaRPr lang="en-US" dirty="0"/>
+          </a:p>
+          <a:p>
+            <a:pPr marL="114300" indent="0">
+              <a:buNone/>
+            </a:pPr>
+            <a:endParaRPr lang="en-US" dirty="0"/>
+          </a:p>
+          <a:p>
+            <a:pPr marL="114300" indent="0">
+              <a:buNone/>
+            </a:pPr>
+            <a:r>
+              <a:rPr lang="en-US" dirty="0"/>
+              <a:t>Existing approaches</a:t>
+            </a:r>
+          </a:p>
+          <a:p>
+            <a:pPr marL="114300" indent="0">
+              <a:buNone/>
+            </a:pPr>
+            <a:endParaRPr lang="en-US" dirty="0"/>
+          </a:p>
+          <a:p>
+            <a:pPr marL="114300" indent="0">
+              <a:buNone/>
+            </a:pPr>
+            <a:endParaRPr lang="en-US" dirty="0"/>
+          </a:p>
+          <a:p>
+            <a:pPr marL="114300" indent="0">
+              <a:buNone/>
+            </a:pPr>
+            <a:endParaRPr lang="en-US" dirty="0"/>
+          </a:p>
+          <a:p>
+            <a:pPr marL="114300" indent="0">
+              <a:buNone/>
+            </a:pPr>
+            <a:r>
+              <a:rPr lang="en-US" dirty="0"/>
+              <a:t>Simple ML</a:t>
+            </a:r>
           </a:p>
         </p:txBody>
       </p:sp>
@@ -14896,136 +16070,7 @@
 </p:sld>
 </file>
 
-<file path=ppt/slides/slide3.xml><?xml version="1.0" encoding="utf-8"?>
-<p:sld xmlns:a="http://schemas.openxmlformats.org/drawingml/2006/main" xmlns:r="http://schemas.openxmlformats.org/officeDocument/2006/relationships" xmlns:p="http://schemas.openxmlformats.org/presentationml/2006/main">
-  <p:cSld>
-    <p:spTree>
-      <p:nvGrpSpPr>
-        <p:cNvPr id="1" name=""/>
-        <p:cNvGrpSpPr/>
-        <p:nvPr/>
-      </p:nvGrpSpPr>
-      <p:grpSpPr>
-        <a:xfrm>
-          <a:off x="0" y="0"/>
-          <a:ext cx="0" cy="0"/>
-          <a:chOff x="0" y="0"/>
-          <a:chExt cx="0" cy="0"/>
-        </a:xfrm>
-      </p:grpSpPr>
-      <p:sp>
-        <p:nvSpPr>
-          <p:cNvPr id="2" name="Title 1">
-            <a:extLst>
-              <a:ext uri="{FF2B5EF4-FFF2-40B4-BE49-F238E27FC236}">
-                <a16:creationId xmlns:a16="http://schemas.microsoft.com/office/drawing/2014/main" id="{94CF2A94-A63F-6149-AA28-2E35B60E3D3E}"/>
-              </a:ext>
-            </a:extLst>
-          </p:cNvPr>
-          <p:cNvSpPr>
-            <a:spLocks noGrp="1"/>
-          </p:cNvSpPr>
-          <p:nvPr>
-            <p:ph type="title"/>
-          </p:nvPr>
-        </p:nvSpPr>
-        <p:spPr/>
-        <p:txBody>
-          <a:bodyPr/>
-          <a:lstStyle/>
-          <a:p>
-            <a:endParaRPr lang="en-US"/>
-          </a:p>
-        </p:txBody>
-      </p:sp>
-      <p:graphicFrame>
-        <p:nvGraphicFramePr>
-          <p:cNvPr id="3" name="Diagram 2">
-            <a:extLst>
-              <a:ext uri="{FF2B5EF4-FFF2-40B4-BE49-F238E27FC236}">
-                <a16:creationId xmlns:a16="http://schemas.microsoft.com/office/drawing/2014/main" id="{8E902576-68A9-6E48-B0FE-5B1889953DC8}"/>
-              </a:ext>
-            </a:extLst>
-          </p:cNvPr>
-          <p:cNvGraphicFramePr/>
-          <p:nvPr/>
-        </p:nvGraphicFramePr>
-        <p:xfrm>
-          <a:off x="180467" y="0"/>
-          <a:ext cx="11776400" cy="6858000"/>
-        </p:xfrm>
-        <a:graphic>
-          <a:graphicData uri="http://schemas.openxmlformats.org/drawingml/2006/diagram">
-            <dgm:relIds xmlns:dgm="http://schemas.openxmlformats.org/drawingml/2006/diagram" xmlns:r="http://schemas.openxmlformats.org/officeDocument/2006/relationships" r:dm="rId2" r:lo="rId3" r:qs="rId4" r:cs="rId5"/>
-          </a:graphicData>
-        </a:graphic>
-      </p:graphicFrame>
-      <p:sp>
-        <p:nvSpPr>
-          <p:cNvPr id="4" name="Rectangle 3">
-            <a:extLst>
-              <a:ext uri="{FF2B5EF4-FFF2-40B4-BE49-F238E27FC236}">
-                <a16:creationId xmlns:a16="http://schemas.microsoft.com/office/drawing/2014/main" id="{E2C99BF2-C81A-5246-89D3-E49BCDCAD699}"/>
-              </a:ext>
-            </a:extLst>
-          </p:cNvPr>
-          <p:cNvSpPr/>
-          <p:nvPr/>
-        </p:nvSpPr>
-        <p:spPr>
-          <a:xfrm>
-            <a:off x="9477338" y="263929"/>
-            <a:ext cx="2534195" cy="1789611"/>
-          </a:xfrm>
-          <a:prstGeom prst="rect">
-            <a:avLst/>
-          </a:prstGeom>
-          <a:noFill/>
-          <a:ln w="76200">
-            <a:solidFill>
-              <a:srgbClr val="C00000"/>
-            </a:solidFill>
-          </a:ln>
-        </p:spPr>
-        <p:style>
-          <a:lnRef idx="2">
-            <a:schemeClr val="accent1">
-              <a:shade val="50000"/>
-            </a:schemeClr>
-          </a:lnRef>
-          <a:fillRef idx="1">
-            <a:schemeClr val="accent1"/>
-          </a:fillRef>
-          <a:effectRef idx="0">
-            <a:schemeClr val="accent1"/>
-          </a:effectRef>
-          <a:fontRef idx="minor">
-            <a:schemeClr val="lt1"/>
-          </a:fontRef>
-        </p:style>
-        <p:txBody>
-          <a:bodyPr rtlCol="0" anchor="ctr"/>
-          <a:lstStyle/>
-          <a:p>
-            <a:pPr algn="ctr"/>
-            <a:endParaRPr lang="en-US"/>
-          </a:p>
-        </p:txBody>
-      </p:sp>
-    </p:spTree>
-    <p:extLst>
-      <p:ext uri="{BB962C8B-B14F-4D97-AF65-F5344CB8AC3E}">
-        <p14:creationId xmlns:p14="http://schemas.microsoft.com/office/powerpoint/2010/main" val="2624855364"/>
-      </p:ext>
-    </p:extLst>
-  </p:cSld>
-  <p:clrMapOvr>
-    <a:masterClrMapping/>
-  </p:clrMapOvr>
-</p:sld>
-</file>
-
-<file path=ppt/slides/slide30.xml><?xml version="1.0" encoding="utf-8"?>
+<file path=ppt/slides/slide35.xml><?xml version="1.0" encoding="utf-8"?>
 <p:sld xmlns:a="http://schemas.openxmlformats.org/drawingml/2006/main" xmlns:r="http://schemas.openxmlformats.org/officeDocument/2006/relationships" xmlns:p="http://schemas.openxmlformats.org/presentationml/2006/main">
   <p:cSld>
     <p:spTree>
@@ -15164,8 +16209,21 @@
                   <a:srgbClr val="FFFF00"/>
                 </a:highlight>
               </a:rPr>
-              <a:t>Readings for Tuesday</a:t>
-            </a:r>
+              <a:t>Readings </a:t>
+            </a:r>
+            <a:r>
+              <a:rPr lang="en-US">
+                <a:highlight>
+                  <a:srgbClr val="FFFF00"/>
+                </a:highlight>
+              </a:rPr>
+              <a:t>for Thursday</a:t>
+            </a:r>
+            <a:endParaRPr lang="en-US" dirty="0">
+              <a:highlight>
+                <a:srgbClr val="FFFF00"/>
+              </a:highlight>
+            </a:endParaRPr>
           </a:p>
         </p:txBody>
       </p:sp>
@@ -15937,7 +16995,7 @@
 <p:tagLst xmlns:a="http://schemas.openxmlformats.org/drawingml/2006/main" xmlns:r="http://schemas.openxmlformats.org/officeDocument/2006/relationships" xmlns:p="http://schemas.openxmlformats.org/presentationml/2006/main">
   <p:tag name="SLIDO_TYPE" val="SlidoPoll"/>
   <p:tag name="SLIDO_POLL_UUID" val="6c5a72f9-54d3-4dd2-ae37-6892c8d4fce8"/>
-  <p:tag name="SLIDO_TIMELINE" val="W3sic2hvd1Jlc3VsdHMiOmZhbHNlLCJwb2xsUXVlc3Rpb25VdWlkIjoiNTUzZWQ2NjMtZjVjNy00NWM4LWJkNTMtYmU1ZWY4YzQ2ZjE2In0seyJzaG93UmVzdWx0cyI6dHJ1ZSwicG9sbFF1ZXN0aW9uVXVpZCI6IjU1M2VkNjYzLWY1YzctNDVjOC1iZDUzLWJlNWVmOGM0NmYxNiJ9XQ=="/>
+  <p:tag name="SLIDO_TIMELINE" val="W3sicG9sbFF1ZXN0aW9uVXVpZCI6IjU1M2VkNjYzLWY1YzctNDVjOC1iZDUzLWJlNWVmOGM0NmYxNiIsInNob3dSZXN1bHRzIjpmYWxzZX0seyJwb2xsUXVlc3Rpb25VdWlkIjoiNTUzZWQ2NjMtZjVjNy00NWM4LWJkNTMtYmU1ZWY4YzQ2ZjE2Iiwic2hvd1Jlc3VsdHMiOnRydWV9XQ=="/>
 </p:tagLst>
 </file>
 
